--- a/docs/h3_simulator_presentation.pptx
+++ b/docs/h3_simulator_presentation.pptx
@@ -28,6 +28,10 @@
     <p:sldId id="276" r:id="rId22"/>
     <p:sldId id="277" r:id="rId23"/>
     <p:sldId id="278" r:id="rId24"/>
+    <p:sldId id="279" r:id="rId25"/>
+    <p:sldId id="280" r:id="rId26"/>
+    <p:sldId id="281" r:id="rId27"/>
+    <p:sldId id="282" r:id="rId28"/>
   </p:sldIdLst>
   <p:sldSz cx="12192000" cy="6858000"/>
   <p:notesSz cx="6858000" cy="12192000"/>
@@ -358,7 +362,7 @@
                 </a:solidFill>
                 <a:latin typeface="Calibri"/>
               </a:rPr>
-              <a:t>44</a:t>
+              <a:t>46</a:t>
             </a:r>
           </a:p>
           <a:p>
@@ -415,7 +419,7 @@
                 </a:solidFill>
                 <a:latin typeface="Calibri"/>
               </a:rPr>
-              <a:t>10,600</a:t>
+              <a:t>11,000</a:t>
             </a:r>
           </a:p>
           <a:p>
@@ -472,7 +476,7 @@
                 </a:solidFill>
                 <a:latin typeface="Calibri"/>
               </a:rPr>
-              <a:t>197</a:t>
+              <a:t>207</a:t>
             </a:r>
           </a:p>
           <a:p>
@@ -4342,7 +4346,7 @@
                 </a:solidFill>
                 <a:latin typeface="Calibri"/>
               </a:rPr>
-              <a:t>Testing and results</a:t>
+              <a:t>Running real workloads</a:t>
             </a:r>
           </a:p>
         </p:txBody>
@@ -4382,7 +4386,7 @@
                 </a:solidFill>
                 <a:latin typeface="Calibri"/>
               </a:rPr>
-              <a:t>What works, what does not, and what it cost</a:t>
+              <a:t>The problem with real traces, and how we fixed it</a:t>
             </a:r>
           </a:p>
         </p:txBody>
@@ -4549,7 +4553,7 @@
                 </a:solidFill>
                 <a:latin typeface="Calibri"/>
               </a:rPr>
-              <a:t>TESTING</a:t>
+              <a:t>REAL TRACES</a:t>
             </a:r>
           </a:p>
         </p:txBody>
@@ -4589,7 +4593,7 @@
                 </a:solidFill>
                 <a:latin typeface="Calibri"/>
               </a:rPr>
-              <a:t>How we tested it</a:t>
+              <a:t>A problem we found when trying real workloads</a:t>
             </a:r>
           </a:p>
         </p:txBody>
@@ -4714,69 +4718,25 @@
         <p:spPr>
           <a:xfrm>
             <a:off x="731520" y="1560000"/>
-            <a:ext cx="5214480" cy="340000"/>
-          </a:xfrm>
-          <a:prstGeom prst="rect">
-            <a:avLst/>
-          </a:prstGeom>
-          <a:solidFill>
-            <a:srgbClr val="1F3864"/>
-          </a:solidFill>
-          <a:ln>
-            <a:noFill/>
-          </a:ln>
-        </p:spPr>
-        <p:txBody>
-          <a:bodyPr wrap="square" lIns="114300" tIns="60960" rIns="114300" bIns="60960" anchor="t">
-            <a:normAutofit/>
-          </a:bodyPr>
-          <a:lstStyle/>
-          <a:p>
-            <a:pPr marL="0" indent="0" algn="l">
-              <a:buNone/>
-            </a:pPr>
-            <a:r>
-              <a:rPr lang="en-US" sz="1150" b="1" i="0" spc="200" dirty="0">
-                <a:solidFill>
-                  <a:srgbClr val="FFFFFF"/>
-                </a:solidFill>
-                <a:latin typeface="Calibri"/>
-              </a:rPr>
-              <a:t>APPROACH</a:t>
-            </a:r>
-          </a:p>
-        </p:txBody>
-      </p:sp>
-      <p:sp>
-        <p:nvSpPr>
-          <p:cNvPr id="193" name="sh"/>
-          <p:cNvSpPr txBox="1"/>
-          <p:nvPr/>
-        </p:nvSpPr>
-        <p:spPr>
-          <a:xfrm>
-            <a:off x="731520" y="1980000"/>
-            <a:ext cx="5214480" cy="2800000"/>
-          </a:xfrm>
-          <a:prstGeom prst="rect">
-            <a:avLst/>
-          </a:prstGeom>
-          <a:solidFill>
-            <a:srgbClr val="F5F7FA"/>
-          </a:solidFill>
-          <a:ln>
-            <a:noFill/>
-          </a:ln>
-        </p:spPr>
-        <p:txBody>
-          <a:bodyPr wrap="square" lIns="137160" tIns="91440" rIns="137160" bIns="91440" anchor="t">
+            <a:ext cx="10728960" cy="3200000"/>
+          </a:xfrm>
+          <a:prstGeom prst="rect">
+            <a:avLst/>
+          </a:prstGeom>
+          <a:noFill/>
+          <a:ln>
+            <a:noFill/>
+          </a:ln>
+        </p:spPr>
+        <p:txBody>
+          <a:bodyPr wrap="square" lIns="0" tIns="0" rIns="0" bIns="0" anchor="t">
             <a:normAutofit/>
           </a:bodyPr>
           <a:lstStyle/>
           <a:p>
             <a:pPr marL="228600" indent="-228600" algn="l">
               <a:spcBef>
-                <a:spcPts val="440"/>
+                <a:spcPts val="520"/>
               </a:spcBef>
               <a:buClr>
                 <a:srgbClr val="C55A11"/>
@@ -4786,19 +4746,41 @@
               <a:buChar char="■"/>
             </a:pPr>
             <a:r>
-              <a:rPr lang="en-US" sz="1450" b="0" i="0" dirty="0">
+              <a:rPr lang="en-US" sz="1550" b="0" i="0" dirty="0">
                 <a:solidFill>
                   <a:srgbClr val="1A1D21"/>
                 </a:solidFill>
                 <a:latin typeface="Calibri"/>
               </a:rPr>
-              <a:t>197 automated checks in 5 test programs</a:t>
+              <a:t>Everything so far ran on a trace we generated ourselves</a:t>
+            </a:r>
+          </a:p>
+          <a:p>
+            <a:pPr marL="457200" indent="-228600" algn="l">
+              <a:spcBef>
+                <a:spcPts val="380"/>
+              </a:spcBef>
+              <a:buClr>
+                <a:srgbClr val="8FA3BF"/>
+              </a:buClr>
+              <a:buSzPct val="90000"/>
+              <a:buFont typeface="Arial"/>
+              <a:buChar char="–"/>
+            </a:pPr>
+            <a:r>
+              <a:rPr lang="en-US" sz="1400" b="0" i="0" dirty="0">
+                <a:solidFill>
+                  <a:srgbClr val="5F6368"/>
+                </a:solidFill>
+                <a:latin typeface="Calibri"/>
+              </a:rPr>
+              <a:t>It was built to touch the exact addresses the router expects</a:t>
             </a:r>
           </a:p>
           <a:p>
             <a:pPr marL="228600" indent="-228600" algn="l">
               <a:spcBef>
-                <a:spcPts val="440"/>
+                <a:spcPts val="520"/>
               </a:spcBef>
               <a:buClr>
                 <a:srgbClr val="C55A11"/>
@@ -4808,19 +4790,19 @@
               <a:buChar char="■"/>
             </a:pPr>
             <a:r>
-              <a:rPr lang="en-US" sz="1450" b="0" i="0" dirty="0">
+              <a:rPr lang="en-US" sz="1550" b="0" i="0" dirty="0">
                 <a:solidFill>
                   <a:srgbClr val="1A1D21"/>
                 </a:solidFill>
                 <a:latin typeface="Calibri"/>
               </a:rPr>
-              <a:t>DECISION: H3 code depends on neither simulator</a:t>
+              <a:t>A real trace uses whatever addresses CUDA happened to allocate</a:t>
             </a:r>
           </a:p>
           <a:p>
             <a:pPr marL="457200" indent="-228600" algn="l">
               <a:spcBef>
-                <a:spcPts val="320"/>
+                <a:spcPts val="380"/>
               </a:spcBef>
               <a:buClr>
                 <a:srgbClr val="8FA3BF"/>
@@ -4830,19 +4812,41 @@
               <a:buChar char="–"/>
             </a:pPr>
             <a:r>
-              <a:rPr lang="en-US" sz="1300" b="0" i="0" dirty="0">
+              <a:rPr lang="en-US" sz="1400" b="0" i="0" dirty="0">
                 <a:solidFill>
                   <a:srgbClr val="5F6368"/>
                 </a:solidFill>
                 <a:latin typeface="Calibri"/>
               </a:rPr>
-              <a:t>So tests run in seconds, not after a 30 minute build</a:t>
+              <a:t>Around 0x7f35ab700000, which is in NEITHER H3 region</a:t>
+            </a:r>
+          </a:p>
+          <a:p>
+            <a:pPr marL="457200" indent="-228600" algn="l">
+              <a:spcBef>
+                <a:spcPts val="380"/>
+              </a:spcBef>
+              <a:buClr>
+                <a:srgbClr val="8FA3BF"/>
+              </a:buClr>
+              <a:buSzPct val="90000"/>
+              <a:buFont typeface="Arial"/>
+              <a:buChar char="–"/>
+            </a:pPr>
+            <a:r>
+              <a:rPr lang="en-US" sz="1400" b="0" i="0" dirty="0">
+                <a:solidFill>
+                  <a:srgbClr val="5F6368"/>
+                </a:solidFill>
+                <a:latin typeface="Calibri"/>
+              </a:rPr>
+              <a:t>So the router would reject every request and flash would never be used</a:t>
             </a:r>
           </a:p>
           <a:p>
             <a:pPr marL="228600" indent="-228600" algn="l">
               <a:spcBef>
-                <a:spcPts val="440"/>
+                <a:spcPts val="520"/>
               </a:spcBef>
               <a:buClr>
                 <a:srgbClr val="C55A11"/>
@@ -4852,155 +4856,19 @@
               <a:buChar char="■"/>
             </a:pPr>
             <a:r>
-              <a:rPr lang="en-US" sz="1450" b="0" i="0" dirty="0">
+              <a:rPr lang="en-US" sz="1550" b="0" i="0" dirty="0">
                 <a:solidFill>
                   <a:srgbClr val="1A1D21"/>
                 </a:solidFill>
                 <a:latin typeface="Calibri"/>
               </a:rPr>
-              <a:t>A trace checker validates input before the simulator sees it</a:t>
-            </a:r>
-          </a:p>
-        </p:txBody>
-      </p:sp>
-      <p:sp>
-        <p:nvSpPr>
-          <p:cNvPr id="194" name="sh"/>
-          <p:cNvSpPr txBox="1"/>
-          <p:nvPr/>
-        </p:nvSpPr>
-        <p:spPr>
-          <a:xfrm>
-            <a:off x="6246000" y="1560000"/>
-            <a:ext cx="5214480" cy="340000"/>
-          </a:xfrm>
-          <a:prstGeom prst="rect">
-            <a:avLst/>
-          </a:prstGeom>
-          <a:solidFill>
-            <a:srgbClr val="C55A11"/>
-          </a:solidFill>
-          <a:ln>
-            <a:noFill/>
-          </a:ln>
-        </p:spPr>
-        <p:txBody>
-          <a:bodyPr wrap="square" lIns="114300" tIns="60960" rIns="114300" bIns="60960" anchor="t">
-            <a:normAutofit/>
-          </a:bodyPr>
-          <a:lstStyle/>
-          <a:p>
-            <a:pPr marL="0" indent="0" algn="l">
-              <a:buNone/>
-            </a:pPr>
-            <a:r>
-              <a:rPr lang="en-US" sz="1150" b="1" i="0" spc="200" dirty="0">
-                <a:solidFill>
-                  <a:srgbClr val="FFFFFF"/>
-                </a:solidFill>
-                <a:latin typeface="Calibri"/>
-              </a:rPr>
-              <a:t>WHAT IS CHECKED</a:t>
-            </a:r>
-          </a:p>
-        </p:txBody>
-      </p:sp>
-      <p:sp>
-        <p:nvSpPr>
-          <p:cNvPr id="195" name="sh"/>
-          <p:cNvSpPr txBox="1"/>
-          <p:nvPr/>
-        </p:nvSpPr>
-        <p:spPr>
-          <a:xfrm>
-            <a:off x="6246000" y="1980000"/>
-            <a:ext cx="5214480" cy="2800000"/>
-          </a:xfrm>
-          <a:prstGeom prst="rect">
-            <a:avLst/>
-          </a:prstGeom>
-          <a:solidFill>
-            <a:srgbClr val="F5F7FA"/>
-          </a:solidFill>
-          <a:ln>
-            <a:noFill/>
-          </a:ln>
-        </p:spPr>
-        <p:txBody>
-          <a:bodyPr wrap="square" lIns="137160" tIns="91440" rIns="137160" bIns="91440" anchor="t">
-            <a:normAutofit/>
-          </a:bodyPr>
-          <a:lstStyle/>
-          <a:p>
-            <a:pPr marL="228600" indent="-228600" algn="l">
-              <a:spcBef>
-                <a:spcPts val="440"/>
-              </a:spcBef>
-              <a:buClr>
-                <a:srgbClr val="C55A11"/>
-              </a:buClr>
-              <a:buSzPct val="90000"/>
-              <a:buFont typeface="Arial"/>
-              <a:buChar char="■"/>
-            </a:pPr>
-            <a:r>
-              <a:rPr lang="en-US" sz="1450" b="0" i="0" dirty="0">
-                <a:solidFill>
-                  <a:srgbClr val="1A1D21"/>
-                </a:solidFill>
-                <a:latin typeface="Calibri"/>
-              </a:rPr>
-              <a:t>A buffer hit must generate NO flash traffic</a:t>
-            </a:r>
-          </a:p>
-          <a:p>
-            <a:pPr marL="228600" indent="-228600" algn="l">
-              <a:spcBef>
-                <a:spcPts val="440"/>
-              </a:spcBef>
-              <a:buClr>
-                <a:srgbClr val="C55A11"/>
-              </a:buClr>
-              <a:buSzPct val="90000"/>
-              <a:buFont typeface="Arial"/>
-              <a:buChar char="■"/>
-            </a:pPr>
-            <a:r>
-              <a:rPr lang="en-US" sz="1450" b="0" i="0" dirty="0">
-                <a:solidFill>
-                  <a:srgbClr val="1A1D21"/>
-                </a:solidFill>
-                <a:latin typeface="Calibri"/>
-              </a:rPr>
-              <a:t>Data in transit must never be reported as ready</a:t>
-            </a:r>
-          </a:p>
-          <a:p>
-            <a:pPr marL="228600" indent="-228600" algn="l">
-              <a:spcBef>
-                <a:spcPts val="440"/>
-              </a:spcBef>
-              <a:buClr>
-                <a:srgbClr val="C55A11"/>
-              </a:buClr>
-              <a:buSzPct val="90000"/>
-              <a:buFont typeface="Arial"/>
-              <a:buChar char="■"/>
-            </a:pPr>
-            <a:r>
-              <a:rPr lang="en-US" sz="1450" b="0" i="0" dirty="0">
-                <a:solidFill>
-                  <a:srgbClr val="1A1D21"/>
-                </a:solidFill>
-                <a:latin typeface="Calibri"/>
-              </a:rPr>
-              <a:t>Per-GPU settings must be divided across partitions</a:t>
+              <a:t>This blocked us from using any real benchmark at all</a:t>
             </a:r>
           </a:p>
           <a:p>
             <a:pPr marL="457200" indent="-228600" algn="l">
               <a:spcBef>
-                <a:spcPts val="320"/>
+                <a:spcPts val="380"/>
               </a:spcBef>
               <a:buClr>
                 <a:srgbClr val="8FA3BF"/>
@@ -5010,20 +4878,20 @@
               <a:buChar char="–"/>
             </a:pPr>
             <a:r>
-              <a:rPr lang="en-US" sz="1300" b="0" i="0" dirty="0">
+              <a:rPr lang="en-US" sz="1400" b="0" i="0" dirty="0">
                 <a:solidFill>
                   <a:srgbClr val="5F6368"/>
                 </a:solidFill>
                 <a:latin typeface="Calibri"/>
               </a:rPr>
-              <a:t>Several tests exist because they caught a real bug</a:t>
-            </a:r>
-          </a:p>
-        </p:txBody>
-      </p:sp>
-      <p:sp>
-        <p:nvSpPr>
-          <p:cNvPr id="196" name="nb"/>
+              <a:t>Including 270 MB of real traces already sitting on the disk</a:t>
+            </a:r>
+          </a:p>
+        </p:txBody>
+      </p:sp>
+      <p:sp>
+        <p:nvSpPr>
+          <p:cNvPr id="193" name="nb"/>
           <p:cNvSpPr txBox="1"/>
           <p:nvPr/>
         </p:nvSpPr>
@@ -5054,7 +4922,7 @@
       </p:sp>
       <p:sp>
         <p:nvSpPr>
-          <p:cNvPr id="197" name="sh"/>
+          <p:cNvPr id="194" name="sh"/>
           <p:cNvSpPr txBox="1"/>
           <p:nvPr/>
         </p:nvSpPr>
@@ -5106,7 +4974,7 @@
                 </a:solidFill>
                 <a:latin typeface="Calibri"/>
               </a:rPr>
-              <a:t>Keeping our components independent of the large simulators means a mistake shows up in seconds rather than after a long build. Each test that guards a past bug is named for the problem it prevents.</a:t>
+              <a:t>Our simulator could only be tested with data we wrote ourselves. That is a weak test, because the test and the thing being tested share the same assumptions. Fixing this became the priority.</a:t>
             </a:r>
           </a:p>
         </p:txBody>
@@ -5138,7 +5006,7 @@
       </p:grpSpPr>
       <p:sp>
         <p:nvSpPr>
-          <p:cNvPr id="198" name="rule"/>
+          <p:cNvPr id="195" name="rule"/>
           <p:cNvSpPr txBox="1"/>
           <p:nvPr/>
         </p:nvSpPr>
@@ -5169,7 +5037,7 @@
       </p:sp>
       <p:sp>
         <p:nvSpPr>
-          <p:cNvPr id="199" name="spine"/>
+          <p:cNvPr id="196" name="spine"/>
           <p:cNvSpPr txBox="1"/>
           <p:nvPr/>
         </p:nvSpPr>
@@ -5200,7 +5068,7 @@
       </p:sp>
       <p:sp>
         <p:nvSpPr>
-          <p:cNvPr id="200" name="sh"/>
+          <p:cNvPr id="197" name="sh"/>
           <p:cNvSpPr txBox="1"/>
           <p:nvPr/>
         </p:nvSpPr>
@@ -5233,14 +5101,14 @@
                 </a:solidFill>
                 <a:latin typeface="Calibri"/>
               </a:rPr>
-              <a:t>RESULTS</a:t>
-            </a:r>
-          </a:p>
-        </p:txBody>
-      </p:sp>
-      <p:sp>
-        <p:nvSpPr>
-          <p:cNvPr id="201" name="sh"/>
+              <a:t>REAL TRACES</a:t>
+            </a:r>
+          </a:p>
+        </p:txBody>
+      </p:sp>
+      <p:sp>
+        <p:nvSpPr>
+          <p:cNvPr id="198" name="sh"/>
           <p:cNvSpPr txBox="1"/>
           <p:nvPr/>
         </p:nvSpPr>
@@ -5273,14 +5141,14 @@
                 </a:solidFill>
                 <a:latin typeface="Calibri"/>
               </a:rPr>
-              <a:t>Bugs the detailed model exposed</a:t>
-            </a:r>
-          </a:p>
-        </p:txBody>
-      </p:sp>
-      <p:sp>
-        <p:nvSpPr>
-          <p:cNvPr id="202" name="ul"/>
+              <a:t>How we solved it</a:t>
+            </a:r>
+          </a:p>
+        </p:txBody>
+      </p:sp>
+      <p:sp>
+        <p:nvSpPr>
+          <p:cNvPr id="199" name="ul"/>
           <p:cNvSpPr txBox="1"/>
           <p:nvPr/>
         </p:nvSpPr>
@@ -5311,7 +5179,7 @@
       </p:sp>
       <p:sp>
         <p:nvSpPr>
-          <p:cNvPr id="203" name="sh"/>
+          <p:cNvPr id="200" name="sh"/>
           <p:cNvSpPr txBox="1"/>
           <p:nvPr/>
         </p:nvSpPr>
@@ -5351,7 +5219,7 @@
       </p:sp>
       <p:sp>
         <p:nvSpPr>
-          <p:cNvPr id="204" name="sh"/>
+          <p:cNvPr id="201" name="sh"/>
           <p:cNvSpPr txBox="1"/>
           <p:nvPr/>
         </p:nvSpPr>
@@ -5391,19 +5259,59 @@
       </p:sp>
       <p:sp>
         <p:nvSpPr>
-          <p:cNvPr id="205" name="sh"/>
-          <p:cNvSpPr txBox="1"/>
-          <p:nvPr/>
-        </p:nvSpPr>
-        <p:spPr>
-          <a:xfrm>
-            <a:off x="731520" y="1600000"/>
-            <a:ext cx="3429653" cy="1700000"/>
-          </a:xfrm>
-          <a:prstGeom prst="roundRect">
-            <a:avLst>
-              <a:gd name="adj" fmla="val 8000"/>
-            </a:avLst>
+          <p:cNvPr id="202" name="sh"/>
+          <p:cNvSpPr txBox="1"/>
+          <p:nvPr/>
+        </p:nvSpPr>
+        <p:spPr>
+          <a:xfrm>
+            <a:off x="731520" y="1560000"/>
+            <a:ext cx="5214480" cy="340000"/>
+          </a:xfrm>
+          <a:prstGeom prst="rect">
+            <a:avLst/>
+          </a:prstGeom>
+          <a:solidFill>
+            <a:srgbClr val="1F3864"/>
+          </a:solidFill>
+          <a:ln>
+            <a:noFill/>
+          </a:ln>
+        </p:spPr>
+        <p:txBody>
+          <a:bodyPr wrap="square" lIns="114300" tIns="60960" rIns="114300" bIns="60960" anchor="t">
+            <a:normAutofit/>
+          </a:bodyPr>
+          <a:lstStyle/>
+          <a:p>
+            <a:pPr marL="0" indent="0" algn="l">
+              <a:buNone/>
+            </a:pPr>
+            <a:r>
+              <a:rPr lang="en-US" sz="1150" b="1" i="0" spc="200" dirty="0">
+                <a:solidFill>
+                  <a:srgbClr val="FFFFFF"/>
+                </a:solidFill>
+                <a:latin typeface="Calibri"/>
+              </a:rPr>
+              <a:t>NEW TOOL</a:t>
+            </a:r>
+          </a:p>
+        </p:txBody>
+      </p:sp>
+      <p:sp>
+        <p:nvSpPr>
+          <p:cNvPr id="203" name="sh"/>
+          <p:cNvSpPr txBox="1"/>
+          <p:nvPr/>
+        </p:nvSpPr>
+        <p:spPr>
+          <a:xfrm>
+            <a:off x="731520" y="1980000"/>
+            <a:ext cx="5214480" cy="2800000"/>
+          </a:xfrm>
+          <a:prstGeom prst="rect">
+            <a:avLst/>
           </a:prstGeom>
           <a:solidFill>
             <a:srgbClr val="F5F7FA"/>
@@ -5413,337 +5321,36 @@
           </a:ln>
         </p:spPr>
         <p:txBody>
-          <a:bodyPr wrap="square" lIns="160020" tIns="137160" rIns="160020" bIns="137160" anchor="t">
-            <a:normAutofit/>
-          </a:bodyPr>
-          <a:lstStyle/>
-          <a:p>
-            <a:pPr marL="0" indent="0" algn="l">
-              <a:buNone/>
-            </a:pPr>
-            <a:r>
-              <a:rPr lang="en-US" sz="3600" b="1" i="0" dirty="0">
-                <a:solidFill>
-                  <a:srgbClr val="8E1600"/>
-                </a:solidFill>
-                <a:latin typeface="Calibri"/>
-              </a:rPr>
-              <a:t>26x</a:t>
-            </a:r>
-          </a:p>
-          <a:p>
-            <a:pPr marL="0" indent="0" algn="l">
-              <a:spcBef>
-                <a:spcPts val="200"/>
-              </a:spcBef>
-              <a:buNone/>
-            </a:pPr>
-            <a:r>
-              <a:rPr lang="en-US" sz="1250" b="1" i="0" dirty="0">
+          <a:bodyPr wrap="square" lIns="137160" tIns="91440" rIns="137160" bIns="91440" anchor="t">
+            <a:normAutofit/>
+          </a:bodyPr>
+          <a:lstStyle/>
+          <a:p>
+            <a:pPr marL="228600" indent="-228600" algn="l">
+              <a:spcBef>
+                <a:spcPts val="440"/>
+              </a:spcBef>
+              <a:buClr>
+                <a:srgbClr val="C55A11"/>
+              </a:buClr>
+              <a:buSzPct val="90000"/>
+              <a:buFont typeface="Arial"/>
+              <a:buChar char="■"/>
+            </a:pPr>
+            <a:r>
+              <a:rPr lang="en-US" sz="1450" b="0" i="0" dirty="0">
                 <a:solidFill>
                   <a:srgbClr val="1A1D21"/>
                 </a:solidFill>
                 <a:latin typeface="Calibri"/>
               </a:rPr>
-              <a:t>flash traffic overstated</a:t>
-            </a:r>
-          </a:p>
-          <a:p>
-            <a:pPr marL="0" indent="0" algn="l">
-              <a:spcBef>
-                <a:spcPts val="120"/>
-              </a:spcBef>
-              <a:buNone/>
-            </a:pPr>
-            <a:r>
-              <a:rPr lang="en-US" sz="1050" b="0" i="0" dirty="0">
-                <a:solidFill>
-                  <a:srgbClr val="5F6368"/>
-                </a:solidFill>
-                <a:latin typeface="Calibri"/>
-              </a:rPr>
-              <a:t>requests sent before the buffer was asked</a:t>
-            </a:r>
-          </a:p>
-        </p:txBody>
-      </p:sp>
-      <p:sp>
-        <p:nvSpPr>
-          <p:cNvPr id="206" name="sh"/>
-          <p:cNvSpPr txBox="1"/>
-          <p:nvPr/>
-        </p:nvSpPr>
-        <p:spPr>
-          <a:xfrm>
-            <a:off x="731520" y="1600000"/>
-            <a:ext cx="3429653" cy="60000"/>
-          </a:xfrm>
-          <a:prstGeom prst="rect">
-            <a:avLst/>
-          </a:prstGeom>
-          <a:solidFill>
-            <a:srgbClr val="8E1600"/>
-          </a:solidFill>
-          <a:ln>
-            <a:noFill/>
-          </a:ln>
-        </p:spPr>
-        <p:txBody>
-          <a:bodyPr wrap="square" lIns="137160" tIns="91440" rIns="137160" bIns="91440" anchor="t">
-            <a:normAutofit/>
-          </a:bodyPr>
-          <a:lstStyle/>
-          <a:p>
-            <a:endParaRPr lang="en-US"/>
-          </a:p>
-        </p:txBody>
-      </p:sp>
-      <p:sp>
-        <p:nvSpPr>
-          <p:cNvPr id="207" name="sh"/>
-          <p:cNvSpPr txBox="1"/>
-          <p:nvPr/>
-        </p:nvSpPr>
-        <p:spPr>
-          <a:xfrm>
-            <a:off x="4381173" y="1600000"/>
-            <a:ext cx="3429653" cy="1700000"/>
-          </a:xfrm>
-          <a:prstGeom prst="roundRect">
-            <a:avLst>
-              <a:gd name="adj" fmla="val 8000"/>
-            </a:avLst>
-          </a:prstGeom>
-          <a:solidFill>
-            <a:srgbClr val="F5F7FA"/>
-          </a:solidFill>
-          <a:ln>
-            <a:noFill/>
-          </a:ln>
-        </p:spPr>
-        <p:txBody>
-          <a:bodyPr wrap="square" lIns="160020" tIns="137160" rIns="160020" bIns="137160" anchor="t">
-            <a:normAutofit/>
-          </a:bodyPr>
-          <a:lstStyle/>
-          <a:p>
-            <a:pPr marL="0" indent="0" algn="l">
-              <a:buNone/>
-            </a:pPr>
-            <a:r>
-              <a:rPr lang="en-US" sz="3600" b="1" i="0" dirty="0">
-                <a:solidFill>
-                  <a:srgbClr val="8E1600"/>
-                </a:solidFill>
-                <a:latin typeface="Calibri"/>
-              </a:rPr>
-              <a:t>4,273</a:t>
-            </a:r>
-          </a:p>
-          <a:p>
-            <a:pPr marL="0" indent="0" algn="l">
-              <a:spcBef>
-                <a:spcPts val="200"/>
-              </a:spcBef>
-              <a:buNone/>
-            </a:pPr>
-            <a:r>
-              <a:rPr lang="en-US" sz="1250" b="1" i="0" dirty="0">
-                <a:solidFill>
-                  <a:srgbClr val="1A1D21"/>
-                </a:solidFill>
-                <a:latin typeface="Calibri"/>
-              </a:rPr>
-              <a:t>false buffer hits</a:t>
-            </a:r>
-          </a:p>
-          <a:p>
-            <a:pPr marL="0" indent="0" algn="l">
-              <a:spcBef>
-                <a:spcPts val="120"/>
-              </a:spcBef>
-              <a:buNone/>
-            </a:pPr>
-            <a:r>
-              <a:rPr lang="en-US" sz="1050" b="0" i="0" dirty="0">
-                <a:solidFill>
-                  <a:srgbClr val="5F6368"/>
-                </a:solidFill>
-                <a:latin typeface="Calibri"/>
-              </a:rPr>
-              <a:t>data in transit marked as arrived</a:t>
-            </a:r>
-          </a:p>
-        </p:txBody>
-      </p:sp>
-      <p:sp>
-        <p:nvSpPr>
-          <p:cNvPr id="208" name="sh"/>
-          <p:cNvSpPr txBox="1"/>
-          <p:nvPr/>
-        </p:nvSpPr>
-        <p:spPr>
-          <a:xfrm>
-            <a:off x="4381173" y="1600000"/>
-            <a:ext cx="3429653" cy="60000"/>
-          </a:xfrm>
-          <a:prstGeom prst="rect">
-            <a:avLst/>
-          </a:prstGeom>
-          <a:solidFill>
-            <a:srgbClr val="8E1600"/>
-          </a:solidFill>
-          <a:ln>
-            <a:noFill/>
-          </a:ln>
-        </p:spPr>
-        <p:txBody>
-          <a:bodyPr wrap="square" lIns="137160" tIns="91440" rIns="137160" bIns="91440" anchor="t">
-            <a:normAutofit/>
-          </a:bodyPr>
-          <a:lstStyle/>
-          <a:p>
-            <a:endParaRPr lang="en-US"/>
-          </a:p>
-        </p:txBody>
-      </p:sp>
-      <p:sp>
-        <p:nvSpPr>
-          <p:cNvPr id="209" name="sh"/>
-          <p:cNvSpPr txBox="1"/>
-          <p:nvPr/>
-        </p:nvSpPr>
-        <p:spPr>
-          <a:xfrm>
-            <a:off x="8030826" y="1600000"/>
-            <a:ext cx="3429653" cy="1700000"/>
-          </a:xfrm>
-          <a:prstGeom prst="roundRect">
-            <a:avLst>
-              <a:gd name="adj" fmla="val 8000"/>
-            </a:avLst>
-          </a:prstGeom>
-          <a:solidFill>
-            <a:srgbClr val="F5F7FA"/>
-          </a:solidFill>
-          <a:ln>
-            <a:noFill/>
-          </a:ln>
-        </p:spPr>
-        <p:txBody>
-          <a:bodyPr wrap="square" lIns="160020" tIns="137160" rIns="160020" bIns="137160" anchor="t">
-            <a:normAutofit/>
-          </a:bodyPr>
-          <a:lstStyle/>
-          <a:p>
-            <a:pPr marL="0" indent="0" algn="l">
-              <a:buNone/>
-            </a:pPr>
-            <a:r>
-              <a:rPr lang="en-US" sz="3600" b="1" i="0" dirty="0">
-                <a:solidFill>
-                  <a:srgbClr val="8E1600"/>
-                </a:solidFill>
-                <a:latin typeface="Calibri"/>
-              </a:rPr>
-              <a:t>40x</a:t>
-            </a:r>
-          </a:p>
-          <a:p>
-            <a:pPr marL="0" indent="0" algn="l">
-              <a:spcBef>
-                <a:spcPts val="200"/>
-              </a:spcBef>
-              <a:buNone/>
-            </a:pPr>
-            <a:r>
-              <a:rPr lang="en-US" sz="1250" b="1" i="0" dirty="0">
-                <a:solidFill>
-                  <a:srgbClr val="1A1D21"/>
-                </a:solidFill>
-                <a:latin typeface="Calibri"/>
-              </a:rPr>
-              <a:t>GPU speed overstated</a:t>
-            </a:r>
-          </a:p>
-          <a:p>
-            <a:pPr marL="0" indent="0" algn="l">
-              <a:spcBef>
-                <a:spcPts val="120"/>
-              </a:spcBef>
-              <a:buNone/>
-            </a:pPr>
-            <a:r>
-              <a:rPr lang="en-US" sz="1050" b="0" i="0" dirty="0">
-                <a:solidFill>
-                  <a:srgbClr val="5F6368"/>
-                </a:solidFill>
-                <a:latin typeface="Calibri"/>
-              </a:rPr>
-              <a:t>per-GPU settings applied per partition</a:t>
-            </a:r>
-          </a:p>
-        </p:txBody>
-      </p:sp>
-      <p:sp>
-        <p:nvSpPr>
-          <p:cNvPr id="210" name="sh"/>
-          <p:cNvSpPr txBox="1"/>
-          <p:nvPr/>
-        </p:nvSpPr>
-        <p:spPr>
-          <a:xfrm>
-            <a:off x="8030826" y="1600000"/>
-            <a:ext cx="3429653" cy="60000"/>
-          </a:xfrm>
-          <a:prstGeom prst="rect">
-            <a:avLst/>
-          </a:prstGeom>
-          <a:solidFill>
-            <a:srgbClr val="8E1600"/>
-          </a:solidFill>
-          <a:ln>
-            <a:noFill/>
-          </a:ln>
-        </p:spPr>
-        <p:txBody>
-          <a:bodyPr wrap="square" lIns="137160" tIns="91440" rIns="137160" bIns="91440" anchor="t">
-            <a:normAutofit/>
-          </a:bodyPr>
-          <a:lstStyle/>
-          <a:p>
-            <a:endParaRPr lang="en-US"/>
-          </a:p>
-        </p:txBody>
-      </p:sp>
-      <p:sp>
-        <p:nvSpPr>
-          <p:cNvPr id="211" name="sh"/>
-          <p:cNvSpPr txBox="1"/>
-          <p:nvPr/>
-        </p:nvSpPr>
-        <p:spPr>
-          <a:xfrm>
-            <a:off x="731520" y="3520000"/>
-            <a:ext cx="10728960" cy="1300000"/>
-          </a:xfrm>
-          <a:prstGeom prst="rect">
-            <a:avLst/>
-          </a:prstGeom>
-          <a:noFill/>
-          <a:ln>
-            <a:noFill/>
-          </a:ln>
-        </p:spPr>
-        <p:txBody>
-          <a:bodyPr wrap="square" lIns="0" tIns="0" rIns="0" bIns="0" anchor="t">
-            <a:normAutofit/>
-          </a:bodyPr>
-          <a:lstStyle/>
+              <a:t>classify_trace.py reads any real trace</a:t>
+            </a:r>
+          </a:p>
           <a:p>
             <a:pPr marL="457200" indent="-228600" algn="l">
               <a:spcBef>
-                <a:spcPts val="380"/>
+                <a:spcPts val="320"/>
               </a:spcBef>
               <a:buClr>
                 <a:srgbClr val="8FA3BF"/>
@@ -5759,13 +5366,13 @@
                 </a:solidFill>
                 <a:latin typeface="Calibri"/>
               </a:rPr>
-              <a:t>All three were invisible to the fast model, which happily returned a plausible number. The detailed model refused, and threw an error instead.</a:t>
+              <a:t>Finds every buffer the program actually uses</a:t>
             </a:r>
           </a:p>
           <a:p>
             <a:pPr marL="457200" indent="-228600" algn="l">
               <a:spcBef>
-                <a:spcPts val="380"/>
+                <a:spcPts val="320"/>
               </a:spcBef>
               <a:buClr>
                 <a:srgbClr val="8FA3BF"/>
@@ -5781,14 +5388,260 @@
                 </a:solidFill>
                 <a:latin typeface="Calibri"/>
               </a:rPr>
-              <a:t>All three are fixed, and each now has a test that prevents it returning.</a:t>
-            </a:r>
-          </a:p>
-        </p:txBody>
-      </p:sp>
-      <p:sp>
-        <p:nvSpPr>
-          <p:cNvPr id="212" name="nb"/>
+              <a:t>Counts reads and writes for each one</a:t>
+            </a:r>
+          </a:p>
+          <a:p>
+            <a:pPr marL="228600" indent="-228600" algn="l">
+              <a:spcBef>
+                <a:spcPts val="440"/>
+              </a:spcBef>
+              <a:buClr>
+                <a:srgbClr val="C55A11"/>
+              </a:buClr>
+              <a:buSzPct val="90000"/>
+              <a:buFont typeface="Arial"/>
+              <a:buChar char="■"/>
+            </a:pPr>
+            <a:r>
+              <a:rPr lang="en-US" sz="1450" b="0" i="0" dirty="0">
+                <a:solidFill>
+                  <a:srgbClr val="1A1D21"/>
+                </a:solidFill>
+                <a:latin typeface="Calibri"/>
+              </a:rPr>
+              <a:t>Applies H3's real rule:</a:t>
+            </a:r>
+          </a:p>
+          <a:p>
+            <a:pPr marL="457200" indent="-228600" algn="l">
+              <a:spcBef>
+                <a:spcPts val="320"/>
+              </a:spcBef>
+              <a:buClr>
+                <a:srgbClr val="8FA3BF"/>
+              </a:buClr>
+              <a:buSzPct val="90000"/>
+              <a:buFont typeface="Arial"/>
+              <a:buChar char="–"/>
+            </a:pPr>
+            <a:r>
+              <a:rPr lang="en-US" sz="1300" b="0" i="0" dirty="0">
+                <a:solidFill>
+                  <a:srgbClr val="5F6368"/>
+                </a:solidFill>
+                <a:latin typeface="Calibri"/>
+              </a:rPr>
+              <a:t>large AND never written goes to flash</a:t>
+            </a:r>
+          </a:p>
+          <a:p>
+            <a:pPr marL="457200" indent="-228600" algn="l">
+              <a:spcBef>
+                <a:spcPts val="320"/>
+              </a:spcBef>
+              <a:buClr>
+                <a:srgbClr val="8FA3BF"/>
+              </a:buClr>
+              <a:buSzPct val="90000"/>
+              <a:buFont typeface="Arial"/>
+              <a:buChar char="–"/>
+            </a:pPr>
+            <a:r>
+              <a:rPr lang="en-US" sz="1300" b="0" i="0" dirty="0">
+                <a:solidFill>
+                  <a:srgbClr val="5F6368"/>
+                </a:solidFill>
+                <a:latin typeface="Calibri"/>
+              </a:rPr>
+              <a:t>everything else goes to HBM</a:t>
+            </a:r>
+          </a:p>
+        </p:txBody>
+      </p:sp>
+      <p:sp>
+        <p:nvSpPr>
+          <p:cNvPr id="204" name="sh"/>
+          <p:cNvSpPr txBox="1"/>
+          <p:nvPr/>
+        </p:nvSpPr>
+        <p:spPr>
+          <a:xfrm>
+            <a:off x="6246000" y="1560000"/>
+            <a:ext cx="5214480" cy="340000"/>
+          </a:xfrm>
+          <a:prstGeom prst="rect">
+            <a:avLst/>
+          </a:prstGeom>
+          <a:solidFill>
+            <a:srgbClr val="C55A11"/>
+          </a:solidFill>
+          <a:ln>
+            <a:noFill/>
+          </a:ln>
+        </p:spPr>
+        <p:txBody>
+          <a:bodyPr wrap="square" lIns="114300" tIns="60960" rIns="114300" bIns="60960" anchor="t">
+            <a:normAutofit/>
+          </a:bodyPr>
+          <a:lstStyle/>
+          <a:p>
+            <a:pPr marL="0" indent="0" algn="l">
+              <a:buNone/>
+            </a:pPr>
+            <a:r>
+              <a:rPr lang="en-US" sz="1150" b="1" i="0" spc="200" dirty="0">
+                <a:solidFill>
+                  <a:srgbClr val="FFFFFF"/>
+                </a:solidFill>
+                <a:latin typeface="Calibri"/>
+              </a:rPr>
+              <a:t>ROUTER CHANGE</a:t>
+            </a:r>
+          </a:p>
+        </p:txBody>
+      </p:sp>
+      <p:sp>
+        <p:nvSpPr>
+          <p:cNvPr id="205" name="sh"/>
+          <p:cNvSpPr txBox="1"/>
+          <p:nvPr/>
+        </p:nvSpPr>
+        <p:spPr>
+          <a:xfrm>
+            <a:off x="6246000" y="1980000"/>
+            <a:ext cx="5214480" cy="2800000"/>
+          </a:xfrm>
+          <a:prstGeom prst="rect">
+            <a:avLst/>
+          </a:prstGeom>
+          <a:solidFill>
+            <a:srgbClr val="F5F7FA"/>
+          </a:solidFill>
+          <a:ln>
+            <a:noFill/>
+          </a:ln>
+        </p:spPr>
+        <p:txBody>
+          <a:bodyPr wrap="square" lIns="137160" tIns="91440" rIns="137160" bIns="91440" anchor="t">
+            <a:normAutofit/>
+          </a:bodyPr>
+          <a:lstStyle/>
+          <a:p>
+            <a:pPr marL="228600" indent="-228600" algn="l">
+              <a:spcBef>
+                <a:spcPts val="440"/>
+              </a:spcBef>
+              <a:buClr>
+                <a:srgbClr val="C55A11"/>
+              </a:buClr>
+              <a:buSzPct val="90000"/>
+              <a:buFont typeface="Arial"/>
+              <a:buChar char="■"/>
+            </a:pPr>
+            <a:r>
+              <a:rPr lang="en-US" sz="1450" b="0" i="0" dirty="0">
+                <a:solidFill>
+                  <a:srgbClr val="1A1D21"/>
+                </a:solidFill>
+                <a:latin typeface="Calibri"/>
+              </a:rPr>
+              <a:t>Second decode mode added</a:t>
+            </a:r>
+          </a:p>
+          <a:p>
+            <a:pPr marL="457200" indent="-228600" algn="l">
+              <a:spcBef>
+                <a:spcPts val="320"/>
+              </a:spcBef>
+              <a:buClr>
+                <a:srgbClr val="8FA3BF"/>
+              </a:buClr>
+              <a:buSzPct val="90000"/>
+              <a:buFont typeface="Arial"/>
+              <a:buChar char="–"/>
+            </a:pPr>
+            <a:r>
+              <a:rPr lang="en-US" sz="1300" b="0" i="0" dirty="0">
+                <a:solidFill>
+                  <a:srgbClr val="5F6368"/>
+                </a:solidFill>
+                <a:latin typeface="Calibri"/>
+              </a:rPr>
+              <a:t>Decides by BUFFER, not by address range</a:t>
+            </a:r>
+          </a:p>
+          <a:p>
+            <a:pPr marL="228600" indent="-228600" algn="l">
+              <a:spcBef>
+                <a:spcPts val="440"/>
+              </a:spcBef>
+              <a:buClr>
+                <a:srgbClr val="C55A11"/>
+              </a:buClr>
+              <a:buSzPct val="90000"/>
+              <a:buFont typeface="Arial"/>
+              <a:buChar char="■"/>
+            </a:pPr>
+            <a:r>
+              <a:rPr lang="en-US" sz="1450" b="0" i="0" dirty="0">
+                <a:solidFill>
+                  <a:srgbClr val="1A1D21"/>
+                </a:solidFill>
+                <a:latin typeface="Calibri"/>
+              </a:rPr>
+              <a:t>Old behaviour kept for our own traces</a:t>
+            </a:r>
+          </a:p>
+          <a:p>
+            <a:pPr marL="228600" indent="-228600" algn="l">
+              <a:spcBef>
+                <a:spcPts val="440"/>
+              </a:spcBef>
+              <a:buClr>
+                <a:srgbClr val="C55A11"/>
+              </a:buClr>
+              <a:buSzPct val="90000"/>
+              <a:buFont typeface="Arial"/>
+              <a:buChar char="■"/>
+            </a:pPr>
+            <a:r>
+              <a:rPr lang="en-US" sz="1450" b="0" i="0" dirty="0">
+                <a:solidFill>
+                  <a:srgbClr val="1A1D21"/>
+                </a:solidFill>
+                <a:latin typeface="Calibri"/>
+              </a:rPr>
+              <a:t>Addresses in no buffer go to HBM and are counted</a:t>
+            </a:r>
+          </a:p>
+          <a:p>
+            <a:pPr marL="457200" indent="-228600" algn="l">
+              <a:spcBef>
+                <a:spcPts val="320"/>
+              </a:spcBef>
+              <a:buClr>
+                <a:srgbClr val="8FA3BF"/>
+              </a:buClr>
+              <a:buSzPct val="90000"/>
+              <a:buFont typeface="Arial"/>
+              <a:buChar char="–"/>
+            </a:pPr>
+            <a:r>
+              <a:rPr lang="en-US" sz="1300" b="0" i="0" dirty="0">
+                <a:solidFill>
+                  <a:srgbClr val="5F6368"/>
+                </a:solidFill>
+                <a:latin typeface="Calibri"/>
+              </a:rPr>
+              <a:t>Stack and constant data, kept visible</a:t>
+            </a:r>
+          </a:p>
+        </p:txBody>
+      </p:sp>
+      <p:sp>
+        <p:nvSpPr>
+          <p:cNvPr id="206" name="nb"/>
           <p:cNvSpPr txBox="1"/>
           <p:nvPr/>
         </p:nvSpPr>
@@ -5819,7 +5672,7 @@
       </p:sp>
       <p:sp>
         <p:nvSpPr>
-          <p:cNvPr id="213" name="sh"/>
+          <p:cNvPr id="207" name="sh"/>
           <p:cNvSpPr txBox="1"/>
           <p:nvPr/>
         </p:nvSpPr>
@@ -5871,7 +5724,7 @@
                 </a:solidFill>
                 <a:latin typeface="Calibri"/>
               </a:rPr>
-              <a:t>This is the strongest argument for building the cycle-accurate version at all. Two models that disagree are how you discover that one of them is wrong.</a:t>
+              <a:t>The placement is worked out FROM the trace rather than assumed: a buffer goes to flash only if the program never writes to it. That is the same decision H3 makes in real hardware.</a:t>
             </a:r>
           </a:p>
         </p:txBody>
@@ -5903,7 +5756,7 @@
       </p:grpSpPr>
       <p:sp>
         <p:nvSpPr>
-          <p:cNvPr id="214" name="rule"/>
+          <p:cNvPr id="208" name="rule"/>
           <p:cNvSpPr txBox="1"/>
           <p:nvPr/>
         </p:nvSpPr>
@@ -5934,7 +5787,7 @@
       </p:sp>
       <p:sp>
         <p:nvSpPr>
-          <p:cNvPr id="215" name="spine"/>
+          <p:cNvPr id="209" name="spine"/>
           <p:cNvSpPr txBox="1"/>
           <p:nvPr/>
         </p:nvSpPr>
@@ -5965,7 +5818,7 @@
       </p:sp>
       <p:sp>
         <p:nvSpPr>
-          <p:cNvPr id="216" name="sh"/>
+          <p:cNvPr id="210" name="sh"/>
           <p:cNvSpPr txBox="1"/>
           <p:nvPr/>
         </p:nvSpPr>
@@ -5998,14 +5851,14 @@
                 </a:solidFill>
                 <a:latin typeface="Calibri"/>
               </a:rPr>
-              <a:t>RESULTS</a:t>
-            </a:r>
-          </a:p>
-        </p:txBody>
-      </p:sp>
-      <p:sp>
-        <p:nvSpPr>
-          <p:cNvPr id="217" name="sh"/>
+              <a:t>REAL TRACES</a:t>
+            </a:r>
+          </a:p>
+        </p:txBody>
+      </p:sp>
+      <p:sp>
+        <p:nvSpPr>
+          <p:cNvPr id="211" name="sh"/>
           <p:cNvSpPr txBox="1"/>
           <p:nvPr/>
         </p:nvSpPr>
@@ -6038,14 +5891,14 @@
                 </a:solidFill>
                 <a:latin typeface="Calibri"/>
               </a:rPr>
-              <a:t>What the simulator measures today</a:t>
-            </a:r>
-          </a:p>
-        </p:txBody>
-      </p:sp>
-      <p:sp>
-        <p:nvSpPr>
-          <p:cNvPr id="218" name="ul"/>
+              <a:t>What the tool immediately told us</a:t>
+            </a:r>
+          </a:p>
+        </p:txBody>
+      </p:sp>
+      <p:sp>
+        <p:nvSpPr>
+          <p:cNvPr id="212" name="ul"/>
           <p:cNvSpPr txBox="1"/>
           <p:nvPr/>
         </p:nvSpPr>
@@ -6076,7 +5929,7 @@
       </p:sp>
       <p:sp>
         <p:nvSpPr>
-          <p:cNvPr id="219" name="sh"/>
+          <p:cNvPr id="213" name="sh"/>
           <p:cNvSpPr txBox="1"/>
           <p:nvPr/>
         </p:nvSpPr>
@@ -6116,7 +5969,7 @@
       </p:sp>
       <p:sp>
         <p:nvSpPr>
-          <p:cNvPr id="220" name="sh"/>
+          <p:cNvPr id="214" name="sh"/>
           <p:cNvSpPr txBox="1"/>
           <p:nvPr/>
         </p:nvSpPr>
@@ -6156,7 +6009,7 @@
       </p:sp>
       <p:sp>
         <p:nvSpPr>
-          <p:cNvPr id="221" name="sh"/>
+          <p:cNvPr id="215" name="sh"/>
           <p:cNvSpPr txBox="1"/>
           <p:nvPr/>
         </p:nvSpPr>
@@ -6189,11 +6042,11 @@
             <a:r>
               <a:rPr lang="en-US" sz="3600" b="1" i="0" dirty="0">
                 <a:solidFill>
-                  <a:srgbClr val="2E7D32"/>
-                </a:solidFill>
-                <a:latin typeface="Calibri"/>
-              </a:rPr>
-              <a:t>3x</a:t>
+                  <a:srgbClr val="8E1600"/>
+                </a:solidFill>
+                <a:latin typeface="Calibri"/>
+              </a:rPr>
+              <a:t>0.5%</a:t>
             </a:r>
           </a:p>
           <a:p>
@@ -6210,7 +6063,7 @@
                 </a:solidFill>
                 <a:latin typeface="Calibri"/>
               </a:rPr>
-              <a:t>more work done</a:t>
+              <a:t>best rodinia benchmark</a:t>
             </a:r>
           </a:p>
           <a:p>
@@ -6227,14 +6080,14 @@
                 </a:solidFill>
                 <a:latin typeface="Calibri"/>
               </a:rPr>
-              <a:t>buffer on versus off</a:t>
-            </a:r>
-          </a:p>
-        </p:txBody>
-      </p:sp>
-      <p:sp>
-        <p:nvSpPr>
-          <p:cNvPr id="222" name="sh"/>
+              <a:t>traffic reaching flash</a:t>
+            </a:r>
+          </a:p>
+        </p:txBody>
+      </p:sp>
+      <p:sp>
+        <p:nvSpPr>
+          <p:cNvPr id="216" name="sh"/>
           <p:cNvSpPr txBox="1"/>
           <p:nvPr/>
         </p:nvSpPr>
@@ -6247,7 +6100,7 @@
             <a:avLst/>
           </a:prstGeom>
           <a:solidFill>
-            <a:srgbClr val="2E7D32"/>
+            <a:srgbClr val="8E1600"/>
           </a:solidFill>
           <a:ln>
             <a:noFill/>
@@ -6265,7 +6118,7 @@
       </p:sp>
       <p:sp>
         <p:nvSpPr>
-          <p:cNvPr id="223" name="sh"/>
+          <p:cNvPr id="217" name="sh"/>
           <p:cNvSpPr txBox="1"/>
           <p:nvPr/>
         </p:nvSpPr>
@@ -6298,11 +6151,11 @@
             <a:r>
               <a:rPr lang="en-US" sz="3600" b="1" i="0" dirty="0">
                 <a:solidFill>
-                  <a:srgbClr val="1F3864"/>
-                </a:solidFill>
-                <a:latin typeface="Calibri"/>
-              </a:rPr>
-              <a:t>0.74</a:t>
+                  <a:srgbClr val="8E1600"/>
+                </a:solidFill>
+                <a:latin typeface="Calibri"/>
+              </a:rPr>
+              <a:t>0.0%</a:t>
             </a:r>
           </a:p>
           <a:p>
@@ -6319,7 +6172,7 @@
                 </a:solidFill>
                 <a:latin typeface="Calibri"/>
               </a:rPr>
-              <a:t>buffer hit rate</a:t>
+              <a:t>seven of eleven</a:t>
             </a:r>
           </a:p>
           <a:p>
@@ -6336,14 +6189,14 @@
                 </a:solidFill>
                 <a:latin typeface="Calibri"/>
               </a:rPr>
-              <a:t>measured, not assumed</a:t>
-            </a:r>
-          </a:p>
-        </p:txBody>
-      </p:sp>
-      <p:sp>
-        <p:nvSpPr>
-          <p:cNvPr id="224" name="sh"/>
+              <a:t>no read-only data at all</a:t>
+            </a:r>
+          </a:p>
+        </p:txBody>
+      </p:sp>
+      <p:sp>
+        <p:nvSpPr>
+          <p:cNvPr id="218" name="sh"/>
           <p:cNvSpPr txBox="1"/>
           <p:nvPr/>
         </p:nvSpPr>
@@ -6356,7 +6209,7 @@
             <a:avLst/>
           </a:prstGeom>
           <a:solidFill>
-            <a:srgbClr val="1F3864"/>
+            <a:srgbClr val="8E1600"/>
           </a:solidFill>
           <a:ln>
             <a:noFill/>
@@ -6374,7 +6227,7 @@
       </p:sp>
       <p:sp>
         <p:nvSpPr>
-          <p:cNvPr id="225" name="sh"/>
+          <p:cNvPr id="219" name="sh"/>
           <p:cNvSpPr txBox="1"/>
           <p:nvPr/>
         </p:nvSpPr>
@@ -6407,11 +6260,11 @@
             <a:r>
               <a:rPr lang="en-US" sz="3600" b="1" i="0" dirty="0">
                 <a:solidFill>
-                  <a:srgbClr val="2E5C8A"/>
-                </a:solidFill>
-                <a:latin typeface="Calibri"/>
-              </a:rPr>
-              <a:t>6,074 ns</a:t>
+                  <a:srgbClr val="B26A00"/>
+                </a:solidFill>
+                <a:latin typeface="Calibri"/>
+              </a:rPr>
+              <a:t>3.3 TB</a:t>
             </a:r>
           </a:p>
           <a:p>
@@ -6428,7 +6281,7 @@
                 </a:solidFill>
                 <a:latin typeface="Calibri"/>
               </a:rPr>
-              <a:t>average latency</a:t>
+              <a:t>the one good suite</a:t>
             </a:r>
           </a:p>
           <a:p>
@@ -6445,14 +6298,14 @@
                 </a:solidFill>
                 <a:latin typeface="Calibri"/>
               </a:rPr>
-              <a:t>matches prediction</a:t>
-            </a:r>
-          </a:p>
-        </p:txBody>
-      </p:sp>
-      <p:sp>
-        <p:nvSpPr>
-          <p:cNvPr id="226" name="sh"/>
+              <a:t>CUTLASS -- too big to download</a:t>
+            </a:r>
+          </a:p>
+        </p:txBody>
+      </p:sp>
+      <p:sp>
+        <p:nvSpPr>
+          <p:cNvPr id="220" name="sh"/>
           <p:cNvSpPr txBox="1"/>
           <p:nvPr/>
         </p:nvSpPr>
@@ -6465,7 +6318,7 @@
             <a:avLst/>
           </a:prstGeom>
           <a:solidFill>
-            <a:srgbClr val="2E5C8A"/>
+            <a:srgbClr val="B26A00"/>
           </a:solidFill>
           <a:ln>
             <a:noFill/>
@@ -6483,7 +6336,7 @@
       </p:sp>
       <p:sp>
         <p:nvSpPr>
-          <p:cNvPr id="227" name="sh"/>
+          <p:cNvPr id="221" name="sh"/>
           <p:cNvSpPr txBox="1"/>
           <p:nvPr/>
         </p:nvSpPr>
@@ -6520,7 +6373,7 @@
                 </a:solidFill>
                 <a:latin typeface="Calibri"/>
               </a:rPr>
-              <a:t>0</a:t>
+              <a:t>4 sec</a:t>
             </a:r>
           </a:p>
           <a:p>
@@ -6537,7 +6390,7 @@
                 </a:solidFill>
                 <a:latin typeface="Calibri"/>
               </a:rPr>
-              <a:t>correctness errors</a:t>
+              <a:t>time to find out</a:t>
             </a:r>
           </a:p>
           <a:p>
@@ -6554,14 +6407,14 @@
                 </a:solidFill>
                 <a:latin typeface="Calibri"/>
               </a:rPr>
-              <a:t>all three counters clean</a:t>
-            </a:r>
-          </a:p>
-        </p:txBody>
-      </p:sp>
-      <p:sp>
-        <p:nvSpPr>
-          <p:cNvPr id="228" name="sh"/>
+              <a:t>instead of hours of simulation</a:t>
+            </a:r>
+          </a:p>
+        </p:txBody>
+      </p:sp>
+      <p:sp>
+        <p:nvSpPr>
+          <p:cNvPr id="222" name="sh"/>
           <p:cNvSpPr txBox="1"/>
           <p:nvPr/>
         </p:nvSpPr>
@@ -6592,7 +6445,7 @@
       </p:sp>
       <p:sp>
         <p:nvSpPr>
-          <p:cNvPr id="229" name="sh"/>
+          <p:cNvPr id="223" name="sh"/>
           <p:cNvSpPr txBox="1"/>
           <p:nvPr/>
         </p:nvSpPr>
@@ -6633,7 +6486,7 @@
                 </a:solidFill>
                 <a:latin typeface="Calibri"/>
               </a:rPr>
-              <a:t>Same trace, same settings, the only difference is the buffer being switched on.</a:t>
+              <a:t>Rodinia benchmarks are HPC kernels whose data is read AND written. backprop is training, so even its weights get written.</a:t>
             </a:r>
           </a:p>
           <a:p>
@@ -6655,14 +6508,14 @@
                 </a:solidFill>
                 <a:latin typeface="Calibri"/>
               </a:rPr>
-              <a:t>Predicted latency from hit rate was 5,829 ns against 6,074 ns measured, so hits, misses and timing now tell one consistent story.</a:t>
-            </a:r>
-          </a:p>
-        </p:txBody>
-      </p:sp>
-      <p:sp>
-        <p:nvSpPr>
-          <p:cNvPr id="230" name="nb"/>
+              <a:t>So no freely available benchmark can properly exercise H3. This is a real finding, not a setback -- and it took seconds to establish.</a:t>
+            </a:r>
+          </a:p>
+        </p:txBody>
+      </p:sp>
+      <p:sp>
+        <p:nvSpPr>
+          <p:cNvPr id="224" name="nb"/>
           <p:cNvSpPr txBox="1"/>
           <p:nvPr/>
         </p:nvSpPr>
@@ -6693,7 +6546,7 @@
       </p:sp>
       <p:sp>
         <p:nvSpPr>
-          <p:cNvPr id="231" name="sh"/>
+          <p:cNvPr id="225" name="sh"/>
           <p:cNvSpPr txBox="1"/>
           <p:nvPr/>
         </p:nvSpPr>
@@ -6745,7 +6598,7 @@
                 </a:solidFill>
                 <a:latin typeface="Calibri"/>
               </a:rPr>
-              <a:t>The 3x figure is measured rather than assumed. Both sides of that comparison are identical apart from the buffer, which is what makes it a fair test.</a:t>
+              <a:t>The tool now screens any trace before simulating it. If almost no traffic would reach flash, it stops and says so rather than wasting hours.</a:t>
             </a:r>
           </a:p>
         </p:txBody>
@@ -7024,14 +6877,45 @@
       </p:grpSpPr>
       <p:sp>
         <p:nvSpPr>
-          <p:cNvPr id="232" name="rule"/>
+          <p:cNvPr id="226" name="bg"/>
           <p:cNvSpPr txBox="1"/>
           <p:nvPr/>
         </p:nvSpPr>
         <p:spPr>
           <a:xfrm>
             <a:off x="0" y="0"/>
-            <a:ext cx="12192000" cy="68580"/>
+            <a:ext cx="12192000" cy="6858000"/>
+          </a:xfrm>
+          <a:prstGeom prst="rect">
+            <a:avLst/>
+          </a:prstGeom>
+          <a:solidFill>
+            <a:srgbClr val="1F3864"/>
+          </a:solidFill>
+          <a:ln>
+            <a:noFill/>
+          </a:ln>
+        </p:spPr>
+        <p:txBody>
+          <a:bodyPr wrap="square" lIns="137160" tIns="91440" rIns="137160" bIns="91440" anchor="t">
+            <a:normAutofit/>
+          </a:bodyPr>
+          <a:lstStyle/>
+          <a:p>
+            <a:endParaRPr lang="en-US"/>
+          </a:p>
+        </p:txBody>
+      </p:sp>
+      <p:sp>
+        <p:nvSpPr>
+          <p:cNvPr id="227" name="sh"/>
+          <p:cNvSpPr txBox="1"/>
+          <p:nvPr/>
+        </p:nvSpPr>
+        <p:spPr>
+          <a:xfrm>
+            <a:off x="0" y="0"/>
+            <a:ext cx="12192000" cy="137160"/>
           </a:xfrm>
           <a:prstGeom prst="rect">
             <a:avLst/>
@@ -7055,45 +6939,14 @@
       </p:sp>
       <p:sp>
         <p:nvSpPr>
-          <p:cNvPr id="233" name="spine"/>
-          <p:cNvSpPr txBox="1"/>
-          <p:nvPr/>
-        </p:nvSpPr>
-        <p:spPr>
-          <a:xfrm>
-            <a:off x="0" y="68580"/>
-            <a:ext cx="137160" cy="6789420"/>
-          </a:xfrm>
-          <a:prstGeom prst="rect">
-            <a:avLst/>
-          </a:prstGeom>
-          <a:solidFill>
-            <a:srgbClr val="1F3864"/>
-          </a:solidFill>
-          <a:ln>
-            <a:noFill/>
-          </a:ln>
-        </p:spPr>
-        <p:txBody>
-          <a:bodyPr wrap="square" lIns="137160" tIns="91440" rIns="137160" bIns="91440" anchor="t">
-            <a:normAutofit/>
-          </a:bodyPr>
-          <a:lstStyle/>
-          <a:p>
-            <a:endParaRPr lang="en-US"/>
-          </a:p>
-        </p:txBody>
-      </p:sp>
-      <p:sp>
-        <p:nvSpPr>
-          <p:cNvPr id="234" name="sh"/>
-          <p:cNvSpPr txBox="1"/>
-          <p:nvPr/>
-        </p:nvSpPr>
-        <p:spPr>
-          <a:xfrm>
-            <a:off x="731520" y="320040"/>
-            <a:ext cx="10728960" cy="300000"/>
+          <p:cNvPr id="228" name="sh"/>
+          <p:cNvSpPr txBox="1"/>
+          <p:nvPr/>
+        </p:nvSpPr>
+        <p:spPr>
+          <a:xfrm>
+            <a:off x="731520" y="2100000"/>
+            <a:ext cx="3000000" cy="1800000"/>
           </a:xfrm>
           <a:prstGeom prst="rect">
             <a:avLst/>
@@ -7113,27 +6966,27 @@
               <a:buNone/>
             </a:pPr>
             <a:r>
-              <a:rPr lang="en-US" sz="1100" b="1" i="0" spc="300" dirty="0">
-                <a:solidFill>
-                  <a:srgbClr val="C55A11"/>
-                </a:solidFill>
-                <a:latin typeface="Calibri"/>
-              </a:rPr>
-              <a:t>STATUS</a:t>
-            </a:r>
-          </a:p>
-        </p:txBody>
-      </p:sp>
-      <p:sp>
-        <p:nvSpPr>
-          <p:cNvPr id="235" name="sh"/>
-          <p:cNvSpPr txBox="1"/>
-          <p:nvPr/>
-        </p:nvSpPr>
-        <p:spPr>
-          <a:xfrm>
-            <a:off x="731520" y="620000"/>
-            <a:ext cx="10728960" cy="780000"/>
+              <a:rPr lang="en-US" sz="12000" b="1" i="0" dirty="0">
+                <a:solidFill>
+                  <a:srgbClr val="2C4F80"/>
+                </a:solidFill>
+                <a:latin typeface="Calibri"/>
+              </a:rPr>
+              <a:t>05</a:t>
+            </a:r>
+          </a:p>
+        </p:txBody>
+      </p:sp>
+      <p:sp>
+        <p:nvSpPr>
+          <p:cNvPr id="229" name="sh"/>
+          <p:cNvSpPr txBox="1"/>
+          <p:nvPr/>
+        </p:nvSpPr>
+        <p:spPr>
+          <a:xfrm>
+            <a:off x="2031520" y="2600000"/>
+            <a:ext cx="9428960" cy="900000"/>
           </a:xfrm>
           <a:prstGeom prst="rect">
             <a:avLst/>
@@ -7153,58 +7006,27 @@
               <a:buNone/>
             </a:pPr>
             <a:r>
-              <a:rPr lang="en-US" sz="2600" b="1" i="0" dirty="0">
-                <a:solidFill>
-                  <a:srgbClr val="1F3864"/>
-                </a:solidFill>
-                <a:latin typeface="Calibri"/>
-              </a:rPr>
-              <a:t>Where the project stands</a:t>
-            </a:r>
-          </a:p>
-        </p:txBody>
-      </p:sp>
-      <p:sp>
-        <p:nvSpPr>
-          <p:cNvPr id="236" name="ul"/>
-          <p:cNvSpPr txBox="1"/>
-          <p:nvPr/>
-        </p:nvSpPr>
-        <p:spPr>
-          <a:xfrm>
-            <a:off x="731520" y="1400000"/>
-            <a:ext cx="1600000" cy="40000"/>
-          </a:xfrm>
-          <a:prstGeom prst="rect">
-            <a:avLst/>
-          </a:prstGeom>
-          <a:solidFill>
-            <a:srgbClr val="C55A11"/>
-          </a:solidFill>
-          <a:ln>
-            <a:noFill/>
-          </a:ln>
-        </p:spPr>
-        <p:txBody>
-          <a:bodyPr wrap="square" lIns="137160" tIns="91440" rIns="137160" bIns="91440" anchor="t">
-            <a:normAutofit/>
-          </a:bodyPr>
-          <a:lstStyle/>
-          <a:p>
-            <a:endParaRPr lang="en-US"/>
-          </a:p>
-        </p:txBody>
-      </p:sp>
-      <p:sp>
-        <p:nvSpPr>
-          <p:cNvPr id="237" name="sh"/>
-          <p:cNvSpPr txBox="1"/>
-          <p:nvPr/>
-        </p:nvSpPr>
-        <p:spPr>
-          <a:xfrm>
-            <a:off x="731520" y="6358000"/>
-            <a:ext cx="6437376" cy="300000"/>
+              <a:rPr lang="en-US" sz="3400" b="1" i="0" dirty="0">
+                <a:solidFill>
+                  <a:srgbClr val="FFFFFF"/>
+                </a:solidFill>
+                <a:latin typeface="Calibri"/>
+              </a:rPr>
+              <a:t>Testing and results</a:t>
+            </a:r>
+          </a:p>
+        </p:txBody>
+      </p:sp>
+      <p:sp>
+        <p:nvSpPr>
+          <p:cNvPr id="230" name="sh"/>
+          <p:cNvSpPr txBox="1"/>
+          <p:nvPr/>
+        </p:nvSpPr>
+        <p:spPr>
+          <a:xfrm>
+            <a:off x="2031520" y="3600000"/>
+            <a:ext cx="9428960" cy="600000"/>
           </a:xfrm>
           <a:prstGeom prst="rect">
             <a:avLst/>
@@ -7224,20 +7046,20 @@
               <a:buNone/>
             </a:pPr>
             <a:r>
-              <a:rPr lang="en-US" sz="1000" b="0" i="0" dirty="0">
-                <a:solidFill>
-                  <a:srgbClr val="8FA3BF"/>
-                </a:solidFill>
-                <a:latin typeface="Calibri"/>
-              </a:rPr>
-              <a:t>H3 cycle-accurate memory simulator</a:t>
-            </a:r>
-          </a:p>
-        </p:txBody>
-      </p:sp>
-      <p:sp>
-        <p:nvSpPr>
-          <p:cNvPr id="238" name="sh"/>
+              <a:rPr lang="en-US" sz="1500" b="0" i="0" dirty="0">
+                <a:solidFill>
+                  <a:srgbClr val="9DB2D4"/>
+                </a:solidFill>
+                <a:latin typeface="Calibri"/>
+              </a:rPr>
+              <a:t>What works, what does not, and what it cost</a:t>
+            </a:r>
+          </a:p>
+        </p:txBody>
+      </p:sp>
+      <p:sp>
+        <p:nvSpPr>
+          <p:cNvPr id="231" name="sh"/>
           <p:cNvSpPr txBox="1"/>
           <p:nvPr/>
         </p:nvSpPr>
@@ -7266,707 +7088,11 @@
             <a:r>
               <a:rPr lang="en-US" sz="1100" b="1" i="0" dirty="0">
                 <a:solidFill>
-                  <a:srgbClr val="8FA3BF"/>
+                  <a:srgbClr val="5C7BA6"/>
                 </a:solidFill>
                 <a:latin typeface="Calibri"/>
               </a:rPr>
               <a:t>20</a:t>
-            </a:r>
-          </a:p>
-        </p:txBody>
-      </p:sp>
-      <p:sp>
-        <p:nvSpPr>
-          <p:cNvPr id="239" name="sh"/>
-          <p:cNvSpPr txBox="1"/>
-          <p:nvPr/>
-        </p:nvSpPr>
-        <p:spPr>
-          <a:xfrm>
-            <a:off x="731520" y="1580000"/>
-            <a:ext cx="1500000" cy="300000"/>
-          </a:xfrm>
-          <a:prstGeom prst="roundRect">
-            <a:avLst>
-              <a:gd name="adj" fmla="val 22000"/>
-            </a:avLst>
-          </a:prstGeom>
-          <a:solidFill>
-            <a:srgbClr val="2E7D32"/>
-          </a:solidFill>
-          <a:ln>
-            <a:noFill/>
-          </a:ln>
-        </p:spPr>
-        <p:txBody>
-          <a:bodyPr wrap="square" lIns="45720" tIns="27432" rIns="45720" bIns="27432" anchor="ctr">
-            <a:normAutofit/>
-          </a:bodyPr>
-          <a:lstStyle/>
-          <a:p>
-            <a:pPr marL="0" indent="0" algn="ctr">
-              <a:buNone/>
-            </a:pPr>
-            <a:r>
-              <a:rPr lang="en-US" sz="1000" b="1" i="0" spc="150" dirty="0">
-                <a:solidFill>
-                  <a:srgbClr val="FFFFFF"/>
-                </a:solidFill>
-                <a:latin typeface="Calibri"/>
-              </a:rPr>
-              <a:t>WORKING</a:t>
-            </a:r>
-          </a:p>
-        </p:txBody>
-      </p:sp>
-      <p:sp>
-        <p:nvSpPr>
-          <p:cNvPr id="240" name="sh"/>
-          <p:cNvSpPr txBox="1"/>
-          <p:nvPr/>
-        </p:nvSpPr>
-        <p:spPr>
-          <a:xfrm>
-            <a:off x="2381520" y="1550000"/>
-            <a:ext cx="9078960" cy="380000"/>
-          </a:xfrm>
-          <a:prstGeom prst="rect">
-            <a:avLst/>
-          </a:prstGeom>
-          <a:noFill/>
-          <a:ln>
-            <a:noFill/>
-          </a:ln>
-        </p:spPr>
-        <p:txBody>
-          <a:bodyPr wrap="square" lIns="0" tIns="0" rIns="0" bIns="0" anchor="t">
-            <a:normAutofit/>
-          </a:bodyPr>
-          <a:lstStyle/>
-          <a:p>
-            <a:pPr marL="0" indent="0" algn="l">
-              <a:buNone/>
-            </a:pPr>
-            <a:r>
-              <a:rPr lang="en-US" sz="1450" b="1" i="0" dirty="0">
-                <a:solidFill>
-                  <a:srgbClr val="1A1D21"/>
-                </a:solidFill>
-                <a:latin typeface="Calibri"/>
-              </a:rPr>
-              <a:t>Full pipeline runs end to end</a:t>
-            </a:r>
-          </a:p>
-          <a:p>
-            <a:pPr marL="0" indent="0" algn="l">
-              <a:spcBef>
-                <a:spcPts val="80"/>
-              </a:spcBef>
-              <a:buNone/>
-            </a:pPr>
-            <a:r>
-              <a:rPr lang="en-US" sz="1200" b="0" i="0" dirty="0">
-                <a:solidFill>
-                  <a:srgbClr val="5F6368"/>
-                </a:solidFill>
-                <a:latin typeface="Calibri"/>
-              </a:rPr>
-              <a:t>200,000 cycles, clean exit, both memory models working</a:t>
-            </a:r>
-          </a:p>
-        </p:txBody>
-      </p:sp>
-      <p:sp>
-        <p:nvSpPr>
-          <p:cNvPr id="241" name="sh"/>
-          <p:cNvSpPr txBox="1"/>
-          <p:nvPr/>
-        </p:nvSpPr>
-        <p:spPr>
-          <a:xfrm>
-            <a:off x="731520" y="2240000"/>
-            <a:ext cx="1500000" cy="300000"/>
-          </a:xfrm>
-          <a:prstGeom prst="roundRect">
-            <a:avLst>
-              <a:gd name="adj" fmla="val 22000"/>
-            </a:avLst>
-          </a:prstGeom>
-          <a:solidFill>
-            <a:srgbClr val="2E7D32"/>
-          </a:solidFill>
-          <a:ln>
-            <a:noFill/>
-          </a:ln>
-        </p:spPr>
-        <p:txBody>
-          <a:bodyPr wrap="square" lIns="45720" tIns="27432" rIns="45720" bIns="27432" anchor="ctr">
-            <a:normAutofit/>
-          </a:bodyPr>
-          <a:lstStyle/>
-          <a:p>
-            <a:pPr marL="0" indent="0" algn="ctr">
-              <a:buNone/>
-            </a:pPr>
-            <a:r>
-              <a:rPr lang="en-US" sz="1000" b="1" i="0" spc="150" dirty="0">
-                <a:solidFill>
-                  <a:srgbClr val="FFFFFF"/>
-                </a:solidFill>
-                <a:latin typeface="Calibri"/>
-              </a:rPr>
-              <a:t>WORKING</a:t>
-            </a:r>
-          </a:p>
-        </p:txBody>
-      </p:sp>
-      <p:sp>
-        <p:nvSpPr>
-          <p:cNvPr id="242" name="sh"/>
-          <p:cNvSpPr txBox="1"/>
-          <p:nvPr/>
-        </p:nvSpPr>
-        <p:spPr>
-          <a:xfrm>
-            <a:off x="2381520" y="2210000"/>
-            <a:ext cx="9078960" cy="380000"/>
-          </a:xfrm>
-          <a:prstGeom prst="rect">
-            <a:avLst/>
-          </a:prstGeom>
-          <a:noFill/>
-          <a:ln>
-            <a:noFill/>
-          </a:ln>
-        </p:spPr>
-        <p:txBody>
-          <a:bodyPr wrap="square" lIns="0" tIns="0" rIns="0" bIns="0" anchor="t">
-            <a:normAutofit/>
-          </a:bodyPr>
-          <a:lstStyle/>
-          <a:p>
-            <a:pPr marL="0" indent="0" algn="l">
-              <a:buNone/>
-            </a:pPr>
-            <a:r>
-              <a:rPr lang="en-US" sz="1450" b="1" i="0" dirty="0">
-                <a:solidFill>
-                  <a:srgbClr val="1A1D21"/>
-                </a:solidFill>
-                <a:latin typeface="Calibri"/>
-              </a:rPr>
-              <a:t>Flash model, router, buffer, scheduler</a:t>
-            </a:r>
-          </a:p>
-          <a:p>
-            <a:pPr marL="0" indent="0" algn="l">
-              <a:spcBef>
-                <a:spcPts val="80"/>
-              </a:spcBef>
-              <a:buNone/>
-            </a:pPr>
-            <a:r>
-              <a:rPr lang="en-US" sz="1200" b="0" i="0" dirty="0">
-                <a:solidFill>
-                  <a:srgbClr val="5F6368"/>
-                </a:solidFill>
-                <a:latin typeface="Calibri"/>
-              </a:rPr>
-              <a:t>All four components built, tested and integrated</a:t>
-            </a:r>
-          </a:p>
-        </p:txBody>
-      </p:sp>
-      <p:sp>
-        <p:nvSpPr>
-          <p:cNvPr id="243" name="sh"/>
-          <p:cNvSpPr txBox="1"/>
-          <p:nvPr/>
-        </p:nvSpPr>
-        <p:spPr>
-          <a:xfrm>
-            <a:off x="731520" y="2900000"/>
-            <a:ext cx="1500000" cy="300000"/>
-          </a:xfrm>
-          <a:prstGeom prst="roundRect">
-            <a:avLst>
-              <a:gd name="adj" fmla="val 22000"/>
-            </a:avLst>
-          </a:prstGeom>
-          <a:solidFill>
-            <a:srgbClr val="2E7D32"/>
-          </a:solidFill>
-          <a:ln>
-            <a:noFill/>
-          </a:ln>
-        </p:spPr>
-        <p:txBody>
-          <a:bodyPr wrap="square" lIns="45720" tIns="27432" rIns="45720" bIns="27432" anchor="ctr">
-            <a:normAutofit/>
-          </a:bodyPr>
-          <a:lstStyle/>
-          <a:p>
-            <a:pPr marL="0" indent="0" algn="ctr">
-              <a:buNone/>
-            </a:pPr>
-            <a:r>
-              <a:rPr lang="en-US" sz="1000" b="1" i="0" spc="150" dirty="0">
-                <a:solidFill>
-                  <a:srgbClr val="FFFFFF"/>
-                </a:solidFill>
-                <a:latin typeface="Calibri"/>
-              </a:rPr>
-              <a:t>WORKING</a:t>
-            </a:r>
-          </a:p>
-        </p:txBody>
-      </p:sp>
-      <p:sp>
-        <p:nvSpPr>
-          <p:cNvPr id="244" name="sh"/>
-          <p:cNvSpPr txBox="1"/>
-          <p:nvPr/>
-        </p:nvSpPr>
-        <p:spPr>
-          <a:xfrm>
-            <a:off x="2381520" y="2870000"/>
-            <a:ext cx="9078960" cy="380000"/>
-          </a:xfrm>
-          <a:prstGeom prst="rect">
-            <a:avLst/>
-          </a:prstGeom>
-          <a:noFill/>
-          <a:ln>
-            <a:noFill/>
-          </a:ln>
-        </p:spPr>
-        <p:txBody>
-          <a:bodyPr wrap="square" lIns="0" tIns="0" rIns="0" bIns="0" anchor="t">
-            <a:normAutofit/>
-          </a:bodyPr>
-          <a:lstStyle/>
-          <a:p>
-            <a:pPr marL="0" indent="0" algn="l">
-              <a:buNone/>
-            </a:pPr>
-            <a:r>
-              <a:rPr lang="en-US" sz="1450" b="1" i="0" dirty="0">
-                <a:solidFill>
-                  <a:srgbClr val="1A1D21"/>
-                </a:solidFill>
-                <a:latin typeface="Calibri"/>
-              </a:rPr>
-              <a:t>Published to GitHub with both simulators as submodules</a:t>
-            </a:r>
-          </a:p>
-          <a:p>
-            <a:pPr marL="0" indent="0" algn="l">
-              <a:spcBef>
-                <a:spcPts val="80"/>
-              </a:spcBef>
-              <a:buNone/>
-            </a:pPr>
-            <a:r>
-              <a:rPr lang="en-US" sz="1200" b="0" i="0" dirty="0">
-                <a:solidFill>
-                  <a:srgbClr val="5F6368"/>
-                </a:solidFill>
-                <a:latin typeface="Calibri"/>
-              </a:rPr>
-              <a:t>Reproducible on another machine with one clone command</a:t>
-            </a:r>
-          </a:p>
-        </p:txBody>
-      </p:sp>
-      <p:sp>
-        <p:nvSpPr>
-          <p:cNvPr id="245" name="sh"/>
-          <p:cNvSpPr txBox="1"/>
-          <p:nvPr/>
-        </p:nvSpPr>
-        <p:spPr>
-          <a:xfrm>
-            <a:off x="731520" y="3560000"/>
-            <a:ext cx="1500000" cy="300000"/>
-          </a:xfrm>
-          <a:prstGeom prst="roundRect">
-            <a:avLst>
-              <a:gd name="adj" fmla="val 22000"/>
-            </a:avLst>
-          </a:prstGeom>
-          <a:solidFill>
-            <a:srgbClr val="B26A00"/>
-          </a:solidFill>
-          <a:ln>
-            <a:noFill/>
-          </a:ln>
-        </p:spPr>
-        <p:txBody>
-          <a:bodyPr wrap="square" lIns="45720" tIns="27432" rIns="45720" bIns="27432" anchor="ctr">
-            <a:normAutofit/>
-          </a:bodyPr>
-          <a:lstStyle/>
-          <a:p>
-            <a:pPr marL="0" indent="0" algn="ctr">
-              <a:buNone/>
-            </a:pPr>
-            <a:r>
-              <a:rPr lang="en-US" sz="1000" b="1" i="0" spc="150" dirty="0">
-                <a:solidFill>
-                  <a:srgbClr val="FFFFFF"/>
-                </a:solidFill>
-                <a:latin typeface="Calibri"/>
-              </a:rPr>
-              <a:t>PARTIAL</a:t>
-            </a:r>
-          </a:p>
-        </p:txBody>
-      </p:sp>
-      <p:sp>
-        <p:nvSpPr>
-          <p:cNvPr id="246" name="sh"/>
-          <p:cNvSpPr txBox="1"/>
-          <p:nvPr/>
-        </p:nvSpPr>
-        <p:spPr>
-          <a:xfrm>
-            <a:off x="2381520" y="3530000"/>
-            <a:ext cx="9078960" cy="380000"/>
-          </a:xfrm>
-          <a:prstGeom prst="rect">
-            <a:avLst/>
-          </a:prstGeom>
-          <a:noFill/>
-          <a:ln>
-            <a:noFill/>
-          </a:ln>
-        </p:spPr>
-        <p:txBody>
-          <a:bodyPr wrap="square" lIns="0" tIns="0" rIns="0" bIns="0" anchor="t">
-            <a:normAutofit/>
-          </a:bodyPr>
-          <a:lstStyle/>
-          <a:p>
-            <a:pPr marL="0" indent="0" algn="l">
-              <a:buNone/>
-            </a:pPr>
-            <a:r>
-              <a:rPr lang="en-US" sz="1450" b="1" i="0" dirty="0">
-                <a:solidFill>
-                  <a:srgbClr val="1A1D21"/>
-                </a:solidFill>
-                <a:latin typeface="Calibri"/>
-              </a:rPr>
-              <a:t>Power modelling</a:t>
-            </a:r>
-          </a:p>
-          <a:p>
-            <a:pPr marL="0" indent="0" algn="l">
-              <a:spcBef>
-                <a:spcPts val="80"/>
-              </a:spcBef>
-              <a:buNone/>
-            </a:pPr>
-            <a:r>
-              <a:rPr lang="en-US" sz="1200" b="0" i="0" dirty="0">
-                <a:solidFill>
-                  <a:srgbClr val="5F6368"/>
-                </a:solidFill>
-                <a:latin typeface="Calibri"/>
-              </a:rPr>
-              <a:t>First-order only; command-level counts not yet wired through</a:t>
-            </a:r>
-          </a:p>
-        </p:txBody>
-      </p:sp>
-      <p:sp>
-        <p:nvSpPr>
-          <p:cNvPr id="247" name="sh"/>
-          <p:cNvSpPr txBox="1"/>
-          <p:nvPr/>
-        </p:nvSpPr>
-        <p:spPr>
-          <a:xfrm>
-            <a:off x="731520" y="4220000"/>
-            <a:ext cx="1500000" cy="300000"/>
-          </a:xfrm>
-          <a:prstGeom prst="roundRect">
-            <a:avLst>
-              <a:gd name="adj" fmla="val 22000"/>
-            </a:avLst>
-          </a:prstGeom>
-          <a:solidFill>
-            <a:srgbClr val="5F6368"/>
-          </a:solidFill>
-          <a:ln>
-            <a:noFill/>
-          </a:ln>
-        </p:spPr>
-        <p:txBody>
-          <a:bodyPr wrap="square" lIns="45720" tIns="27432" rIns="45720" bIns="27432" anchor="ctr">
-            <a:normAutofit/>
-          </a:bodyPr>
-          <a:lstStyle/>
-          <a:p>
-            <a:pPr marL="0" indent="0" algn="ctr">
-              <a:buNone/>
-            </a:pPr>
-            <a:r>
-              <a:rPr lang="en-US" sz="1000" b="1" i="0" spc="150" dirty="0">
-                <a:solidFill>
-                  <a:srgbClr val="FFFFFF"/>
-                </a:solidFill>
-                <a:latin typeface="Calibri"/>
-              </a:rPr>
-              <a:t>PLANNED</a:t>
-            </a:r>
-          </a:p>
-        </p:txBody>
-      </p:sp>
-      <p:sp>
-        <p:nvSpPr>
-          <p:cNvPr id="248" name="sh"/>
-          <p:cNvSpPr txBox="1"/>
-          <p:nvPr/>
-        </p:nvSpPr>
-        <p:spPr>
-          <a:xfrm>
-            <a:off x="2381520" y="4190000"/>
-            <a:ext cx="9078960" cy="380000"/>
-          </a:xfrm>
-          <a:prstGeom prst="rect">
-            <a:avLst/>
-          </a:prstGeom>
-          <a:noFill/>
-          <a:ln>
-            <a:noFill/>
-          </a:ln>
-        </p:spPr>
-        <p:txBody>
-          <a:bodyPr wrap="square" lIns="0" tIns="0" rIns="0" bIns="0" anchor="t">
-            <a:normAutofit/>
-          </a:bodyPr>
-          <a:lstStyle/>
-          <a:p>
-            <a:pPr marL="0" indent="0" algn="l">
-              <a:buNone/>
-            </a:pPr>
-            <a:r>
-              <a:rPr lang="en-US" sz="1450" b="1" i="0" dirty="0">
-                <a:solidFill>
-                  <a:srgbClr val="1A1D21"/>
-                </a:solidFill>
-                <a:latin typeface="Calibri"/>
-              </a:rPr>
-              <a:t>Real Llama traces</a:t>
-            </a:r>
-          </a:p>
-          <a:p>
-            <a:pPr marL="0" indent="0" algn="l">
-              <a:spcBef>
-                <a:spcPts val="80"/>
-              </a:spcBef>
-              <a:buNone/>
-            </a:pPr>
-            <a:r>
-              <a:rPr lang="en-US" sz="1200" b="0" i="0" dirty="0">
-                <a:solidFill>
-                  <a:srgbClr val="5F6368"/>
-                </a:solidFill>
-                <a:latin typeface="Calibri"/>
-              </a:rPr>
-              <a:t>Needs a machine with NVIDIA A100 or H100 GPUs</a:t>
-            </a:r>
-          </a:p>
-        </p:txBody>
-      </p:sp>
-      <p:sp>
-        <p:nvSpPr>
-          <p:cNvPr id="249" name="sh"/>
-          <p:cNvSpPr txBox="1"/>
-          <p:nvPr/>
-        </p:nvSpPr>
-        <p:spPr>
-          <a:xfrm>
-            <a:off x="731520" y="4880000"/>
-            <a:ext cx="1500000" cy="300000"/>
-          </a:xfrm>
-          <a:prstGeom prst="roundRect">
-            <a:avLst>
-              <a:gd name="adj" fmla="val 22000"/>
-            </a:avLst>
-          </a:prstGeom>
-          <a:solidFill>
-            <a:srgbClr val="8E1600"/>
-          </a:solidFill>
-          <a:ln>
-            <a:noFill/>
-          </a:ln>
-        </p:spPr>
-        <p:txBody>
-          <a:bodyPr wrap="square" lIns="45720" tIns="27432" rIns="45720" bIns="27432" anchor="ctr">
-            <a:normAutofit/>
-          </a:bodyPr>
-          <a:lstStyle/>
-          <a:p>
-            <a:pPr marL="0" indent="0" algn="ctr">
-              <a:buNone/>
-            </a:pPr>
-            <a:r>
-              <a:rPr lang="en-US" sz="1000" b="1" i="0" spc="150" dirty="0">
-                <a:solidFill>
-                  <a:srgbClr val="FFFFFF"/>
-                </a:solidFill>
-                <a:latin typeface="Calibri"/>
-              </a:rPr>
-              <a:t>NOT DONE</a:t>
-            </a:r>
-          </a:p>
-        </p:txBody>
-      </p:sp>
-      <p:sp>
-        <p:nvSpPr>
-          <p:cNvPr id="250" name="sh"/>
-          <p:cNvSpPr txBox="1"/>
-          <p:nvPr/>
-        </p:nvSpPr>
-        <p:spPr>
-          <a:xfrm>
-            <a:off x="2381520" y="4850000"/>
-            <a:ext cx="9078960" cy="380000"/>
-          </a:xfrm>
-          <a:prstGeom prst="rect">
-            <a:avLst/>
-          </a:prstGeom>
-          <a:noFill/>
-          <a:ln>
-            <a:noFill/>
-          </a:ln>
-        </p:spPr>
-        <p:txBody>
-          <a:bodyPr wrap="square" lIns="0" tIns="0" rIns="0" bIns="0" anchor="t">
-            <a:normAutofit/>
-          </a:bodyPr>
-          <a:lstStyle/>
-          <a:p>
-            <a:pPr marL="0" indent="0" algn="l">
-              <a:buNone/>
-            </a:pPr>
-            <a:r>
-              <a:rPr lang="en-US" sz="1450" b="1" i="0" dirty="0">
-                <a:solidFill>
-                  <a:srgbClr val="1A1D21"/>
-                </a:solidFill>
-                <a:latin typeface="Calibri"/>
-              </a:rPr>
-              <a:t>The paper's 2.69x throughput-per-watt figure</a:t>
-            </a:r>
-          </a:p>
-          <a:p>
-            <a:pPr marL="0" indent="0" algn="l">
-              <a:spcBef>
-                <a:spcPts val="80"/>
-              </a:spcBef>
-              <a:buNone/>
-            </a:pPr>
-            <a:r>
-              <a:rPr lang="en-US" sz="1200" b="0" i="0" dirty="0">
-                <a:solidFill>
-                  <a:srgbClr val="5F6368"/>
-                </a:solidFill>
-                <a:latin typeface="Calibri"/>
-              </a:rPr>
-              <a:t>Would need the analytical model, which we chose not to build</a:t>
-            </a:r>
-          </a:p>
-        </p:txBody>
-      </p:sp>
-      <p:sp>
-        <p:nvSpPr>
-          <p:cNvPr id="251" name="nb"/>
-          <p:cNvSpPr txBox="1"/>
-          <p:nvPr/>
-        </p:nvSpPr>
-        <p:spPr>
-          <a:xfrm>
-            <a:off x="731520" y="4980000"/>
-            <a:ext cx="68580" cy="1150000"/>
-          </a:xfrm>
-          <a:prstGeom prst="rect">
-            <a:avLst/>
-          </a:prstGeom>
-          <a:solidFill>
-            <a:srgbClr val="C55A11"/>
-          </a:solidFill>
-          <a:ln>
-            <a:noFill/>
-          </a:ln>
-        </p:spPr>
-        <p:txBody>
-          <a:bodyPr wrap="square" lIns="137160" tIns="91440" rIns="137160" bIns="91440" anchor="t">
-            <a:normAutofit/>
-          </a:bodyPr>
-          <a:lstStyle/>
-          <a:p>
-            <a:endParaRPr lang="en-US"/>
-          </a:p>
-        </p:txBody>
-      </p:sp>
-      <p:sp>
-        <p:nvSpPr>
-          <p:cNvPr id="252" name="sh"/>
-          <p:cNvSpPr txBox="1"/>
-          <p:nvPr/>
-        </p:nvSpPr>
-        <p:spPr>
-          <a:xfrm>
-            <a:off x="800100" y="4980000"/>
-            <a:ext cx="10660380" cy="1150000"/>
-          </a:xfrm>
-          <a:prstGeom prst="rect">
-            <a:avLst/>
-          </a:prstGeom>
-          <a:solidFill>
-            <a:srgbClr val="EAEFF6"/>
-          </a:solidFill>
-          <a:ln>
-            <a:noFill/>
-          </a:ln>
-        </p:spPr>
-        <p:txBody>
-          <a:bodyPr wrap="square" lIns="137160" tIns="91440" rIns="137160" bIns="91440" anchor="t">
-            <a:normAutofit/>
-          </a:bodyPr>
-          <a:lstStyle/>
-          <a:p>
-            <a:pPr marL="0" indent="0" algn="l">
-              <a:buNone/>
-            </a:pPr>
-            <a:r>
-              <a:rPr lang="en-US" sz="1000" b="1" i="0" spc="200" dirty="0">
-                <a:solidFill>
-                  <a:srgbClr val="C55A11"/>
-                </a:solidFill>
-                <a:latin typeface="Calibri"/>
-              </a:rPr>
-              <a:t>IN PLAIN WORDS</a:t>
-            </a:r>
-          </a:p>
-          <a:p>
-            <a:pPr marL="0" indent="0" algn="l">
-              <a:spcBef>
-                <a:spcPts val="250"/>
-              </a:spcBef>
-              <a:buNone/>
-            </a:pPr>
-            <a:r>
-              <a:rPr lang="en-US" sz="1400" b="0" i="0" dirty="0">
-                <a:solidFill>
-                  <a:srgbClr val="1A1D21"/>
-                </a:solidFill>
-                <a:latin typeface="Calibri"/>
-              </a:rPr>
-              <a:t>The simulator is built and validated. Being correct and being complete are two different things, and only the first is true today.</a:t>
             </a:r>
           </a:p>
         </p:txBody>
@@ -7998,7 +7124,7 @@
       </p:grpSpPr>
       <p:sp>
         <p:nvSpPr>
-          <p:cNvPr id="253" name="rule"/>
+          <p:cNvPr id="232" name="rule"/>
           <p:cNvSpPr txBox="1"/>
           <p:nvPr/>
         </p:nvSpPr>
@@ -8029,7 +7155,7 @@
       </p:sp>
       <p:sp>
         <p:nvSpPr>
-          <p:cNvPr id="254" name="spine"/>
+          <p:cNvPr id="233" name="spine"/>
           <p:cNvSpPr txBox="1"/>
           <p:nvPr/>
         </p:nvSpPr>
@@ -8060,7 +7186,7 @@
       </p:sp>
       <p:sp>
         <p:nvSpPr>
-          <p:cNvPr id="255" name="sh"/>
+          <p:cNvPr id="234" name="sh"/>
           <p:cNvSpPr txBox="1"/>
           <p:nvPr/>
         </p:nvSpPr>
@@ -8093,14 +7219,14 @@
                 </a:solidFill>
                 <a:latin typeface="Calibri"/>
               </a:rPr>
-              <a:t>LIMITS</a:t>
-            </a:r>
-          </a:p>
-        </p:txBody>
-      </p:sp>
-      <p:sp>
-        <p:nvSpPr>
-          <p:cNvPr id="256" name="sh"/>
+              <a:t>TESTING</a:t>
+            </a:r>
+          </a:p>
+        </p:txBody>
+      </p:sp>
+      <p:sp>
+        <p:nvSpPr>
+          <p:cNvPr id="235" name="sh"/>
           <p:cNvSpPr txBox="1"/>
           <p:nvPr/>
         </p:nvSpPr>
@@ -8133,14 +7259,14 @@
                 </a:solidFill>
                 <a:latin typeface="Calibri"/>
               </a:rPr>
-              <a:t>Honest limits of the current results</a:t>
-            </a:r>
-          </a:p>
-        </p:txBody>
-      </p:sp>
-      <p:sp>
-        <p:nvSpPr>
-          <p:cNvPr id="257" name="ul"/>
+              <a:t>How we tested it</a:t>
+            </a:r>
+          </a:p>
+        </p:txBody>
+      </p:sp>
+      <p:sp>
+        <p:nvSpPr>
+          <p:cNvPr id="236" name="ul"/>
           <p:cNvSpPr txBox="1"/>
           <p:nvPr/>
         </p:nvSpPr>
@@ -8171,7 +7297,7 @@
       </p:sp>
       <p:sp>
         <p:nvSpPr>
-          <p:cNvPr id="258" name="sh"/>
+          <p:cNvPr id="237" name="sh"/>
           <p:cNvSpPr txBox="1"/>
           <p:nvPr/>
         </p:nvSpPr>
@@ -8211,7 +7337,7 @@
       </p:sp>
       <p:sp>
         <p:nvSpPr>
-          <p:cNvPr id="259" name="sh"/>
+          <p:cNvPr id="238" name="sh"/>
           <p:cNvSpPr txBox="1"/>
           <p:nvPr/>
         </p:nvSpPr>
@@ -8251,32 +7377,76 @@
       </p:sp>
       <p:sp>
         <p:nvSpPr>
-          <p:cNvPr id="260" name="sh"/>
+          <p:cNvPr id="239" name="sh"/>
           <p:cNvSpPr txBox="1"/>
           <p:nvPr/>
         </p:nvSpPr>
         <p:spPr>
           <a:xfrm>
             <a:off x="731520" y="1560000"/>
-            <a:ext cx="10728960" cy="3200000"/>
-          </a:xfrm>
-          <a:prstGeom prst="rect">
-            <a:avLst/>
-          </a:prstGeom>
-          <a:noFill/>
-          <a:ln>
-            <a:noFill/>
-          </a:ln>
-        </p:spPr>
-        <p:txBody>
-          <a:bodyPr wrap="square" lIns="0" tIns="0" rIns="0" bIns="0" anchor="t">
+            <a:ext cx="5214480" cy="340000"/>
+          </a:xfrm>
+          <a:prstGeom prst="rect">
+            <a:avLst/>
+          </a:prstGeom>
+          <a:solidFill>
+            <a:srgbClr val="1F3864"/>
+          </a:solidFill>
+          <a:ln>
+            <a:noFill/>
+          </a:ln>
+        </p:spPr>
+        <p:txBody>
+          <a:bodyPr wrap="square" lIns="114300" tIns="60960" rIns="114300" bIns="60960" anchor="t">
+            <a:normAutofit/>
+          </a:bodyPr>
+          <a:lstStyle/>
+          <a:p>
+            <a:pPr marL="0" indent="0" algn="l">
+              <a:buNone/>
+            </a:pPr>
+            <a:r>
+              <a:rPr lang="en-US" sz="1150" b="1" i="0" spc="200" dirty="0">
+                <a:solidFill>
+                  <a:srgbClr val="FFFFFF"/>
+                </a:solidFill>
+                <a:latin typeface="Calibri"/>
+              </a:rPr>
+              <a:t>APPROACH</a:t>
+            </a:r>
+          </a:p>
+        </p:txBody>
+      </p:sp>
+      <p:sp>
+        <p:nvSpPr>
+          <p:cNvPr id="240" name="sh"/>
+          <p:cNvSpPr txBox="1"/>
+          <p:nvPr/>
+        </p:nvSpPr>
+        <p:spPr>
+          <a:xfrm>
+            <a:off x="731520" y="1980000"/>
+            <a:ext cx="5214480" cy="2800000"/>
+          </a:xfrm>
+          <a:prstGeom prst="rect">
+            <a:avLst/>
+          </a:prstGeom>
+          <a:solidFill>
+            <a:srgbClr val="F5F7FA"/>
+          </a:solidFill>
+          <a:ln>
+            <a:noFill/>
+          </a:ln>
+        </p:spPr>
+        <p:txBody>
+          <a:bodyPr wrap="square" lIns="137160" tIns="91440" rIns="137160" bIns="91440" anchor="t">
             <a:normAutofit/>
           </a:bodyPr>
           <a:lstStyle/>
           <a:p>
             <a:pPr marL="228600" indent="-228600" algn="l">
               <a:spcBef>
-                <a:spcPts val="520"/>
+                <a:spcPts val="440"/>
               </a:spcBef>
               <a:buClr>
                 <a:srgbClr val="C55A11"/>
@@ -8286,19 +7456,41 @@
               <a:buChar char="■"/>
             </a:pPr>
             <a:r>
-              <a:rPr lang="en-US" sz="1550" b="0" i="0" dirty="0">
+              <a:rPr lang="en-US" sz="1450" b="0" i="0" dirty="0">
                 <a:solidFill>
                   <a:srgbClr val="1A1D21"/>
                 </a:solidFill>
                 <a:latin typeface="Calibri"/>
               </a:rPr>
-              <a:t>The test workload is a stand-in, not a real LLM trace</a:t>
+              <a:t>207 automated checks in 5 test programs</a:t>
+            </a:r>
+          </a:p>
+          <a:p>
+            <a:pPr marL="228600" indent="-228600" algn="l">
+              <a:spcBef>
+                <a:spcPts val="440"/>
+              </a:spcBef>
+              <a:buClr>
+                <a:srgbClr val="C55A11"/>
+              </a:buClr>
+              <a:buSzPct val="90000"/>
+              <a:buFont typeface="Arial"/>
+              <a:buChar char="■"/>
+            </a:pPr>
+            <a:r>
+              <a:rPr lang="en-US" sz="1450" b="0" i="0" dirty="0">
+                <a:solidFill>
+                  <a:srgbClr val="1A1D21"/>
+                </a:solidFill>
+                <a:latin typeface="Calibri"/>
+              </a:rPr>
+              <a:t>DECISION: H3 code depends on neither simulator</a:t>
             </a:r>
           </a:p>
           <a:p>
             <a:pPr marL="457200" indent="-228600" algn="l">
               <a:spcBef>
-                <a:spcPts val="380"/>
+                <a:spcPts val="320"/>
               </a:spcBef>
               <a:buClr>
                 <a:srgbClr val="8FA3BF"/>
@@ -8308,19 +7500,19 @@
               <a:buChar char="–"/>
             </a:pPr>
             <a:r>
-              <a:rPr lang="en-US" sz="1400" b="0" i="0" dirty="0">
+              <a:rPr lang="en-US" sz="1300" b="0" i="0" dirty="0">
                 <a:solidFill>
                   <a:srgbClr val="5F6368"/>
                 </a:solidFill>
                 <a:latin typeface="Calibri"/>
               </a:rPr>
-              <a:t>It has no computation between memory accesses, which is the worst case</a:t>
+              <a:t>So tests run in seconds, not after a 30 minute build</a:t>
             </a:r>
           </a:p>
           <a:p>
             <a:pPr marL="228600" indent="-228600" algn="l">
               <a:spcBef>
-                <a:spcPts val="520"/>
+                <a:spcPts val="440"/>
               </a:spcBef>
               <a:buClr>
                 <a:srgbClr val="C55A11"/>
@@ -8330,19 +7522,155 @@
               <a:buChar char="■"/>
             </a:pPr>
             <a:r>
-              <a:rPr lang="en-US" sz="1550" b="0" i="0" dirty="0">
+              <a:rPr lang="en-US" sz="1450" b="0" i="0" dirty="0">
                 <a:solidFill>
                   <a:srgbClr val="1A1D21"/>
                 </a:solidFill>
                 <a:latin typeface="Calibri"/>
               </a:rPr>
-              <a:t>The run is too short to reach steady state</a:t>
+              <a:t>A trace checker validates input before the simulator sees it</a:t>
+            </a:r>
+          </a:p>
+        </p:txBody>
+      </p:sp>
+      <p:sp>
+        <p:nvSpPr>
+          <p:cNvPr id="241" name="sh"/>
+          <p:cNvSpPr txBox="1"/>
+          <p:nvPr/>
+        </p:nvSpPr>
+        <p:spPr>
+          <a:xfrm>
+            <a:off x="6246000" y="1560000"/>
+            <a:ext cx="5214480" cy="340000"/>
+          </a:xfrm>
+          <a:prstGeom prst="rect">
+            <a:avLst/>
+          </a:prstGeom>
+          <a:solidFill>
+            <a:srgbClr val="C55A11"/>
+          </a:solidFill>
+          <a:ln>
+            <a:noFill/>
+          </a:ln>
+        </p:spPr>
+        <p:txBody>
+          <a:bodyPr wrap="square" lIns="114300" tIns="60960" rIns="114300" bIns="60960" anchor="t">
+            <a:normAutofit/>
+          </a:bodyPr>
+          <a:lstStyle/>
+          <a:p>
+            <a:pPr marL="0" indent="0" algn="l">
+              <a:buNone/>
+            </a:pPr>
+            <a:r>
+              <a:rPr lang="en-US" sz="1150" b="1" i="0" spc="200" dirty="0">
+                <a:solidFill>
+                  <a:srgbClr val="FFFFFF"/>
+                </a:solidFill>
+                <a:latin typeface="Calibri"/>
+              </a:rPr>
+              <a:t>WHAT IS CHECKED</a:t>
+            </a:r>
+          </a:p>
+        </p:txBody>
+      </p:sp>
+      <p:sp>
+        <p:nvSpPr>
+          <p:cNvPr id="242" name="sh"/>
+          <p:cNvSpPr txBox="1"/>
+          <p:nvPr/>
+        </p:nvSpPr>
+        <p:spPr>
+          <a:xfrm>
+            <a:off x="6246000" y="1980000"/>
+            <a:ext cx="5214480" cy="2800000"/>
+          </a:xfrm>
+          <a:prstGeom prst="rect">
+            <a:avLst/>
+          </a:prstGeom>
+          <a:solidFill>
+            <a:srgbClr val="F5F7FA"/>
+          </a:solidFill>
+          <a:ln>
+            <a:noFill/>
+          </a:ln>
+        </p:spPr>
+        <p:txBody>
+          <a:bodyPr wrap="square" lIns="137160" tIns="91440" rIns="137160" bIns="91440" anchor="t">
+            <a:normAutofit/>
+          </a:bodyPr>
+          <a:lstStyle/>
+          <a:p>
+            <a:pPr marL="228600" indent="-228600" algn="l">
+              <a:spcBef>
+                <a:spcPts val="440"/>
+              </a:spcBef>
+              <a:buClr>
+                <a:srgbClr val="C55A11"/>
+              </a:buClr>
+              <a:buSzPct val="90000"/>
+              <a:buFont typeface="Arial"/>
+              <a:buChar char="■"/>
+            </a:pPr>
+            <a:r>
+              <a:rPr lang="en-US" sz="1450" b="0" i="0" dirty="0">
+                <a:solidFill>
+                  <a:srgbClr val="1A1D21"/>
+                </a:solidFill>
+                <a:latin typeface="Calibri"/>
+              </a:rPr>
+              <a:t>A buffer hit must generate NO flash traffic</a:t>
+            </a:r>
+          </a:p>
+          <a:p>
+            <a:pPr marL="228600" indent="-228600" algn="l">
+              <a:spcBef>
+                <a:spcPts val="440"/>
+              </a:spcBef>
+              <a:buClr>
+                <a:srgbClr val="C55A11"/>
+              </a:buClr>
+              <a:buSzPct val="90000"/>
+              <a:buFont typeface="Arial"/>
+              <a:buChar char="■"/>
+            </a:pPr>
+            <a:r>
+              <a:rPr lang="en-US" sz="1450" b="0" i="0" dirty="0">
+                <a:solidFill>
+                  <a:srgbClr val="1A1D21"/>
+                </a:solidFill>
+                <a:latin typeface="Calibri"/>
+              </a:rPr>
+              <a:t>Data in transit must never be reported as ready</a:t>
+            </a:r>
+          </a:p>
+          <a:p>
+            <a:pPr marL="228600" indent="-228600" algn="l">
+              <a:spcBef>
+                <a:spcPts val="440"/>
+              </a:spcBef>
+              <a:buClr>
+                <a:srgbClr val="C55A11"/>
+              </a:buClr>
+              <a:buSzPct val="90000"/>
+              <a:buFont typeface="Arial"/>
+              <a:buChar char="■"/>
+            </a:pPr>
+            <a:r>
+              <a:rPr lang="en-US" sz="1450" b="0" i="0" dirty="0">
+                <a:solidFill>
+                  <a:srgbClr val="1A1D21"/>
+                </a:solidFill>
+                <a:latin typeface="Calibri"/>
+              </a:rPr>
+              <a:t>Per-GPU settings must be divided across partitions</a:t>
             </a:r>
           </a:p>
           <a:p>
             <a:pPr marL="457200" indent="-228600" algn="l">
               <a:spcBef>
-                <a:spcPts val="380"/>
+                <a:spcPts val="320"/>
               </a:spcBef>
               <a:buClr>
                 <a:srgbClr val="8FA3BF"/>
@@ -8352,86 +7680,20 @@
               <a:buChar char="–"/>
             </a:pPr>
             <a:r>
-              <a:rPr lang="en-US" sz="1400" b="0" i="0" dirty="0">
+              <a:rPr lang="en-US" sz="1300" b="0" i="0" dirty="0">
                 <a:solidFill>
                   <a:srgbClr val="5F6368"/>
                 </a:solidFill>
                 <a:latin typeface="Calibri"/>
               </a:rPr>
-              <a:t>64 microseconds of simulated time is about three buffer refills</a:t>
-            </a:r>
-          </a:p>
-          <a:p>
-            <a:pPr marL="228600" indent="-228600" algn="l">
-              <a:spcBef>
-                <a:spcPts val="520"/>
-              </a:spcBef>
-              <a:buClr>
-                <a:srgbClr val="C55A11"/>
-              </a:buClr>
-              <a:buSzPct val="90000"/>
-              <a:buFont typeface="Arial"/>
-              <a:buChar char="■"/>
-            </a:pPr>
-            <a:r>
-              <a:rPr lang="en-US" sz="1550" b="0" i="0" dirty="0">
-                <a:solidFill>
-                  <a:srgbClr val="1A1D21"/>
-                </a:solidFill>
-                <a:latin typeface="Calibri"/>
-              </a:rPr>
-              <a:t>The HBM-only comparison currently assumes a GPU with 3 TB of HBM</a:t>
-            </a:r>
-          </a:p>
-          <a:p>
-            <a:pPr marL="457200" indent="-228600" algn="l">
-              <a:spcBef>
-                <a:spcPts val="380"/>
-              </a:spcBef>
-              <a:buClr>
-                <a:srgbClr val="8FA3BF"/>
-              </a:buClr>
-              <a:buSzPct val="90000"/>
-              <a:buFont typeface="Arial"/>
-              <a:buChar char="–"/>
-            </a:pPr>
-            <a:r>
-              <a:rPr lang="en-US" sz="1400" b="0" i="0" dirty="0">
-                <a:solidFill>
-                  <a:srgbClr val="5F6368"/>
-                </a:solidFill>
-                <a:latin typeface="Calibri"/>
-              </a:rPr>
-              <a:t>No such GPU exists; the paper compares at equal GPU count instead</a:t>
-            </a:r>
-          </a:p>
-          <a:p>
-            <a:pPr marL="228600" indent="-228600" algn="l">
-              <a:spcBef>
-                <a:spcPts val="520"/>
-              </a:spcBef>
-              <a:buClr>
-                <a:srgbClr val="C55A11"/>
-              </a:buClr>
-              <a:buSzPct val="90000"/>
-              <a:buFont typeface="Arial"/>
-              <a:buChar char="■"/>
-            </a:pPr>
-            <a:r>
-              <a:rPr lang="en-US" sz="1550" b="0" i="0" dirty="0">
-                <a:solidFill>
-                  <a:srgbClr val="1A1D21"/>
-                </a:solidFill>
-                <a:latin typeface="Calibri"/>
-              </a:rPr>
-              <a:t>These limits are written into the project README, not hidden</a:t>
-            </a:r>
-          </a:p>
-        </p:txBody>
-      </p:sp>
-      <p:sp>
-        <p:nvSpPr>
-          <p:cNvPr id="261" name="nb"/>
+              <a:t>Several tests exist because they caught a real bug</a:t>
+            </a:r>
+          </a:p>
+        </p:txBody>
+      </p:sp>
+      <p:sp>
+        <p:nvSpPr>
+          <p:cNvPr id="243" name="nb"/>
           <p:cNvSpPr txBox="1"/>
           <p:nvPr/>
         </p:nvSpPr>
@@ -8462,7 +7724,7 @@
       </p:sp>
       <p:sp>
         <p:nvSpPr>
-          <p:cNvPr id="262" name="sh"/>
+          <p:cNvPr id="244" name="sh"/>
           <p:cNvSpPr txBox="1"/>
           <p:nvPr/>
         </p:nvSpPr>
@@ -8514,7 +7776,7 @@
                 </a:solidFill>
                 <a:latin typeface="Calibri"/>
               </a:rPr>
-              <a:t>We would rather state clearly what the setup cannot yet support than quote a number it cannot justify. Each limit has a known fix, listed in the next steps.</a:t>
+              <a:t>Keeping our components independent of the large simulators means a mistake shows up in seconds rather than after a long build. Each test that guards a past bug is named for the problem it prevents.</a:t>
             </a:r>
           </a:p>
         </p:txBody>
@@ -8546,7 +7808,7 @@
       </p:grpSpPr>
       <p:sp>
         <p:nvSpPr>
-          <p:cNvPr id="263" name="rule"/>
+          <p:cNvPr id="245" name="rule"/>
           <p:cNvSpPr txBox="1"/>
           <p:nvPr/>
         </p:nvSpPr>
@@ -8577,7 +7839,7 @@
       </p:sp>
       <p:sp>
         <p:nvSpPr>
-          <p:cNvPr id="264" name="spine"/>
+          <p:cNvPr id="246" name="spine"/>
           <p:cNvSpPr txBox="1"/>
           <p:nvPr/>
         </p:nvSpPr>
@@ -8608,7 +7870,7 @@
       </p:sp>
       <p:sp>
         <p:nvSpPr>
-          <p:cNvPr id="265" name="sh"/>
+          <p:cNvPr id="247" name="sh"/>
           <p:cNvSpPr txBox="1"/>
           <p:nvPr/>
         </p:nvSpPr>
@@ -8641,14 +7903,14 @@
                 </a:solidFill>
                 <a:latin typeface="Calibri"/>
               </a:rPr>
-              <a:t>VALUE</a:t>
-            </a:r>
-          </a:p>
-        </p:txBody>
-      </p:sp>
-      <p:sp>
-        <p:nvSpPr>
-          <p:cNvPr id="266" name="sh"/>
+              <a:t>RESULTS</a:t>
+            </a:r>
+          </a:p>
+        </p:txBody>
+      </p:sp>
+      <p:sp>
+        <p:nvSpPr>
+          <p:cNvPr id="248" name="sh"/>
           <p:cNvSpPr txBox="1"/>
           <p:nvPr/>
         </p:nvSpPr>
@@ -8681,14 +7943,14 @@
                 </a:solidFill>
                 <a:latin typeface="Calibri"/>
               </a:rPr>
-              <a:t>What this simulator adds</a:t>
-            </a:r>
-          </a:p>
-        </p:txBody>
-      </p:sp>
-      <p:sp>
-        <p:nvSpPr>
-          <p:cNvPr id="267" name="ul"/>
+              <a:t>Bugs the detailed model exposed</a:t>
+            </a:r>
+          </a:p>
+        </p:txBody>
+      </p:sp>
+      <p:sp>
+        <p:nvSpPr>
+          <p:cNvPr id="249" name="ul"/>
           <p:cNvSpPr txBox="1"/>
           <p:nvPr/>
         </p:nvSpPr>
@@ -8719,7 +7981,7 @@
       </p:sp>
       <p:sp>
         <p:nvSpPr>
-          <p:cNvPr id="268" name="sh"/>
+          <p:cNvPr id="250" name="sh"/>
           <p:cNvSpPr txBox="1"/>
           <p:nvPr/>
         </p:nvSpPr>
@@ -8759,7 +8021,7 @@
       </p:sp>
       <p:sp>
         <p:nvSpPr>
-          <p:cNvPr id="269" name="sh"/>
+          <p:cNvPr id="251" name="sh"/>
           <p:cNvSpPr txBox="1"/>
           <p:nvPr/>
         </p:nvSpPr>
@@ -8799,59 +8061,19 @@
       </p:sp>
       <p:sp>
         <p:nvSpPr>
-          <p:cNvPr id="270" name="sh"/>
-          <p:cNvSpPr txBox="1"/>
-          <p:nvPr/>
-        </p:nvSpPr>
-        <p:spPr>
-          <a:xfrm>
-            <a:off x="731520" y="1560000"/>
-            <a:ext cx="5214480" cy="340000"/>
-          </a:xfrm>
-          <a:prstGeom prst="rect">
-            <a:avLst/>
-          </a:prstGeom>
-          <a:solidFill>
-            <a:srgbClr val="1F3864"/>
-          </a:solidFill>
-          <a:ln>
-            <a:noFill/>
-          </a:ln>
-        </p:spPr>
-        <p:txBody>
-          <a:bodyPr wrap="square" lIns="114300" tIns="60960" rIns="114300" bIns="60960" anchor="t">
-            <a:normAutofit/>
-          </a:bodyPr>
-          <a:lstStyle/>
-          <a:p>
-            <a:pPr marL="0" indent="0" algn="l">
-              <a:buNone/>
-            </a:pPr>
-            <a:r>
-              <a:rPr lang="en-US" sz="1150" b="1" i="0" spc="200" dirty="0">
-                <a:solidFill>
-                  <a:srgbClr val="FFFFFF"/>
-                </a:solidFill>
-                <a:latin typeface="Calibri"/>
-              </a:rPr>
-              <a:t>THE PAPER ESTABLISHES</a:t>
-            </a:r>
-          </a:p>
-        </p:txBody>
-      </p:sp>
-      <p:sp>
-        <p:nvSpPr>
-          <p:cNvPr id="271" name="sh"/>
-          <p:cNvSpPr txBox="1"/>
-          <p:nvPr/>
-        </p:nvSpPr>
-        <p:spPr>
-          <a:xfrm>
-            <a:off x="731520" y="1980000"/>
-            <a:ext cx="5214480" cy="2800000"/>
-          </a:xfrm>
-          <a:prstGeom prst="rect">
-            <a:avLst/>
+          <p:cNvPr id="252" name="sh"/>
+          <p:cNvSpPr txBox="1"/>
+          <p:nvPr/>
+        </p:nvSpPr>
+        <p:spPr>
+          <a:xfrm>
+            <a:off x="731520" y="1600000"/>
+            <a:ext cx="3429653" cy="1700000"/>
+          </a:xfrm>
+          <a:prstGeom prst="roundRect">
+            <a:avLst>
+              <a:gd name="adj" fmla="val 8000"/>
+            </a:avLst>
           </a:prstGeom>
           <a:solidFill>
             <a:srgbClr val="F5F7FA"/>
@@ -8861,58 +8083,337 @@
           </a:ln>
         </p:spPr>
         <p:txBody>
+          <a:bodyPr wrap="square" lIns="160020" tIns="137160" rIns="160020" bIns="137160" anchor="t">
+            <a:normAutofit/>
+          </a:bodyPr>
+          <a:lstStyle/>
+          <a:p>
+            <a:pPr marL="0" indent="0" algn="l">
+              <a:buNone/>
+            </a:pPr>
+            <a:r>
+              <a:rPr lang="en-US" sz="3600" b="1" i="0" dirty="0">
+                <a:solidFill>
+                  <a:srgbClr val="8E1600"/>
+                </a:solidFill>
+                <a:latin typeface="Calibri"/>
+              </a:rPr>
+              <a:t>26x</a:t>
+            </a:r>
+          </a:p>
+          <a:p>
+            <a:pPr marL="0" indent="0" algn="l">
+              <a:spcBef>
+                <a:spcPts val="200"/>
+              </a:spcBef>
+              <a:buNone/>
+            </a:pPr>
+            <a:r>
+              <a:rPr lang="en-US" sz="1250" b="1" i="0" dirty="0">
+                <a:solidFill>
+                  <a:srgbClr val="1A1D21"/>
+                </a:solidFill>
+                <a:latin typeface="Calibri"/>
+              </a:rPr>
+              <a:t>flash traffic overstated</a:t>
+            </a:r>
+          </a:p>
+          <a:p>
+            <a:pPr marL="0" indent="0" algn="l">
+              <a:spcBef>
+                <a:spcPts val="120"/>
+              </a:spcBef>
+              <a:buNone/>
+            </a:pPr>
+            <a:r>
+              <a:rPr lang="en-US" sz="1050" b="0" i="0" dirty="0">
+                <a:solidFill>
+                  <a:srgbClr val="5F6368"/>
+                </a:solidFill>
+                <a:latin typeface="Calibri"/>
+              </a:rPr>
+              <a:t>requests sent before the buffer was asked</a:t>
+            </a:r>
+          </a:p>
+        </p:txBody>
+      </p:sp>
+      <p:sp>
+        <p:nvSpPr>
+          <p:cNvPr id="253" name="sh"/>
+          <p:cNvSpPr txBox="1"/>
+          <p:nvPr/>
+        </p:nvSpPr>
+        <p:spPr>
+          <a:xfrm>
+            <a:off x="731520" y="1600000"/>
+            <a:ext cx="3429653" cy="60000"/>
+          </a:xfrm>
+          <a:prstGeom prst="rect">
+            <a:avLst/>
+          </a:prstGeom>
+          <a:solidFill>
+            <a:srgbClr val="8E1600"/>
+          </a:solidFill>
+          <a:ln>
+            <a:noFill/>
+          </a:ln>
+        </p:spPr>
+        <p:txBody>
           <a:bodyPr wrap="square" lIns="137160" tIns="91440" rIns="137160" bIns="91440" anchor="t">
             <a:normAutofit/>
           </a:bodyPr>
           <a:lstStyle/>
           <a:p>
-            <a:pPr marL="228600" indent="-228600" algn="l">
-              <a:spcBef>
-                <a:spcPts val="440"/>
-              </a:spcBef>
-              <a:buClr>
-                <a:srgbClr val="C55A11"/>
-              </a:buClr>
-              <a:buSzPct val="90000"/>
-              <a:buFont typeface="Arial"/>
-              <a:buChar char="■"/>
-            </a:pPr>
-            <a:r>
-              <a:rPr lang="en-US" sz="1450" b="0" i="0" dirty="0">
+            <a:endParaRPr lang="en-US"/>
+          </a:p>
+        </p:txBody>
+      </p:sp>
+      <p:sp>
+        <p:nvSpPr>
+          <p:cNvPr id="254" name="sh"/>
+          <p:cNvSpPr txBox="1"/>
+          <p:nvPr/>
+        </p:nvSpPr>
+        <p:spPr>
+          <a:xfrm>
+            <a:off x="4381173" y="1600000"/>
+            <a:ext cx="3429653" cy="1700000"/>
+          </a:xfrm>
+          <a:prstGeom prst="roundRect">
+            <a:avLst>
+              <a:gd name="adj" fmla="val 8000"/>
+            </a:avLst>
+          </a:prstGeom>
+          <a:solidFill>
+            <a:srgbClr val="F5F7FA"/>
+          </a:solidFill>
+          <a:ln>
+            <a:noFill/>
+          </a:ln>
+        </p:spPr>
+        <p:txBody>
+          <a:bodyPr wrap="square" lIns="160020" tIns="137160" rIns="160020" bIns="137160" anchor="t">
+            <a:normAutofit/>
+          </a:bodyPr>
+          <a:lstStyle/>
+          <a:p>
+            <a:pPr marL="0" indent="0" algn="l">
+              <a:buNone/>
+            </a:pPr>
+            <a:r>
+              <a:rPr lang="en-US" sz="3600" b="1" i="0" dirty="0">
+                <a:solidFill>
+                  <a:srgbClr val="8E1600"/>
+                </a:solidFill>
+                <a:latin typeface="Calibri"/>
+              </a:rPr>
+              <a:t>4,273</a:t>
+            </a:r>
+          </a:p>
+          <a:p>
+            <a:pPr marL="0" indent="0" algn="l">
+              <a:spcBef>
+                <a:spcPts val="200"/>
+              </a:spcBef>
+              <a:buNone/>
+            </a:pPr>
+            <a:r>
+              <a:rPr lang="en-US" sz="1250" b="1" i="0" dirty="0">
                 <a:solidFill>
                   <a:srgbClr val="1A1D21"/>
                 </a:solidFill>
                 <a:latin typeface="Calibri"/>
               </a:rPr>
-              <a:t>That H3 is worth building</a:t>
-            </a:r>
-          </a:p>
-          <a:p>
-            <a:pPr marL="228600" indent="-228600" algn="l">
-              <a:spcBef>
-                <a:spcPts val="440"/>
-              </a:spcBef>
-              <a:buClr>
-                <a:srgbClr val="C55A11"/>
-              </a:buClr>
-              <a:buSzPct val="90000"/>
-              <a:buFont typeface="Arial"/>
-              <a:buChar char="■"/>
-            </a:pPr>
-            <a:r>
-              <a:rPr lang="en-US" sz="1450" b="0" i="0" dirty="0">
+              <a:t>false buffer hits</a:t>
+            </a:r>
+          </a:p>
+          <a:p>
+            <a:pPr marL="0" indent="0" algn="l">
+              <a:spcBef>
+                <a:spcPts val="120"/>
+              </a:spcBef>
+              <a:buNone/>
+            </a:pPr>
+            <a:r>
+              <a:rPr lang="en-US" sz="1050" b="0" i="0" dirty="0">
+                <a:solidFill>
+                  <a:srgbClr val="5F6368"/>
+                </a:solidFill>
+                <a:latin typeface="Calibri"/>
+              </a:rPr>
+              <a:t>data in transit marked as arrived</a:t>
+            </a:r>
+          </a:p>
+        </p:txBody>
+      </p:sp>
+      <p:sp>
+        <p:nvSpPr>
+          <p:cNvPr id="255" name="sh"/>
+          <p:cNvSpPr txBox="1"/>
+          <p:nvPr/>
+        </p:nvSpPr>
+        <p:spPr>
+          <a:xfrm>
+            <a:off x="4381173" y="1600000"/>
+            <a:ext cx="3429653" cy="60000"/>
+          </a:xfrm>
+          <a:prstGeom prst="rect">
+            <a:avLst/>
+          </a:prstGeom>
+          <a:solidFill>
+            <a:srgbClr val="8E1600"/>
+          </a:solidFill>
+          <a:ln>
+            <a:noFill/>
+          </a:ln>
+        </p:spPr>
+        <p:txBody>
+          <a:bodyPr wrap="square" lIns="137160" tIns="91440" rIns="137160" bIns="91440" anchor="t">
+            <a:normAutofit/>
+          </a:bodyPr>
+          <a:lstStyle/>
+          <a:p>
+            <a:endParaRPr lang="en-US"/>
+          </a:p>
+        </p:txBody>
+      </p:sp>
+      <p:sp>
+        <p:nvSpPr>
+          <p:cNvPr id="256" name="sh"/>
+          <p:cNvSpPr txBox="1"/>
+          <p:nvPr/>
+        </p:nvSpPr>
+        <p:spPr>
+          <a:xfrm>
+            <a:off x="8030826" y="1600000"/>
+            <a:ext cx="3429653" cy="1700000"/>
+          </a:xfrm>
+          <a:prstGeom prst="roundRect">
+            <a:avLst>
+              <a:gd name="adj" fmla="val 8000"/>
+            </a:avLst>
+          </a:prstGeom>
+          <a:solidFill>
+            <a:srgbClr val="F5F7FA"/>
+          </a:solidFill>
+          <a:ln>
+            <a:noFill/>
+          </a:ln>
+        </p:spPr>
+        <p:txBody>
+          <a:bodyPr wrap="square" lIns="160020" tIns="137160" rIns="160020" bIns="137160" anchor="t">
+            <a:normAutofit/>
+          </a:bodyPr>
+          <a:lstStyle/>
+          <a:p>
+            <a:pPr marL="0" indent="0" algn="l">
+              <a:buNone/>
+            </a:pPr>
+            <a:r>
+              <a:rPr lang="en-US" sz="3600" b="1" i="0" dirty="0">
+                <a:solidFill>
+                  <a:srgbClr val="8E1600"/>
+                </a:solidFill>
+                <a:latin typeface="Calibri"/>
+              </a:rPr>
+              <a:t>40x</a:t>
+            </a:r>
+          </a:p>
+          <a:p>
+            <a:pPr marL="0" indent="0" algn="l">
+              <a:spcBef>
+                <a:spcPts val="200"/>
+              </a:spcBef>
+              <a:buNone/>
+            </a:pPr>
+            <a:r>
+              <a:rPr lang="en-US" sz="1250" b="1" i="0" dirty="0">
                 <a:solidFill>
                   <a:srgbClr val="1A1D21"/>
                 </a:solidFill>
                 <a:latin typeface="Calibri"/>
               </a:rPr>
-              <a:t>Sizes the buffer with an equation</a:t>
-            </a:r>
-          </a:p>
+              <a:t>GPU speed overstated</a:t>
+            </a:r>
+          </a:p>
+          <a:p>
+            <a:pPr marL="0" indent="0" algn="l">
+              <a:spcBef>
+                <a:spcPts val="120"/>
+              </a:spcBef>
+              <a:buNone/>
+            </a:pPr>
+            <a:r>
+              <a:rPr lang="en-US" sz="1050" b="0" i="0" dirty="0">
+                <a:solidFill>
+                  <a:srgbClr val="5F6368"/>
+                </a:solidFill>
+                <a:latin typeface="Calibri"/>
+              </a:rPr>
+              <a:t>per-GPU settings applied per partition</a:t>
+            </a:r>
+          </a:p>
+        </p:txBody>
+      </p:sp>
+      <p:sp>
+        <p:nvSpPr>
+          <p:cNvPr id="257" name="sh"/>
+          <p:cNvSpPr txBox="1"/>
+          <p:nvPr/>
+        </p:nvSpPr>
+        <p:spPr>
+          <a:xfrm>
+            <a:off x="8030826" y="1600000"/>
+            <a:ext cx="3429653" cy="60000"/>
+          </a:xfrm>
+          <a:prstGeom prst="rect">
+            <a:avLst/>
+          </a:prstGeom>
+          <a:solidFill>
+            <a:srgbClr val="8E1600"/>
+          </a:solidFill>
+          <a:ln>
+            <a:noFill/>
+          </a:ln>
+        </p:spPr>
+        <p:txBody>
+          <a:bodyPr wrap="square" lIns="137160" tIns="91440" rIns="137160" bIns="91440" anchor="t">
+            <a:normAutofit/>
+          </a:bodyPr>
+          <a:lstStyle/>
+          <a:p>
+            <a:endParaRPr lang="en-US"/>
+          </a:p>
+        </p:txBody>
+      </p:sp>
+      <p:sp>
+        <p:nvSpPr>
+          <p:cNvPr id="258" name="sh"/>
+          <p:cNvSpPr txBox="1"/>
+          <p:nvPr/>
+        </p:nvSpPr>
+        <p:spPr>
+          <a:xfrm>
+            <a:off x="731520" y="3520000"/>
+            <a:ext cx="10728960" cy="1300000"/>
+          </a:xfrm>
+          <a:prstGeom prst="rect">
+            <a:avLst/>
+          </a:prstGeom>
+          <a:noFill/>
+          <a:ln>
+            <a:noFill/>
+          </a:ln>
+        </p:spPr>
+        <p:txBody>
+          <a:bodyPr wrap="square" lIns="0" tIns="0" rIns="0" bIns="0" anchor="t">
+            <a:normAutofit/>
+          </a:bodyPr>
+          <a:lstStyle/>
           <a:p>
             <a:pPr marL="457200" indent="-228600" algn="l">
               <a:spcBef>
-                <a:spcPts val="320"/>
+                <a:spcPts val="380"/>
               </a:spcBef>
               <a:buClr>
                 <a:srgbClr val="8FA3BF"/>
@@ -8928,105 +8429,13 @@
                 </a:solidFill>
                 <a:latin typeface="Calibri"/>
               </a:rPr>
-              <a:t>And assumes it works from there</a:t>
-            </a:r>
-          </a:p>
-        </p:txBody>
-      </p:sp>
-      <p:sp>
-        <p:nvSpPr>
-          <p:cNvPr id="272" name="sh"/>
-          <p:cNvSpPr txBox="1"/>
-          <p:nvPr/>
-        </p:nvSpPr>
-        <p:spPr>
-          <a:xfrm>
-            <a:off x="6246000" y="1560000"/>
-            <a:ext cx="5214480" cy="340000"/>
-          </a:xfrm>
-          <a:prstGeom prst="rect">
-            <a:avLst/>
-          </a:prstGeom>
-          <a:solidFill>
-            <a:srgbClr val="C55A11"/>
-          </a:solidFill>
-          <a:ln>
-            <a:noFill/>
-          </a:ln>
-        </p:spPr>
-        <p:txBody>
-          <a:bodyPr wrap="square" lIns="114300" tIns="60960" rIns="114300" bIns="60960" anchor="t">
-            <a:normAutofit/>
-          </a:bodyPr>
-          <a:lstStyle/>
-          <a:p>
-            <a:pPr marL="0" indent="0" algn="l">
-              <a:buNone/>
-            </a:pPr>
-            <a:r>
-              <a:rPr lang="en-US" sz="1150" b="1" i="0" spc="200" dirty="0">
-                <a:solidFill>
-                  <a:srgbClr val="FFFFFF"/>
-                </a:solidFill>
-                <a:latin typeface="Calibri"/>
-              </a:rPr>
-              <a:t>OURS CAN EXAMINE</a:t>
-            </a:r>
-          </a:p>
-        </p:txBody>
-      </p:sp>
-      <p:sp>
-        <p:nvSpPr>
-          <p:cNvPr id="273" name="sh"/>
-          <p:cNvSpPr txBox="1"/>
-          <p:nvPr/>
-        </p:nvSpPr>
-        <p:spPr>
-          <a:xfrm>
-            <a:off x="6246000" y="1980000"/>
-            <a:ext cx="5214480" cy="2800000"/>
-          </a:xfrm>
-          <a:prstGeom prst="rect">
-            <a:avLst/>
-          </a:prstGeom>
-          <a:solidFill>
-            <a:srgbClr val="F5F7FA"/>
-          </a:solidFill>
-          <a:ln>
-            <a:noFill/>
-          </a:ln>
-        </p:spPr>
-        <p:txBody>
-          <a:bodyPr wrap="square" lIns="137160" tIns="91440" rIns="137160" bIns="91440" anchor="t">
-            <a:normAutofit/>
-          </a:bodyPr>
-          <a:lstStyle/>
-          <a:p>
-            <a:pPr marL="228600" indent="-228600" algn="l">
-              <a:spcBef>
-                <a:spcPts val="440"/>
-              </a:spcBef>
-              <a:buClr>
-                <a:srgbClr val="C55A11"/>
-              </a:buClr>
-              <a:buSzPct val="90000"/>
-              <a:buFont typeface="Arial"/>
-              <a:buChar char="■"/>
-            </a:pPr>
-            <a:r>
-              <a:rPr lang="en-US" sz="1450" b="0" i="0" dirty="0">
-                <a:solidFill>
-                  <a:srgbClr val="1A1D21"/>
-                </a:solidFill>
-                <a:latin typeface="Calibri"/>
-              </a:rPr>
-              <a:t>Whether the buffer really hides the delay</a:t>
+              <a:t>All three were invisible to the fast model, which happily returned a plausible number. The detailed model refused, and threw an error instead.</a:t>
             </a:r>
           </a:p>
           <a:p>
             <a:pPr marL="457200" indent="-228600" algn="l">
               <a:spcBef>
-                <a:spcPts val="320"/>
+                <a:spcPts val="380"/>
               </a:spcBef>
               <a:buClr>
                 <a:srgbClr val="8FA3BF"/>
@@ -9042,80 +8451,14 @@
                 </a:solidFill>
                 <a:latin typeface="Calibri"/>
               </a:rPr>
-              <a:t>Hit rate, stall length, late prefetches</a:t>
-            </a:r>
-          </a:p>
-          <a:p>
-            <a:pPr marL="228600" indent="-228600" algn="l">
-              <a:spcBef>
-                <a:spcPts val="440"/>
-              </a:spcBef>
-              <a:buClr>
-                <a:srgbClr val="C55A11"/>
-              </a:buClr>
-              <a:buSzPct val="90000"/>
-              <a:buFont typeface="Arial"/>
-              <a:buChar char="■"/>
-            </a:pPr>
-            <a:r>
-              <a:rPr lang="en-US" sz="1450" b="0" i="0" dirty="0">
-                <a:solidFill>
-                  <a:srgbClr val="1A1D21"/>
-                </a:solidFill>
-                <a:latin typeface="Calibri"/>
-              </a:rPr>
-              <a:t>How sensitive the design is to flash latency</a:t>
-            </a:r>
-          </a:p>
-          <a:p>
-            <a:pPr marL="228600" indent="-228600" algn="l">
-              <a:spcBef>
-                <a:spcPts val="440"/>
-              </a:spcBef>
-              <a:buClr>
-                <a:srgbClr val="C55A11"/>
-              </a:buClr>
-              <a:buSzPct val="90000"/>
-              <a:buFont typeface="Arial"/>
-              <a:buChar char="■"/>
-            </a:pPr>
-            <a:r>
-              <a:rPr lang="en-US" sz="1450" b="0" i="0" dirty="0">
-                <a:solidFill>
-                  <a:srgbClr val="1A1D21"/>
-                </a:solidFill>
-                <a:latin typeface="Calibri"/>
-              </a:rPr>
-              <a:t>Where the cliff is with too few flash planes</a:t>
-            </a:r>
-          </a:p>
-          <a:p>
-            <a:pPr marL="228600" indent="-228600" algn="l">
-              <a:spcBef>
-                <a:spcPts val="440"/>
-              </a:spcBef>
-              <a:buClr>
-                <a:srgbClr val="C55A11"/>
-              </a:buClr>
-              <a:buSzPct val="90000"/>
-              <a:buFont typeface="Arial"/>
-              <a:buChar char="■"/>
-            </a:pPr>
-            <a:r>
-              <a:rPr lang="en-US" sz="1450" b="0" i="0" dirty="0">
-                <a:solidFill>
-                  <a:srgbClr val="1A1D21"/>
-                </a:solidFill>
-                <a:latin typeface="Calibri"/>
-              </a:rPr>
-              <a:t>Whether prefetch and demand reads fight for banks</a:t>
-            </a:r>
-          </a:p>
-        </p:txBody>
-      </p:sp>
-      <p:sp>
-        <p:nvSpPr>
-          <p:cNvPr id="274" name="nb"/>
+              <a:t>All three are fixed, and each now has a test that prevents it returning.</a:t>
+            </a:r>
+          </a:p>
+        </p:txBody>
+      </p:sp>
+      <p:sp>
+        <p:nvSpPr>
+          <p:cNvPr id="259" name="nb"/>
           <p:cNvSpPr txBox="1"/>
           <p:nvPr/>
         </p:nvSpPr>
@@ -9146,7 +8489,7 @@
       </p:sp>
       <p:sp>
         <p:nvSpPr>
-          <p:cNvPr id="275" name="sh"/>
+          <p:cNvPr id="260" name="sh"/>
           <p:cNvSpPr txBox="1"/>
           <p:nvPr/>
         </p:nvSpPr>
@@ -9198,7 +8541,7 @@
                 </a:solidFill>
                 <a:latin typeface="Calibri"/>
               </a:rPr>
-              <a:t>This is where the contribution lies. The paper argues H3 should work. This simulator can test whether the mechanism that makes it work behaves as expected under realistic conditions.</a:t>
+              <a:t>This is the strongest argument for building the cycle-accurate version at all. Two models that disagree are how you discover that one of them is wrong.</a:t>
             </a:r>
           </a:p>
         </p:txBody>
@@ -9230,7 +8573,7 @@
       </p:grpSpPr>
       <p:sp>
         <p:nvSpPr>
-          <p:cNvPr id="276" name="rule"/>
+          <p:cNvPr id="261" name="rule"/>
           <p:cNvSpPr txBox="1"/>
           <p:nvPr/>
         </p:nvSpPr>
@@ -9261,7 +8604,7 @@
       </p:sp>
       <p:sp>
         <p:nvSpPr>
-          <p:cNvPr id="277" name="spine"/>
+          <p:cNvPr id="262" name="spine"/>
           <p:cNvSpPr txBox="1"/>
           <p:nvPr/>
         </p:nvSpPr>
@@ -9292,7 +8635,7 @@
       </p:sp>
       <p:sp>
         <p:nvSpPr>
-          <p:cNvPr id="278" name="sh"/>
+          <p:cNvPr id="263" name="sh"/>
           <p:cNvSpPr txBox="1"/>
           <p:nvPr/>
         </p:nvSpPr>
@@ -9325,14 +8668,14 @@
                 </a:solidFill>
                 <a:latin typeface="Calibri"/>
               </a:rPr>
-              <a:t>NEXT</a:t>
-            </a:r>
-          </a:p>
-        </p:txBody>
-      </p:sp>
-      <p:sp>
-        <p:nvSpPr>
-          <p:cNvPr id="279" name="sh"/>
+              <a:t>RESULTS</a:t>
+            </a:r>
+          </a:p>
+        </p:txBody>
+      </p:sp>
+      <p:sp>
+        <p:nvSpPr>
+          <p:cNvPr id="264" name="sh"/>
           <p:cNvSpPr txBox="1"/>
           <p:nvPr/>
         </p:nvSpPr>
@@ -9365,14 +8708,14 @@
                 </a:solidFill>
                 <a:latin typeface="Calibri"/>
               </a:rPr>
-              <a:t>Suggested next steps</a:t>
-            </a:r>
-          </a:p>
-        </p:txBody>
-      </p:sp>
-      <p:sp>
-        <p:nvSpPr>
-          <p:cNvPr id="280" name="ul"/>
+              <a:t>What the simulator measures today</a:t>
+            </a:r>
+          </a:p>
+        </p:txBody>
+      </p:sp>
+      <p:sp>
+        <p:nvSpPr>
+          <p:cNvPr id="265" name="ul"/>
           <p:cNvSpPr txBox="1"/>
           <p:nvPr/>
         </p:nvSpPr>
@@ -9403,7 +8746,7 @@
       </p:sp>
       <p:sp>
         <p:nvSpPr>
-          <p:cNvPr id="281" name="sh"/>
+          <p:cNvPr id="266" name="sh"/>
           <p:cNvSpPr txBox="1"/>
           <p:nvPr/>
         </p:nvSpPr>
@@ -9443,7 +8786,7 @@
       </p:sp>
       <p:sp>
         <p:nvSpPr>
-          <p:cNvPr id="282" name="sh"/>
+          <p:cNvPr id="267" name="sh"/>
           <p:cNvSpPr txBox="1"/>
           <p:nvPr/>
         </p:nvSpPr>
@@ -9483,7 +8826,1956 @@
       </p:sp>
       <p:sp>
         <p:nvSpPr>
-          <p:cNvPr id="283" name="sh"/>
+          <p:cNvPr id="268" name="sh"/>
+          <p:cNvSpPr txBox="1"/>
+          <p:nvPr/>
+        </p:nvSpPr>
+        <p:spPr>
+          <a:xfrm>
+            <a:off x="731520" y="1600000"/>
+            <a:ext cx="2517240" cy="1700000"/>
+          </a:xfrm>
+          <a:prstGeom prst="roundRect">
+            <a:avLst>
+              <a:gd name="adj" fmla="val 8000"/>
+            </a:avLst>
+          </a:prstGeom>
+          <a:solidFill>
+            <a:srgbClr val="F5F7FA"/>
+          </a:solidFill>
+          <a:ln>
+            <a:noFill/>
+          </a:ln>
+        </p:spPr>
+        <p:txBody>
+          <a:bodyPr wrap="square" lIns="160020" tIns="137160" rIns="160020" bIns="137160" anchor="t">
+            <a:normAutofit/>
+          </a:bodyPr>
+          <a:lstStyle/>
+          <a:p>
+            <a:pPr marL="0" indent="0" algn="l">
+              <a:buNone/>
+            </a:pPr>
+            <a:r>
+              <a:rPr lang="en-US" sz="3600" b="1" i="0" dirty="0">
+                <a:solidFill>
+                  <a:srgbClr val="2E7D32"/>
+                </a:solidFill>
+                <a:latin typeface="Calibri"/>
+              </a:rPr>
+              <a:t>3x</a:t>
+            </a:r>
+          </a:p>
+          <a:p>
+            <a:pPr marL="0" indent="0" algn="l">
+              <a:spcBef>
+                <a:spcPts val="200"/>
+              </a:spcBef>
+              <a:buNone/>
+            </a:pPr>
+            <a:r>
+              <a:rPr lang="en-US" sz="1250" b="1" i="0" dirty="0">
+                <a:solidFill>
+                  <a:srgbClr val="1A1D21"/>
+                </a:solidFill>
+                <a:latin typeface="Calibri"/>
+              </a:rPr>
+              <a:t>more work done</a:t>
+            </a:r>
+          </a:p>
+          <a:p>
+            <a:pPr marL="0" indent="0" algn="l">
+              <a:spcBef>
+                <a:spcPts val="120"/>
+              </a:spcBef>
+              <a:buNone/>
+            </a:pPr>
+            <a:r>
+              <a:rPr lang="en-US" sz="1050" b="0" i="0" dirty="0">
+                <a:solidFill>
+                  <a:srgbClr val="5F6368"/>
+                </a:solidFill>
+                <a:latin typeface="Calibri"/>
+              </a:rPr>
+              <a:t>buffer on versus off</a:t>
+            </a:r>
+          </a:p>
+        </p:txBody>
+      </p:sp>
+      <p:sp>
+        <p:nvSpPr>
+          <p:cNvPr id="269" name="sh"/>
+          <p:cNvSpPr txBox="1"/>
+          <p:nvPr/>
+        </p:nvSpPr>
+        <p:spPr>
+          <a:xfrm>
+            <a:off x="731520" y="1600000"/>
+            <a:ext cx="2517240" cy="60000"/>
+          </a:xfrm>
+          <a:prstGeom prst="rect">
+            <a:avLst/>
+          </a:prstGeom>
+          <a:solidFill>
+            <a:srgbClr val="2E7D32"/>
+          </a:solidFill>
+          <a:ln>
+            <a:noFill/>
+          </a:ln>
+        </p:spPr>
+        <p:txBody>
+          <a:bodyPr wrap="square" lIns="137160" tIns="91440" rIns="137160" bIns="91440" anchor="t">
+            <a:normAutofit/>
+          </a:bodyPr>
+          <a:lstStyle/>
+          <a:p>
+            <a:endParaRPr lang="en-US"/>
+          </a:p>
+        </p:txBody>
+      </p:sp>
+      <p:sp>
+        <p:nvSpPr>
+          <p:cNvPr id="270" name="sh"/>
+          <p:cNvSpPr txBox="1"/>
+          <p:nvPr/>
+        </p:nvSpPr>
+        <p:spPr>
+          <a:xfrm>
+            <a:off x="3468760" y="1600000"/>
+            <a:ext cx="2517240" cy="1700000"/>
+          </a:xfrm>
+          <a:prstGeom prst="roundRect">
+            <a:avLst>
+              <a:gd name="adj" fmla="val 8000"/>
+            </a:avLst>
+          </a:prstGeom>
+          <a:solidFill>
+            <a:srgbClr val="F5F7FA"/>
+          </a:solidFill>
+          <a:ln>
+            <a:noFill/>
+          </a:ln>
+        </p:spPr>
+        <p:txBody>
+          <a:bodyPr wrap="square" lIns="160020" tIns="137160" rIns="160020" bIns="137160" anchor="t">
+            <a:normAutofit/>
+          </a:bodyPr>
+          <a:lstStyle/>
+          <a:p>
+            <a:pPr marL="0" indent="0" algn="l">
+              <a:buNone/>
+            </a:pPr>
+            <a:r>
+              <a:rPr lang="en-US" sz="3600" b="1" i="0" dirty="0">
+                <a:solidFill>
+                  <a:srgbClr val="1F3864"/>
+                </a:solidFill>
+                <a:latin typeface="Calibri"/>
+              </a:rPr>
+              <a:t>0.74</a:t>
+            </a:r>
+          </a:p>
+          <a:p>
+            <a:pPr marL="0" indent="0" algn="l">
+              <a:spcBef>
+                <a:spcPts val="200"/>
+              </a:spcBef>
+              <a:buNone/>
+            </a:pPr>
+            <a:r>
+              <a:rPr lang="en-US" sz="1250" b="1" i="0" dirty="0">
+                <a:solidFill>
+                  <a:srgbClr val="1A1D21"/>
+                </a:solidFill>
+                <a:latin typeface="Calibri"/>
+              </a:rPr>
+              <a:t>buffer hit rate</a:t>
+            </a:r>
+          </a:p>
+          <a:p>
+            <a:pPr marL="0" indent="0" algn="l">
+              <a:spcBef>
+                <a:spcPts val="120"/>
+              </a:spcBef>
+              <a:buNone/>
+            </a:pPr>
+            <a:r>
+              <a:rPr lang="en-US" sz="1050" b="0" i="0" dirty="0">
+                <a:solidFill>
+                  <a:srgbClr val="5F6368"/>
+                </a:solidFill>
+                <a:latin typeface="Calibri"/>
+              </a:rPr>
+              <a:t>measured, not assumed</a:t>
+            </a:r>
+          </a:p>
+        </p:txBody>
+      </p:sp>
+      <p:sp>
+        <p:nvSpPr>
+          <p:cNvPr id="271" name="sh"/>
+          <p:cNvSpPr txBox="1"/>
+          <p:nvPr/>
+        </p:nvSpPr>
+        <p:spPr>
+          <a:xfrm>
+            <a:off x="3468760" y="1600000"/>
+            <a:ext cx="2517240" cy="60000"/>
+          </a:xfrm>
+          <a:prstGeom prst="rect">
+            <a:avLst/>
+          </a:prstGeom>
+          <a:solidFill>
+            <a:srgbClr val="1F3864"/>
+          </a:solidFill>
+          <a:ln>
+            <a:noFill/>
+          </a:ln>
+        </p:spPr>
+        <p:txBody>
+          <a:bodyPr wrap="square" lIns="137160" tIns="91440" rIns="137160" bIns="91440" anchor="t">
+            <a:normAutofit/>
+          </a:bodyPr>
+          <a:lstStyle/>
+          <a:p>
+            <a:endParaRPr lang="en-US"/>
+          </a:p>
+        </p:txBody>
+      </p:sp>
+      <p:sp>
+        <p:nvSpPr>
+          <p:cNvPr id="272" name="sh"/>
+          <p:cNvSpPr txBox="1"/>
+          <p:nvPr/>
+        </p:nvSpPr>
+        <p:spPr>
+          <a:xfrm>
+            <a:off x="6206000" y="1600000"/>
+            <a:ext cx="2517240" cy="1700000"/>
+          </a:xfrm>
+          <a:prstGeom prst="roundRect">
+            <a:avLst>
+              <a:gd name="adj" fmla="val 8000"/>
+            </a:avLst>
+          </a:prstGeom>
+          <a:solidFill>
+            <a:srgbClr val="F5F7FA"/>
+          </a:solidFill>
+          <a:ln>
+            <a:noFill/>
+          </a:ln>
+        </p:spPr>
+        <p:txBody>
+          <a:bodyPr wrap="square" lIns="160020" tIns="137160" rIns="160020" bIns="137160" anchor="t">
+            <a:normAutofit/>
+          </a:bodyPr>
+          <a:lstStyle/>
+          <a:p>
+            <a:pPr marL="0" indent="0" algn="l">
+              <a:buNone/>
+            </a:pPr>
+            <a:r>
+              <a:rPr lang="en-US" sz="3600" b="1" i="0" dirty="0">
+                <a:solidFill>
+                  <a:srgbClr val="2E5C8A"/>
+                </a:solidFill>
+                <a:latin typeface="Calibri"/>
+              </a:rPr>
+              <a:t>6,074 ns</a:t>
+            </a:r>
+          </a:p>
+          <a:p>
+            <a:pPr marL="0" indent="0" algn="l">
+              <a:spcBef>
+                <a:spcPts val="200"/>
+              </a:spcBef>
+              <a:buNone/>
+            </a:pPr>
+            <a:r>
+              <a:rPr lang="en-US" sz="1250" b="1" i="0" dirty="0">
+                <a:solidFill>
+                  <a:srgbClr val="1A1D21"/>
+                </a:solidFill>
+                <a:latin typeface="Calibri"/>
+              </a:rPr>
+              <a:t>average latency</a:t>
+            </a:r>
+          </a:p>
+          <a:p>
+            <a:pPr marL="0" indent="0" algn="l">
+              <a:spcBef>
+                <a:spcPts val="120"/>
+              </a:spcBef>
+              <a:buNone/>
+            </a:pPr>
+            <a:r>
+              <a:rPr lang="en-US" sz="1050" b="0" i="0" dirty="0">
+                <a:solidFill>
+                  <a:srgbClr val="5F6368"/>
+                </a:solidFill>
+                <a:latin typeface="Calibri"/>
+              </a:rPr>
+              <a:t>matches prediction</a:t>
+            </a:r>
+          </a:p>
+        </p:txBody>
+      </p:sp>
+      <p:sp>
+        <p:nvSpPr>
+          <p:cNvPr id="273" name="sh"/>
+          <p:cNvSpPr txBox="1"/>
+          <p:nvPr/>
+        </p:nvSpPr>
+        <p:spPr>
+          <a:xfrm>
+            <a:off x="6206000" y="1600000"/>
+            <a:ext cx="2517240" cy="60000"/>
+          </a:xfrm>
+          <a:prstGeom prst="rect">
+            <a:avLst/>
+          </a:prstGeom>
+          <a:solidFill>
+            <a:srgbClr val="2E5C8A"/>
+          </a:solidFill>
+          <a:ln>
+            <a:noFill/>
+          </a:ln>
+        </p:spPr>
+        <p:txBody>
+          <a:bodyPr wrap="square" lIns="137160" tIns="91440" rIns="137160" bIns="91440" anchor="t">
+            <a:normAutofit/>
+          </a:bodyPr>
+          <a:lstStyle/>
+          <a:p>
+            <a:endParaRPr lang="en-US"/>
+          </a:p>
+        </p:txBody>
+      </p:sp>
+      <p:sp>
+        <p:nvSpPr>
+          <p:cNvPr id="274" name="sh"/>
+          <p:cNvSpPr txBox="1"/>
+          <p:nvPr/>
+        </p:nvSpPr>
+        <p:spPr>
+          <a:xfrm>
+            <a:off x="8943240" y="1600000"/>
+            <a:ext cx="2517240" cy="1700000"/>
+          </a:xfrm>
+          <a:prstGeom prst="roundRect">
+            <a:avLst>
+              <a:gd name="adj" fmla="val 8000"/>
+            </a:avLst>
+          </a:prstGeom>
+          <a:solidFill>
+            <a:srgbClr val="F5F7FA"/>
+          </a:solidFill>
+          <a:ln>
+            <a:noFill/>
+          </a:ln>
+        </p:spPr>
+        <p:txBody>
+          <a:bodyPr wrap="square" lIns="160020" tIns="137160" rIns="160020" bIns="137160" anchor="t">
+            <a:normAutofit/>
+          </a:bodyPr>
+          <a:lstStyle/>
+          <a:p>
+            <a:pPr marL="0" indent="0" algn="l">
+              <a:buNone/>
+            </a:pPr>
+            <a:r>
+              <a:rPr lang="en-US" sz="3600" b="1" i="0" dirty="0">
+                <a:solidFill>
+                  <a:srgbClr val="2E7D32"/>
+                </a:solidFill>
+                <a:latin typeface="Calibri"/>
+              </a:rPr>
+              <a:t>0</a:t>
+            </a:r>
+          </a:p>
+          <a:p>
+            <a:pPr marL="0" indent="0" algn="l">
+              <a:spcBef>
+                <a:spcPts val="200"/>
+              </a:spcBef>
+              <a:buNone/>
+            </a:pPr>
+            <a:r>
+              <a:rPr lang="en-US" sz="1250" b="1" i="0" dirty="0">
+                <a:solidFill>
+                  <a:srgbClr val="1A1D21"/>
+                </a:solidFill>
+                <a:latin typeface="Calibri"/>
+              </a:rPr>
+              <a:t>correctness errors</a:t>
+            </a:r>
+          </a:p>
+          <a:p>
+            <a:pPr marL="0" indent="0" algn="l">
+              <a:spcBef>
+                <a:spcPts val="120"/>
+              </a:spcBef>
+              <a:buNone/>
+            </a:pPr>
+            <a:r>
+              <a:rPr lang="en-US" sz="1050" b="0" i="0" dirty="0">
+                <a:solidFill>
+                  <a:srgbClr val="5F6368"/>
+                </a:solidFill>
+                <a:latin typeface="Calibri"/>
+              </a:rPr>
+              <a:t>all three counters clean</a:t>
+            </a:r>
+          </a:p>
+        </p:txBody>
+      </p:sp>
+      <p:sp>
+        <p:nvSpPr>
+          <p:cNvPr id="275" name="sh"/>
+          <p:cNvSpPr txBox="1"/>
+          <p:nvPr/>
+        </p:nvSpPr>
+        <p:spPr>
+          <a:xfrm>
+            <a:off x="8943240" y="1600000"/>
+            <a:ext cx="2517240" cy="60000"/>
+          </a:xfrm>
+          <a:prstGeom prst="rect">
+            <a:avLst/>
+          </a:prstGeom>
+          <a:solidFill>
+            <a:srgbClr val="2E7D32"/>
+          </a:solidFill>
+          <a:ln>
+            <a:noFill/>
+          </a:ln>
+        </p:spPr>
+        <p:txBody>
+          <a:bodyPr wrap="square" lIns="137160" tIns="91440" rIns="137160" bIns="91440" anchor="t">
+            <a:normAutofit/>
+          </a:bodyPr>
+          <a:lstStyle/>
+          <a:p>
+            <a:endParaRPr lang="en-US"/>
+          </a:p>
+        </p:txBody>
+      </p:sp>
+      <p:sp>
+        <p:nvSpPr>
+          <p:cNvPr id="276" name="sh"/>
+          <p:cNvSpPr txBox="1"/>
+          <p:nvPr/>
+        </p:nvSpPr>
+        <p:spPr>
+          <a:xfrm>
+            <a:off x="731520" y="3520000"/>
+            <a:ext cx="10728960" cy="1300000"/>
+          </a:xfrm>
+          <a:prstGeom prst="rect">
+            <a:avLst/>
+          </a:prstGeom>
+          <a:noFill/>
+          <a:ln>
+            <a:noFill/>
+          </a:ln>
+        </p:spPr>
+        <p:txBody>
+          <a:bodyPr wrap="square" lIns="0" tIns="0" rIns="0" bIns="0" anchor="t">
+            <a:normAutofit/>
+          </a:bodyPr>
+          <a:lstStyle/>
+          <a:p>
+            <a:pPr marL="457200" indent="-228600" algn="l">
+              <a:spcBef>
+                <a:spcPts val="380"/>
+              </a:spcBef>
+              <a:buClr>
+                <a:srgbClr val="8FA3BF"/>
+              </a:buClr>
+              <a:buSzPct val="90000"/>
+              <a:buFont typeface="Arial"/>
+              <a:buChar char="–"/>
+            </a:pPr>
+            <a:r>
+              <a:rPr lang="en-US" sz="1300" b="0" i="0" dirty="0">
+                <a:solidFill>
+                  <a:srgbClr val="5F6368"/>
+                </a:solidFill>
+                <a:latin typeface="Calibri"/>
+              </a:rPr>
+              <a:t>Same trace, same settings, the only difference is the buffer being switched on.</a:t>
+            </a:r>
+          </a:p>
+          <a:p>
+            <a:pPr marL="457200" indent="-228600" algn="l">
+              <a:spcBef>
+                <a:spcPts val="380"/>
+              </a:spcBef>
+              <a:buClr>
+                <a:srgbClr val="8FA3BF"/>
+              </a:buClr>
+              <a:buSzPct val="90000"/>
+              <a:buFont typeface="Arial"/>
+              <a:buChar char="–"/>
+            </a:pPr>
+            <a:r>
+              <a:rPr lang="en-US" sz="1300" b="0" i="0" dirty="0">
+                <a:solidFill>
+                  <a:srgbClr val="5F6368"/>
+                </a:solidFill>
+                <a:latin typeface="Calibri"/>
+              </a:rPr>
+              <a:t>Predicted latency from hit rate was 5,829 ns against 6,074 ns measured, so hits, misses and timing now tell one consistent story.</a:t>
+            </a:r>
+          </a:p>
+        </p:txBody>
+      </p:sp>
+      <p:sp>
+        <p:nvSpPr>
+          <p:cNvPr id="277" name="nb"/>
+          <p:cNvSpPr txBox="1"/>
+          <p:nvPr/>
+        </p:nvSpPr>
+        <p:spPr>
+          <a:xfrm>
+            <a:off x="731520" y="4980000"/>
+            <a:ext cx="68580" cy="1150000"/>
+          </a:xfrm>
+          <a:prstGeom prst="rect">
+            <a:avLst/>
+          </a:prstGeom>
+          <a:solidFill>
+            <a:srgbClr val="C55A11"/>
+          </a:solidFill>
+          <a:ln>
+            <a:noFill/>
+          </a:ln>
+        </p:spPr>
+        <p:txBody>
+          <a:bodyPr wrap="square" lIns="137160" tIns="91440" rIns="137160" bIns="91440" anchor="t">
+            <a:normAutofit/>
+          </a:bodyPr>
+          <a:lstStyle/>
+          <a:p>
+            <a:endParaRPr lang="en-US"/>
+          </a:p>
+        </p:txBody>
+      </p:sp>
+      <p:sp>
+        <p:nvSpPr>
+          <p:cNvPr id="278" name="sh"/>
+          <p:cNvSpPr txBox="1"/>
+          <p:nvPr/>
+        </p:nvSpPr>
+        <p:spPr>
+          <a:xfrm>
+            <a:off x="800100" y="4980000"/>
+            <a:ext cx="10660380" cy="1150000"/>
+          </a:xfrm>
+          <a:prstGeom prst="rect">
+            <a:avLst/>
+          </a:prstGeom>
+          <a:solidFill>
+            <a:srgbClr val="EAEFF6"/>
+          </a:solidFill>
+          <a:ln>
+            <a:noFill/>
+          </a:ln>
+        </p:spPr>
+        <p:txBody>
+          <a:bodyPr wrap="square" lIns="137160" tIns="91440" rIns="137160" bIns="91440" anchor="t">
+            <a:normAutofit/>
+          </a:bodyPr>
+          <a:lstStyle/>
+          <a:p>
+            <a:pPr marL="0" indent="0" algn="l">
+              <a:buNone/>
+            </a:pPr>
+            <a:r>
+              <a:rPr lang="en-US" sz="1000" b="1" i="0" spc="200" dirty="0">
+                <a:solidFill>
+                  <a:srgbClr val="C55A11"/>
+                </a:solidFill>
+                <a:latin typeface="Calibri"/>
+              </a:rPr>
+              <a:t>IN PLAIN WORDS</a:t>
+            </a:r>
+          </a:p>
+          <a:p>
+            <a:pPr marL="0" indent="0" algn="l">
+              <a:spcBef>
+                <a:spcPts val="250"/>
+              </a:spcBef>
+              <a:buNone/>
+            </a:pPr>
+            <a:r>
+              <a:rPr lang="en-US" sz="1400" b="0" i="0" dirty="0">
+                <a:solidFill>
+                  <a:srgbClr val="1A1D21"/>
+                </a:solidFill>
+                <a:latin typeface="Calibri"/>
+              </a:rPr>
+              <a:t>The 3x figure is measured rather than assumed. Both sides of that comparison are identical apart from the buffer, which is what makes it a fair test.</a:t>
+            </a:r>
+          </a:p>
+        </p:txBody>
+      </p:sp>
+    </p:spTree>
+  </p:cSld>
+  <p:clrMapOvr>
+    <a:masterClrMapping/>
+  </p:clrMapOvr>
+</p:sld>
+</file>
+
+<file path=ppt/slides/slide24.xml><?xml version="1.0" encoding="utf-8"?>
+<p:sld xmlns:a="http://schemas.openxmlformats.org/drawingml/2006/main" xmlns:r="http://schemas.openxmlformats.org/officeDocument/2006/relationships" xmlns:p="http://schemas.openxmlformats.org/presentationml/2006/main">
+  <p:cSld>
+    <p:spTree>
+      <p:nvGrpSpPr>
+        <p:cNvPr id="1" name=""/>
+        <p:cNvGrpSpPr/>
+        <p:nvPr/>
+      </p:nvGrpSpPr>
+      <p:grpSpPr>
+        <a:xfrm>
+          <a:off x="0" y="0"/>
+          <a:ext cx="0" cy="0"/>
+          <a:chOff x="0" y="0"/>
+          <a:chExt cx="0" cy="0"/>
+        </a:xfrm>
+      </p:grpSpPr>
+      <p:sp>
+        <p:nvSpPr>
+          <p:cNvPr id="279" name="rule"/>
+          <p:cNvSpPr txBox="1"/>
+          <p:nvPr/>
+        </p:nvSpPr>
+        <p:spPr>
+          <a:xfrm>
+            <a:off x="0" y="0"/>
+            <a:ext cx="12192000" cy="68580"/>
+          </a:xfrm>
+          <a:prstGeom prst="rect">
+            <a:avLst/>
+          </a:prstGeom>
+          <a:solidFill>
+            <a:srgbClr val="C55A11"/>
+          </a:solidFill>
+          <a:ln>
+            <a:noFill/>
+          </a:ln>
+        </p:spPr>
+        <p:txBody>
+          <a:bodyPr wrap="square" lIns="137160" tIns="91440" rIns="137160" bIns="91440" anchor="t">
+            <a:normAutofit/>
+          </a:bodyPr>
+          <a:lstStyle/>
+          <a:p>
+            <a:endParaRPr lang="en-US"/>
+          </a:p>
+        </p:txBody>
+      </p:sp>
+      <p:sp>
+        <p:nvSpPr>
+          <p:cNvPr id="280" name="spine"/>
+          <p:cNvSpPr txBox="1"/>
+          <p:nvPr/>
+        </p:nvSpPr>
+        <p:spPr>
+          <a:xfrm>
+            <a:off x="0" y="68580"/>
+            <a:ext cx="137160" cy="6789420"/>
+          </a:xfrm>
+          <a:prstGeom prst="rect">
+            <a:avLst/>
+          </a:prstGeom>
+          <a:solidFill>
+            <a:srgbClr val="1F3864"/>
+          </a:solidFill>
+          <a:ln>
+            <a:noFill/>
+          </a:ln>
+        </p:spPr>
+        <p:txBody>
+          <a:bodyPr wrap="square" lIns="137160" tIns="91440" rIns="137160" bIns="91440" anchor="t">
+            <a:normAutofit/>
+          </a:bodyPr>
+          <a:lstStyle/>
+          <a:p>
+            <a:endParaRPr lang="en-US"/>
+          </a:p>
+        </p:txBody>
+      </p:sp>
+      <p:sp>
+        <p:nvSpPr>
+          <p:cNvPr id="281" name="sh"/>
+          <p:cNvSpPr txBox="1"/>
+          <p:nvPr/>
+        </p:nvSpPr>
+        <p:spPr>
+          <a:xfrm>
+            <a:off x="731520" y="320040"/>
+            <a:ext cx="10728960" cy="300000"/>
+          </a:xfrm>
+          <a:prstGeom prst="rect">
+            <a:avLst/>
+          </a:prstGeom>
+          <a:noFill/>
+          <a:ln>
+            <a:noFill/>
+          </a:ln>
+        </p:spPr>
+        <p:txBody>
+          <a:bodyPr wrap="square" lIns="0" tIns="0" rIns="0" bIns="0" anchor="t">
+            <a:normAutofit/>
+          </a:bodyPr>
+          <a:lstStyle/>
+          <a:p>
+            <a:pPr marL="0" indent="0" algn="l">
+              <a:buNone/>
+            </a:pPr>
+            <a:r>
+              <a:rPr lang="en-US" sz="1100" b="1" i="0" spc="300" dirty="0">
+                <a:solidFill>
+                  <a:srgbClr val="C55A11"/>
+                </a:solidFill>
+                <a:latin typeface="Calibri"/>
+              </a:rPr>
+              <a:t>STATUS</a:t>
+            </a:r>
+          </a:p>
+        </p:txBody>
+      </p:sp>
+      <p:sp>
+        <p:nvSpPr>
+          <p:cNvPr id="282" name="sh"/>
+          <p:cNvSpPr txBox="1"/>
+          <p:nvPr/>
+        </p:nvSpPr>
+        <p:spPr>
+          <a:xfrm>
+            <a:off x="731520" y="620000"/>
+            <a:ext cx="10728960" cy="780000"/>
+          </a:xfrm>
+          <a:prstGeom prst="rect">
+            <a:avLst/>
+          </a:prstGeom>
+          <a:noFill/>
+          <a:ln>
+            <a:noFill/>
+          </a:ln>
+        </p:spPr>
+        <p:txBody>
+          <a:bodyPr wrap="square" lIns="0" tIns="0" rIns="0" bIns="0" anchor="t">
+            <a:normAutofit/>
+          </a:bodyPr>
+          <a:lstStyle/>
+          <a:p>
+            <a:pPr marL="0" indent="0" algn="l">
+              <a:buNone/>
+            </a:pPr>
+            <a:r>
+              <a:rPr lang="en-US" sz="2600" b="1" i="0" dirty="0">
+                <a:solidFill>
+                  <a:srgbClr val="1F3864"/>
+                </a:solidFill>
+                <a:latin typeface="Calibri"/>
+              </a:rPr>
+              <a:t>Where the project stands</a:t>
+            </a:r>
+          </a:p>
+        </p:txBody>
+      </p:sp>
+      <p:sp>
+        <p:nvSpPr>
+          <p:cNvPr id="283" name="ul"/>
+          <p:cNvSpPr txBox="1"/>
+          <p:nvPr/>
+        </p:nvSpPr>
+        <p:spPr>
+          <a:xfrm>
+            <a:off x="731520" y="1400000"/>
+            <a:ext cx="1600000" cy="40000"/>
+          </a:xfrm>
+          <a:prstGeom prst="rect">
+            <a:avLst/>
+          </a:prstGeom>
+          <a:solidFill>
+            <a:srgbClr val="C55A11"/>
+          </a:solidFill>
+          <a:ln>
+            <a:noFill/>
+          </a:ln>
+        </p:spPr>
+        <p:txBody>
+          <a:bodyPr wrap="square" lIns="137160" tIns="91440" rIns="137160" bIns="91440" anchor="t">
+            <a:normAutofit/>
+          </a:bodyPr>
+          <a:lstStyle/>
+          <a:p>
+            <a:endParaRPr lang="en-US"/>
+          </a:p>
+        </p:txBody>
+      </p:sp>
+      <p:sp>
+        <p:nvSpPr>
+          <p:cNvPr id="284" name="sh"/>
+          <p:cNvSpPr txBox="1"/>
+          <p:nvPr/>
+        </p:nvSpPr>
+        <p:spPr>
+          <a:xfrm>
+            <a:off x="731520" y="6358000"/>
+            <a:ext cx="6437376" cy="300000"/>
+          </a:xfrm>
+          <a:prstGeom prst="rect">
+            <a:avLst/>
+          </a:prstGeom>
+          <a:noFill/>
+          <a:ln>
+            <a:noFill/>
+          </a:ln>
+        </p:spPr>
+        <p:txBody>
+          <a:bodyPr wrap="square" lIns="0" tIns="0" rIns="0" bIns="0" anchor="t">
+            <a:normAutofit/>
+          </a:bodyPr>
+          <a:lstStyle/>
+          <a:p>
+            <a:pPr marL="0" indent="0" algn="l">
+              <a:buNone/>
+            </a:pPr>
+            <a:r>
+              <a:rPr lang="en-US" sz="1000" b="0" i="0" dirty="0">
+                <a:solidFill>
+                  <a:srgbClr val="8FA3BF"/>
+                </a:solidFill>
+                <a:latin typeface="Calibri"/>
+              </a:rPr>
+              <a:t>H3 cycle-accurate memory simulator</a:t>
+            </a:r>
+          </a:p>
+        </p:txBody>
+      </p:sp>
+      <p:sp>
+        <p:nvSpPr>
+          <p:cNvPr id="285" name="sh"/>
+          <p:cNvSpPr txBox="1"/>
+          <p:nvPr/>
+        </p:nvSpPr>
+        <p:spPr>
+          <a:xfrm>
+            <a:off x="10760480" y="6358000"/>
+            <a:ext cx="700000" cy="300000"/>
+          </a:xfrm>
+          <a:prstGeom prst="rect">
+            <a:avLst/>
+          </a:prstGeom>
+          <a:noFill/>
+          <a:ln>
+            <a:noFill/>
+          </a:ln>
+        </p:spPr>
+        <p:txBody>
+          <a:bodyPr wrap="square" lIns="0" tIns="0" rIns="0" bIns="0" anchor="t">
+            <a:normAutofit/>
+          </a:bodyPr>
+          <a:lstStyle/>
+          <a:p>
+            <a:pPr marL="0" indent="0" algn="r">
+              <a:buNone/>
+            </a:pPr>
+            <a:r>
+              <a:rPr lang="en-US" sz="1100" b="1" i="0" dirty="0">
+                <a:solidFill>
+                  <a:srgbClr val="8FA3BF"/>
+                </a:solidFill>
+                <a:latin typeface="Calibri"/>
+              </a:rPr>
+              <a:t>24</a:t>
+            </a:r>
+          </a:p>
+        </p:txBody>
+      </p:sp>
+      <p:sp>
+        <p:nvSpPr>
+          <p:cNvPr id="286" name="sh"/>
+          <p:cNvSpPr txBox="1"/>
+          <p:nvPr/>
+        </p:nvSpPr>
+        <p:spPr>
+          <a:xfrm>
+            <a:off x="731520" y="1580000"/>
+            <a:ext cx="1500000" cy="300000"/>
+          </a:xfrm>
+          <a:prstGeom prst="roundRect">
+            <a:avLst>
+              <a:gd name="adj" fmla="val 22000"/>
+            </a:avLst>
+          </a:prstGeom>
+          <a:solidFill>
+            <a:srgbClr val="2E7D32"/>
+          </a:solidFill>
+          <a:ln>
+            <a:noFill/>
+          </a:ln>
+        </p:spPr>
+        <p:txBody>
+          <a:bodyPr wrap="square" lIns="45720" tIns="27432" rIns="45720" bIns="27432" anchor="ctr">
+            <a:normAutofit/>
+          </a:bodyPr>
+          <a:lstStyle/>
+          <a:p>
+            <a:pPr marL="0" indent="0" algn="ctr">
+              <a:buNone/>
+            </a:pPr>
+            <a:r>
+              <a:rPr lang="en-US" sz="1000" b="1" i="0" spc="150" dirty="0">
+                <a:solidFill>
+                  <a:srgbClr val="FFFFFF"/>
+                </a:solidFill>
+                <a:latin typeface="Calibri"/>
+              </a:rPr>
+              <a:t>WORKING</a:t>
+            </a:r>
+          </a:p>
+        </p:txBody>
+      </p:sp>
+      <p:sp>
+        <p:nvSpPr>
+          <p:cNvPr id="287" name="sh"/>
+          <p:cNvSpPr txBox="1"/>
+          <p:nvPr/>
+        </p:nvSpPr>
+        <p:spPr>
+          <a:xfrm>
+            <a:off x="2381520" y="1550000"/>
+            <a:ext cx="9078960" cy="380000"/>
+          </a:xfrm>
+          <a:prstGeom prst="rect">
+            <a:avLst/>
+          </a:prstGeom>
+          <a:noFill/>
+          <a:ln>
+            <a:noFill/>
+          </a:ln>
+        </p:spPr>
+        <p:txBody>
+          <a:bodyPr wrap="square" lIns="0" tIns="0" rIns="0" bIns="0" anchor="t">
+            <a:normAutofit/>
+          </a:bodyPr>
+          <a:lstStyle/>
+          <a:p>
+            <a:pPr marL="0" indent="0" algn="l">
+              <a:buNone/>
+            </a:pPr>
+            <a:r>
+              <a:rPr lang="en-US" sz="1450" b="1" i="0" dirty="0">
+                <a:solidFill>
+                  <a:srgbClr val="1A1D21"/>
+                </a:solidFill>
+                <a:latin typeface="Calibri"/>
+              </a:rPr>
+              <a:t>Full pipeline runs end to end</a:t>
+            </a:r>
+          </a:p>
+          <a:p>
+            <a:pPr marL="0" indent="0" algn="l">
+              <a:spcBef>
+                <a:spcPts val="80"/>
+              </a:spcBef>
+              <a:buNone/>
+            </a:pPr>
+            <a:r>
+              <a:rPr lang="en-US" sz="1200" b="0" i="0" dirty="0">
+                <a:solidFill>
+                  <a:srgbClr val="5F6368"/>
+                </a:solidFill>
+                <a:latin typeface="Calibri"/>
+              </a:rPr>
+              <a:t>200,000 cycles, clean exit, both memory models working</a:t>
+            </a:r>
+          </a:p>
+        </p:txBody>
+      </p:sp>
+      <p:sp>
+        <p:nvSpPr>
+          <p:cNvPr id="288" name="sh"/>
+          <p:cNvSpPr txBox="1"/>
+          <p:nvPr/>
+        </p:nvSpPr>
+        <p:spPr>
+          <a:xfrm>
+            <a:off x="731520" y="2240000"/>
+            <a:ext cx="1500000" cy="300000"/>
+          </a:xfrm>
+          <a:prstGeom prst="roundRect">
+            <a:avLst>
+              <a:gd name="adj" fmla="val 22000"/>
+            </a:avLst>
+          </a:prstGeom>
+          <a:solidFill>
+            <a:srgbClr val="2E7D32"/>
+          </a:solidFill>
+          <a:ln>
+            <a:noFill/>
+          </a:ln>
+        </p:spPr>
+        <p:txBody>
+          <a:bodyPr wrap="square" lIns="45720" tIns="27432" rIns="45720" bIns="27432" anchor="ctr">
+            <a:normAutofit/>
+          </a:bodyPr>
+          <a:lstStyle/>
+          <a:p>
+            <a:pPr marL="0" indent="0" algn="ctr">
+              <a:buNone/>
+            </a:pPr>
+            <a:r>
+              <a:rPr lang="en-US" sz="1000" b="1" i="0" spc="150" dirty="0">
+                <a:solidFill>
+                  <a:srgbClr val="FFFFFF"/>
+                </a:solidFill>
+                <a:latin typeface="Calibri"/>
+              </a:rPr>
+              <a:t>WORKING</a:t>
+            </a:r>
+          </a:p>
+        </p:txBody>
+      </p:sp>
+      <p:sp>
+        <p:nvSpPr>
+          <p:cNvPr id="289" name="sh"/>
+          <p:cNvSpPr txBox="1"/>
+          <p:nvPr/>
+        </p:nvSpPr>
+        <p:spPr>
+          <a:xfrm>
+            <a:off x="2381520" y="2210000"/>
+            <a:ext cx="9078960" cy="380000"/>
+          </a:xfrm>
+          <a:prstGeom prst="rect">
+            <a:avLst/>
+          </a:prstGeom>
+          <a:noFill/>
+          <a:ln>
+            <a:noFill/>
+          </a:ln>
+        </p:spPr>
+        <p:txBody>
+          <a:bodyPr wrap="square" lIns="0" tIns="0" rIns="0" bIns="0" anchor="t">
+            <a:normAutofit/>
+          </a:bodyPr>
+          <a:lstStyle/>
+          <a:p>
+            <a:pPr marL="0" indent="0" algn="l">
+              <a:buNone/>
+            </a:pPr>
+            <a:r>
+              <a:rPr lang="en-US" sz="1450" b="1" i="0" dirty="0">
+                <a:solidFill>
+                  <a:srgbClr val="1A1D21"/>
+                </a:solidFill>
+                <a:latin typeface="Calibri"/>
+              </a:rPr>
+              <a:t>Flash model, router, buffer, scheduler</a:t>
+            </a:r>
+          </a:p>
+          <a:p>
+            <a:pPr marL="0" indent="0" algn="l">
+              <a:spcBef>
+                <a:spcPts val="80"/>
+              </a:spcBef>
+              <a:buNone/>
+            </a:pPr>
+            <a:r>
+              <a:rPr lang="en-US" sz="1200" b="0" i="0" dirty="0">
+                <a:solidFill>
+                  <a:srgbClr val="5F6368"/>
+                </a:solidFill>
+                <a:latin typeface="Calibri"/>
+              </a:rPr>
+              <a:t>All four components built, tested and integrated</a:t>
+            </a:r>
+          </a:p>
+        </p:txBody>
+      </p:sp>
+      <p:sp>
+        <p:nvSpPr>
+          <p:cNvPr id="290" name="sh"/>
+          <p:cNvSpPr txBox="1"/>
+          <p:nvPr/>
+        </p:nvSpPr>
+        <p:spPr>
+          <a:xfrm>
+            <a:off x="731520" y="2900000"/>
+            <a:ext cx="1500000" cy="300000"/>
+          </a:xfrm>
+          <a:prstGeom prst="roundRect">
+            <a:avLst>
+              <a:gd name="adj" fmla="val 22000"/>
+            </a:avLst>
+          </a:prstGeom>
+          <a:solidFill>
+            <a:srgbClr val="2E7D32"/>
+          </a:solidFill>
+          <a:ln>
+            <a:noFill/>
+          </a:ln>
+        </p:spPr>
+        <p:txBody>
+          <a:bodyPr wrap="square" lIns="45720" tIns="27432" rIns="45720" bIns="27432" anchor="ctr">
+            <a:normAutofit/>
+          </a:bodyPr>
+          <a:lstStyle/>
+          <a:p>
+            <a:pPr marL="0" indent="0" algn="ctr">
+              <a:buNone/>
+            </a:pPr>
+            <a:r>
+              <a:rPr lang="en-US" sz="1000" b="1" i="0" spc="150" dirty="0">
+                <a:solidFill>
+                  <a:srgbClr val="FFFFFF"/>
+                </a:solidFill>
+                <a:latin typeface="Calibri"/>
+              </a:rPr>
+              <a:t>WORKING</a:t>
+            </a:r>
+          </a:p>
+        </p:txBody>
+      </p:sp>
+      <p:sp>
+        <p:nvSpPr>
+          <p:cNvPr id="291" name="sh"/>
+          <p:cNvSpPr txBox="1"/>
+          <p:nvPr/>
+        </p:nvSpPr>
+        <p:spPr>
+          <a:xfrm>
+            <a:off x="2381520" y="2870000"/>
+            <a:ext cx="9078960" cy="380000"/>
+          </a:xfrm>
+          <a:prstGeom prst="rect">
+            <a:avLst/>
+          </a:prstGeom>
+          <a:noFill/>
+          <a:ln>
+            <a:noFill/>
+          </a:ln>
+        </p:spPr>
+        <p:txBody>
+          <a:bodyPr wrap="square" lIns="0" tIns="0" rIns="0" bIns="0" anchor="t">
+            <a:normAutofit/>
+          </a:bodyPr>
+          <a:lstStyle/>
+          <a:p>
+            <a:pPr marL="0" indent="0" algn="l">
+              <a:buNone/>
+            </a:pPr>
+            <a:r>
+              <a:rPr lang="en-US" sz="1450" b="1" i="0" dirty="0">
+                <a:solidFill>
+                  <a:srgbClr val="1A1D21"/>
+                </a:solidFill>
+                <a:latin typeface="Calibri"/>
+              </a:rPr>
+              <a:t>Published to GitHub with both simulators as submodules</a:t>
+            </a:r>
+          </a:p>
+          <a:p>
+            <a:pPr marL="0" indent="0" algn="l">
+              <a:spcBef>
+                <a:spcPts val="80"/>
+              </a:spcBef>
+              <a:buNone/>
+            </a:pPr>
+            <a:r>
+              <a:rPr lang="en-US" sz="1200" b="0" i="0" dirty="0">
+                <a:solidFill>
+                  <a:srgbClr val="5F6368"/>
+                </a:solidFill>
+                <a:latin typeface="Calibri"/>
+              </a:rPr>
+              <a:t>Reproducible on another machine with one clone command</a:t>
+            </a:r>
+          </a:p>
+        </p:txBody>
+      </p:sp>
+      <p:sp>
+        <p:nvSpPr>
+          <p:cNvPr id="292" name="sh"/>
+          <p:cNvSpPr txBox="1"/>
+          <p:nvPr/>
+        </p:nvSpPr>
+        <p:spPr>
+          <a:xfrm>
+            <a:off x="731520" y="3560000"/>
+            <a:ext cx="1500000" cy="300000"/>
+          </a:xfrm>
+          <a:prstGeom prst="roundRect">
+            <a:avLst>
+              <a:gd name="adj" fmla="val 22000"/>
+            </a:avLst>
+          </a:prstGeom>
+          <a:solidFill>
+            <a:srgbClr val="2E7D32"/>
+          </a:solidFill>
+          <a:ln>
+            <a:noFill/>
+          </a:ln>
+        </p:spPr>
+        <p:txBody>
+          <a:bodyPr wrap="square" lIns="45720" tIns="27432" rIns="45720" bIns="27432" anchor="ctr">
+            <a:normAutofit/>
+          </a:bodyPr>
+          <a:lstStyle/>
+          <a:p>
+            <a:pPr marL="0" indent="0" algn="ctr">
+              <a:buNone/>
+            </a:pPr>
+            <a:r>
+              <a:rPr lang="en-US" sz="1000" b="1" i="0" spc="150" dirty="0">
+                <a:solidFill>
+                  <a:srgbClr val="FFFFFF"/>
+                </a:solidFill>
+                <a:latin typeface="Calibri"/>
+              </a:rPr>
+              <a:t>WORKING</a:t>
+            </a:r>
+          </a:p>
+        </p:txBody>
+      </p:sp>
+      <p:sp>
+        <p:nvSpPr>
+          <p:cNvPr id="293" name="sh"/>
+          <p:cNvSpPr txBox="1"/>
+          <p:nvPr/>
+        </p:nvSpPr>
+        <p:spPr>
+          <a:xfrm>
+            <a:off x="2381520" y="3530000"/>
+            <a:ext cx="9078960" cy="380000"/>
+          </a:xfrm>
+          <a:prstGeom prst="rect">
+            <a:avLst/>
+          </a:prstGeom>
+          <a:noFill/>
+          <a:ln>
+            <a:noFill/>
+          </a:ln>
+        </p:spPr>
+        <p:txBody>
+          <a:bodyPr wrap="square" lIns="0" tIns="0" rIns="0" bIns="0" anchor="t">
+            <a:normAutofit/>
+          </a:bodyPr>
+          <a:lstStyle/>
+          <a:p>
+            <a:pPr marL="0" indent="0" algn="l">
+              <a:buNone/>
+            </a:pPr>
+            <a:r>
+              <a:rPr lang="en-US" sz="1450" b="1" i="0" dirty="0">
+                <a:solidFill>
+                  <a:srgbClr val="1A1D21"/>
+                </a:solidFill>
+                <a:latin typeface="Calibri"/>
+              </a:rPr>
+              <a:t>Real traces can now drive the simulator</a:t>
+            </a:r>
+          </a:p>
+          <a:p>
+            <a:pPr marL="0" indent="0" algn="l">
+              <a:spcBef>
+                <a:spcPts val="80"/>
+              </a:spcBef>
+              <a:buNone/>
+            </a:pPr>
+            <a:r>
+              <a:rPr lang="en-US" sz="1200" b="0" i="0" dirty="0">
+                <a:solidFill>
+                  <a:srgbClr val="5F6368"/>
+                </a:solidFill>
+                <a:latin typeface="Calibri"/>
+              </a:rPr>
+              <a:t>Buffers classified into flash or HBM automatically from the trace</a:t>
+            </a:r>
+          </a:p>
+        </p:txBody>
+      </p:sp>
+      <p:sp>
+        <p:nvSpPr>
+          <p:cNvPr id="294" name="sh"/>
+          <p:cNvSpPr txBox="1"/>
+          <p:nvPr/>
+        </p:nvSpPr>
+        <p:spPr>
+          <a:xfrm>
+            <a:off x="731520" y="4220000"/>
+            <a:ext cx="1500000" cy="300000"/>
+          </a:xfrm>
+          <a:prstGeom prst="roundRect">
+            <a:avLst>
+              <a:gd name="adj" fmla="val 22000"/>
+            </a:avLst>
+          </a:prstGeom>
+          <a:solidFill>
+            <a:srgbClr val="B26A00"/>
+          </a:solidFill>
+          <a:ln>
+            <a:noFill/>
+          </a:ln>
+        </p:spPr>
+        <p:txBody>
+          <a:bodyPr wrap="square" lIns="45720" tIns="27432" rIns="45720" bIns="27432" anchor="ctr">
+            <a:normAutofit/>
+          </a:bodyPr>
+          <a:lstStyle/>
+          <a:p>
+            <a:pPr marL="0" indent="0" algn="ctr">
+              <a:buNone/>
+            </a:pPr>
+            <a:r>
+              <a:rPr lang="en-US" sz="1000" b="1" i="0" spc="150" dirty="0">
+                <a:solidFill>
+                  <a:srgbClr val="FFFFFF"/>
+                </a:solidFill>
+                <a:latin typeface="Calibri"/>
+              </a:rPr>
+              <a:t>PARTIAL</a:t>
+            </a:r>
+          </a:p>
+        </p:txBody>
+      </p:sp>
+      <p:sp>
+        <p:nvSpPr>
+          <p:cNvPr id="295" name="sh"/>
+          <p:cNvSpPr txBox="1"/>
+          <p:nvPr/>
+        </p:nvSpPr>
+        <p:spPr>
+          <a:xfrm>
+            <a:off x="2381520" y="4190000"/>
+            <a:ext cx="9078960" cy="380000"/>
+          </a:xfrm>
+          <a:prstGeom prst="rect">
+            <a:avLst/>
+          </a:prstGeom>
+          <a:noFill/>
+          <a:ln>
+            <a:noFill/>
+          </a:ln>
+        </p:spPr>
+        <p:txBody>
+          <a:bodyPr wrap="square" lIns="0" tIns="0" rIns="0" bIns="0" anchor="t">
+            <a:normAutofit/>
+          </a:bodyPr>
+          <a:lstStyle/>
+          <a:p>
+            <a:pPr marL="0" indent="0" algn="l">
+              <a:buNone/>
+            </a:pPr>
+            <a:r>
+              <a:rPr lang="en-US" sz="1450" b="1" i="0" dirty="0">
+                <a:solidFill>
+                  <a:srgbClr val="1A1D21"/>
+                </a:solidFill>
+                <a:latin typeface="Calibri"/>
+              </a:rPr>
+              <a:t>Power modelling</a:t>
+            </a:r>
+          </a:p>
+          <a:p>
+            <a:pPr marL="0" indent="0" algn="l">
+              <a:spcBef>
+                <a:spcPts val="80"/>
+              </a:spcBef>
+              <a:buNone/>
+            </a:pPr>
+            <a:r>
+              <a:rPr lang="en-US" sz="1200" b="0" i="0" dirty="0">
+                <a:solidFill>
+                  <a:srgbClr val="5F6368"/>
+                </a:solidFill>
+                <a:latin typeface="Calibri"/>
+              </a:rPr>
+              <a:t>First-order only; command-level counts not yet wired through</a:t>
+            </a:r>
+          </a:p>
+        </p:txBody>
+      </p:sp>
+      <p:sp>
+        <p:nvSpPr>
+          <p:cNvPr id="296" name="sh"/>
+          <p:cNvSpPr txBox="1"/>
+          <p:nvPr/>
+        </p:nvSpPr>
+        <p:spPr>
+          <a:xfrm>
+            <a:off x="731520" y="4880000"/>
+            <a:ext cx="1500000" cy="300000"/>
+          </a:xfrm>
+          <a:prstGeom prst="roundRect">
+            <a:avLst>
+              <a:gd name="adj" fmla="val 22000"/>
+            </a:avLst>
+          </a:prstGeom>
+          <a:solidFill>
+            <a:srgbClr val="5F6368"/>
+          </a:solidFill>
+          <a:ln>
+            <a:noFill/>
+          </a:ln>
+        </p:spPr>
+        <p:txBody>
+          <a:bodyPr wrap="square" lIns="45720" tIns="27432" rIns="45720" bIns="27432" anchor="ctr">
+            <a:normAutofit/>
+          </a:bodyPr>
+          <a:lstStyle/>
+          <a:p>
+            <a:pPr marL="0" indent="0" algn="ctr">
+              <a:buNone/>
+            </a:pPr>
+            <a:r>
+              <a:rPr lang="en-US" sz="1000" b="1" i="0" spc="150" dirty="0">
+                <a:solidFill>
+                  <a:srgbClr val="FFFFFF"/>
+                </a:solidFill>
+                <a:latin typeface="Calibri"/>
+              </a:rPr>
+              <a:t>PLANNED</a:t>
+            </a:r>
+          </a:p>
+        </p:txBody>
+      </p:sp>
+      <p:sp>
+        <p:nvSpPr>
+          <p:cNvPr id="297" name="sh"/>
+          <p:cNvSpPr txBox="1"/>
+          <p:nvPr/>
+        </p:nvSpPr>
+        <p:spPr>
+          <a:xfrm>
+            <a:off x="2381520" y="4850000"/>
+            <a:ext cx="9078960" cy="380000"/>
+          </a:xfrm>
+          <a:prstGeom prst="rect">
+            <a:avLst/>
+          </a:prstGeom>
+          <a:noFill/>
+          <a:ln>
+            <a:noFill/>
+          </a:ln>
+        </p:spPr>
+        <p:txBody>
+          <a:bodyPr wrap="square" lIns="0" tIns="0" rIns="0" bIns="0" anchor="t">
+            <a:normAutofit/>
+          </a:bodyPr>
+          <a:lstStyle/>
+          <a:p>
+            <a:pPr marL="0" indent="0" algn="l">
+              <a:buNone/>
+            </a:pPr>
+            <a:r>
+              <a:rPr lang="en-US" sz="1450" b="1" i="0" dirty="0">
+                <a:solidFill>
+                  <a:srgbClr val="1A1D21"/>
+                </a:solidFill>
+                <a:latin typeface="Calibri"/>
+              </a:rPr>
+              <a:t>A workload that properly exercises flash</a:t>
+            </a:r>
+          </a:p>
+          <a:p>
+            <a:pPr marL="0" indent="0" algn="l">
+              <a:spcBef>
+                <a:spcPts val="80"/>
+              </a:spcBef>
+              <a:buNone/>
+            </a:pPr>
+            <a:r>
+              <a:rPr lang="en-US" sz="1200" b="0" i="0" dirty="0">
+                <a:solidFill>
+                  <a:srgbClr val="5F6368"/>
+                </a:solidFill>
+                <a:latin typeface="Calibri"/>
+              </a:rPr>
+              <a:t>No free benchmark has large read-only data; needs real LLM traces</a:t>
+            </a:r>
+          </a:p>
+        </p:txBody>
+      </p:sp>
+      <p:sp>
+        <p:nvSpPr>
+          <p:cNvPr id="298" name="sh"/>
+          <p:cNvSpPr txBox="1"/>
+          <p:nvPr/>
+        </p:nvSpPr>
+        <p:spPr>
+          <a:xfrm>
+            <a:off x="731520" y="5540000"/>
+            <a:ext cx="1500000" cy="300000"/>
+          </a:xfrm>
+          <a:prstGeom prst="roundRect">
+            <a:avLst>
+              <a:gd name="adj" fmla="val 22000"/>
+            </a:avLst>
+          </a:prstGeom>
+          <a:solidFill>
+            <a:srgbClr val="8E1600"/>
+          </a:solidFill>
+          <a:ln>
+            <a:noFill/>
+          </a:ln>
+        </p:spPr>
+        <p:txBody>
+          <a:bodyPr wrap="square" lIns="45720" tIns="27432" rIns="45720" bIns="27432" anchor="ctr">
+            <a:normAutofit/>
+          </a:bodyPr>
+          <a:lstStyle/>
+          <a:p>
+            <a:pPr marL="0" indent="0" algn="ctr">
+              <a:buNone/>
+            </a:pPr>
+            <a:r>
+              <a:rPr lang="en-US" sz="1000" b="1" i="0" spc="150" dirty="0">
+                <a:solidFill>
+                  <a:srgbClr val="FFFFFF"/>
+                </a:solidFill>
+                <a:latin typeface="Calibri"/>
+              </a:rPr>
+              <a:t>NOT DONE</a:t>
+            </a:r>
+          </a:p>
+        </p:txBody>
+      </p:sp>
+      <p:sp>
+        <p:nvSpPr>
+          <p:cNvPr id="299" name="sh"/>
+          <p:cNvSpPr txBox="1"/>
+          <p:nvPr/>
+        </p:nvSpPr>
+        <p:spPr>
+          <a:xfrm>
+            <a:off x="2381520" y="5510000"/>
+            <a:ext cx="9078960" cy="380000"/>
+          </a:xfrm>
+          <a:prstGeom prst="rect">
+            <a:avLst/>
+          </a:prstGeom>
+          <a:noFill/>
+          <a:ln>
+            <a:noFill/>
+          </a:ln>
+        </p:spPr>
+        <p:txBody>
+          <a:bodyPr wrap="square" lIns="0" tIns="0" rIns="0" bIns="0" anchor="t">
+            <a:normAutofit/>
+          </a:bodyPr>
+          <a:lstStyle/>
+          <a:p>
+            <a:pPr marL="0" indent="0" algn="l">
+              <a:buNone/>
+            </a:pPr>
+            <a:r>
+              <a:rPr lang="en-US" sz="1450" b="1" i="0" dirty="0">
+                <a:solidFill>
+                  <a:srgbClr val="1A1D21"/>
+                </a:solidFill>
+                <a:latin typeface="Calibri"/>
+              </a:rPr>
+              <a:t>The paper's 2.69x throughput-per-watt figure</a:t>
+            </a:r>
+          </a:p>
+          <a:p>
+            <a:pPr marL="0" indent="0" algn="l">
+              <a:spcBef>
+                <a:spcPts val="80"/>
+              </a:spcBef>
+              <a:buNone/>
+            </a:pPr>
+            <a:r>
+              <a:rPr lang="en-US" sz="1200" b="0" i="0" dirty="0">
+                <a:solidFill>
+                  <a:srgbClr val="5F6368"/>
+                </a:solidFill>
+                <a:latin typeface="Calibri"/>
+              </a:rPr>
+              <a:t>Would need the analytical model, which we chose not to build</a:t>
+            </a:r>
+          </a:p>
+        </p:txBody>
+      </p:sp>
+      <p:sp>
+        <p:nvSpPr>
+          <p:cNvPr id="300" name="nb"/>
+          <p:cNvSpPr txBox="1"/>
+          <p:nvPr/>
+        </p:nvSpPr>
+        <p:spPr>
+          <a:xfrm>
+            <a:off x="731520" y="4980000"/>
+            <a:ext cx="68580" cy="1150000"/>
+          </a:xfrm>
+          <a:prstGeom prst="rect">
+            <a:avLst/>
+          </a:prstGeom>
+          <a:solidFill>
+            <a:srgbClr val="C55A11"/>
+          </a:solidFill>
+          <a:ln>
+            <a:noFill/>
+          </a:ln>
+        </p:spPr>
+        <p:txBody>
+          <a:bodyPr wrap="square" lIns="137160" tIns="91440" rIns="137160" bIns="91440" anchor="t">
+            <a:normAutofit/>
+          </a:bodyPr>
+          <a:lstStyle/>
+          <a:p>
+            <a:endParaRPr lang="en-US"/>
+          </a:p>
+        </p:txBody>
+      </p:sp>
+      <p:sp>
+        <p:nvSpPr>
+          <p:cNvPr id="301" name="sh"/>
+          <p:cNvSpPr txBox="1"/>
+          <p:nvPr/>
+        </p:nvSpPr>
+        <p:spPr>
+          <a:xfrm>
+            <a:off x="800100" y="4980000"/>
+            <a:ext cx="10660380" cy="1150000"/>
+          </a:xfrm>
+          <a:prstGeom prst="rect">
+            <a:avLst/>
+          </a:prstGeom>
+          <a:solidFill>
+            <a:srgbClr val="EAEFF6"/>
+          </a:solidFill>
+          <a:ln>
+            <a:noFill/>
+          </a:ln>
+        </p:spPr>
+        <p:txBody>
+          <a:bodyPr wrap="square" lIns="137160" tIns="91440" rIns="137160" bIns="91440" anchor="t">
+            <a:normAutofit/>
+          </a:bodyPr>
+          <a:lstStyle/>
+          <a:p>
+            <a:pPr marL="0" indent="0" algn="l">
+              <a:buNone/>
+            </a:pPr>
+            <a:r>
+              <a:rPr lang="en-US" sz="1000" b="1" i="0" spc="200" dirty="0">
+                <a:solidFill>
+                  <a:srgbClr val="C55A11"/>
+                </a:solidFill>
+                <a:latin typeface="Calibri"/>
+              </a:rPr>
+              <a:t>IN PLAIN WORDS</a:t>
+            </a:r>
+          </a:p>
+          <a:p>
+            <a:pPr marL="0" indent="0" algn="l">
+              <a:spcBef>
+                <a:spcPts val="250"/>
+              </a:spcBef>
+              <a:buNone/>
+            </a:pPr>
+            <a:r>
+              <a:rPr lang="en-US" sz="1400" b="0" i="0" dirty="0">
+                <a:solidFill>
+                  <a:srgbClr val="1A1D21"/>
+                </a:solidFill>
+                <a:latin typeface="Calibri"/>
+              </a:rPr>
+              <a:t>The simulator is built and validated. Being correct and being complete are two different things, and only the first is true today.</a:t>
+            </a:r>
+          </a:p>
+        </p:txBody>
+      </p:sp>
+    </p:spTree>
+  </p:cSld>
+  <p:clrMapOvr>
+    <a:masterClrMapping/>
+  </p:clrMapOvr>
+</p:sld>
+</file>
+
+<file path=ppt/slides/slide25.xml><?xml version="1.0" encoding="utf-8"?>
+<p:sld xmlns:a="http://schemas.openxmlformats.org/drawingml/2006/main" xmlns:r="http://schemas.openxmlformats.org/officeDocument/2006/relationships" xmlns:p="http://schemas.openxmlformats.org/presentationml/2006/main">
+  <p:cSld>
+    <p:spTree>
+      <p:nvGrpSpPr>
+        <p:cNvPr id="1" name=""/>
+        <p:cNvGrpSpPr/>
+        <p:nvPr/>
+      </p:nvGrpSpPr>
+      <p:grpSpPr>
+        <a:xfrm>
+          <a:off x="0" y="0"/>
+          <a:ext cx="0" cy="0"/>
+          <a:chOff x="0" y="0"/>
+          <a:chExt cx="0" cy="0"/>
+        </a:xfrm>
+      </p:grpSpPr>
+      <p:sp>
+        <p:nvSpPr>
+          <p:cNvPr id="302" name="rule"/>
+          <p:cNvSpPr txBox="1"/>
+          <p:nvPr/>
+        </p:nvSpPr>
+        <p:spPr>
+          <a:xfrm>
+            <a:off x="0" y="0"/>
+            <a:ext cx="12192000" cy="68580"/>
+          </a:xfrm>
+          <a:prstGeom prst="rect">
+            <a:avLst/>
+          </a:prstGeom>
+          <a:solidFill>
+            <a:srgbClr val="C55A11"/>
+          </a:solidFill>
+          <a:ln>
+            <a:noFill/>
+          </a:ln>
+        </p:spPr>
+        <p:txBody>
+          <a:bodyPr wrap="square" lIns="137160" tIns="91440" rIns="137160" bIns="91440" anchor="t">
+            <a:normAutofit/>
+          </a:bodyPr>
+          <a:lstStyle/>
+          <a:p>
+            <a:endParaRPr lang="en-US"/>
+          </a:p>
+        </p:txBody>
+      </p:sp>
+      <p:sp>
+        <p:nvSpPr>
+          <p:cNvPr id="303" name="spine"/>
+          <p:cNvSpPr txBox="1"/>
+          <p:nvPr/>
+        </p:nvSpPr>
+        <p:spPr>
+          <a:xfrm>
+            <a:off x="0" y="68580"/>
+            <a:ext cx="137160" cy="6789420"/>
+          </a:xfrm>
+          <a:prstGeom prst="rect">
+            <a:avLst/>
+          </a:prstGeom>
+          <a:solidFill>
+            <a:srgbClr val="1F3864"/>
+          </a:solidFill>
+          <a:ln>
+            <a:noFill/>
+          </a:ln>
+        </p:spPr>
+        <p:txBody>
+          <a:bodyPr wrap="square" lIns="137160" tIns="91440" rIns="137160" bIns="91440" anchor="t">
+            <a:normAutofit/>
+          </a:bodyPr>
+          <a:lstStyle/>
+          <a:p>
+            <a:endParaRPr lang="en-US"/>
+          </a:p>
+        </p:txBody>
+      </p:sp>
+      <p:sp>
+        <p:nvSpPr>
+          <p:cNvPr id="304" name="sh"/>
+          <p:cNvSpPr txBox="1"/>
+          <p:nvPr/>
+        </p:nvSpPr>
+        <p:spPr>
+          <a:xfrm>
+            <a:off x="731520" y="320040"/>
+            <a:ext cx="10728960" cy="300000"/>
+          </a:xfrm>
+          <a:prstGeom prst="rect">
+            <a:avLst/>
+          </a:prstGeom>
+          <a:noFill/>
+          <a:ln>
+            <a:noFill/>
+          </a:ln>
+        </p:spPr>
+        <p:txBody>
+          <a:bodyPr wrap="square" lIns="0" tIns="0" rIns="0" bIns="0" anchor="t">
+            <a:normAutofit/>
+          </a:bodyPr>
+          <a:lstStyle/>
+          <a:p>
+            <a:pPr marL="0" indent="0" algn="l">
+              <a:buNone/>
+            </a:pPr>
+            <a:r>
+              <a:rPr lang="en-US" sz="1100" b="1" i="0" spc="300" dirty="0">
+                <a:solidFill>
+                  <a:srgbClr val="C55A11"/>
+                </a:solidFill>
+                <a:latin typeface="Calibri"/>
+              </a:rPr>
+              <a:t>LIMITS</a:t>
+            </a:r>
+          </a:p>
+        </p:txBody>
+      </p:sp>
+      <p:sp>
+        <p:nvSpPr>
+          <p:cNvPr id="305" name="sh"/>
+          <p:cNvSpPr txBox="1"/>
+          <p:nvPr/>
+        </p:nvSpPr>
+        <p:spPr>
+          <a:xfrm>
+            <a:off x="731520" y="620000"/>
+            <a:ext cx="10728960" cy="780000"/>
+          </a:xfrm>
+          <a:prstGeom prst="rect">
+            <a:avLst/>
+          </a:prstGeom>
+          <a:noFill/>
+          <a:ln>
+            <a:noFill/>
+          </a:ln>
+        </p:spPr>
+        <p:txBody>
+          <a:bodyPr wrap="square" lIns="0" tIns="0" rIns="0" bIns="0" anchor="t">
+            <a:normAutofit/>
+          </a:bodyPr>
+          <a:lstStyle/>
+          <a:p>
+            <a:pPr marL="0" indent="0" algn="l">
+              <a:buNone/>
+            </a:pPr>
+            <a:r>
+              <a:rPr lang="en-US" sz="2600" b="1" i="0" dirty="0">
+                <a:solidFill>
+                  <a:srgbClr val="1F3864"/>
+                </a:solidFill>
+                <a:latin typeface="Calibri"/>
+              </a:rPr>
+              <a:t>Honest limits of the current results</a:t>
+            </a:r>
+          </a:p>
+        </p:txBody>
+      </p:sp>
+      <p:sp>
+        <p:nvSpPr>
+          <p:cNvPr id="306" name="ul"/>
+          <p:cNvSpPr txBox="1"/>
+          <p:nvPr/>
+        </p:nvSpPr>
+        <p:spPr>
+          <a:xfrm>
+            <a:off x="731520" y="1400000"/>
+            <a:ext cx="1600000" cy="40000"/>
+          </a:xfrm>
+          <a:prstGeom prst="rect">
+            <a:avLst/>
+          </a:prstGeom>
+          <a:solidFill>
+            <a:srgbClr val="C55A11"/>
+          </a:solidFill>
+          <a:ln>
+            <a:noFill/>
+          </a:ln>
+        </p:spPr>
+        <p:txBody>
+          <a:bodyPr wrap="square" lIns="137160" tIns="91440" rIns="137160" bIns="91440" anchor="t">
+            <a:normAutofit/>
+          </a:bodyPr>
+          <a:lstStyle/>
+          <a:p>
+            <a:endParaRPr lang="en-US"/>
+          </a:p>
+        </p:txBody>
+      </p:sp>
+      <p:sp>
+        <p:nvSpPr>
+          <p:cNvPr id="307" name="sh"/>
+          <p:cNvSpPr txBox="1"/>
+          <p:nvPr/>
+        </p:nvSpPr>
+        <p:spPr>
+          <a:xfrm>
+            <a:off x="731520" y="6358000"/>
+            <a:ext cx="6437376" cy="300000"/>
+          </a:xfrm>
+          <a:prstGeom prst="rect">
+            <a:avLst/>
+          </a:prstGeom>
+          <a:noFill/>
+          <a:ln>
+            <a:noFill/>
+          </a:ln>
+        </p:spPr>
+        <p:txBody>
+          <a:bodyPr wrap="square" lIns="0" tIns="0" rIns="0" bIns="0" anchor="t">
+            <a:normAutofit/>
+          </a:bodyPr>
+          <a:lstStyle/>
+          <a:p>
+            <a:pPr marL="0" indent="0" algn="l">
+              <a:buNone/>
+            </a:pPr>
+            <a:r>
+              <a:rPr lang="en-US" sz="1000" b="0" i="0" dirty="0">
+                <a:solidFill>
+                  <a:srgbClr val="8FA3BF"/>
+                </a:solidFill>
+                <a:latin typeface="Calibri"/>
+              </a:rPr>
+              <a:t>H3 cycle-accurate memory simulator</a:t>
+            </a:r>
+          </a:p>
+        </p:txBody>
+      </p:sp>
+      <p:sp>
+        <p:nvSpPr>
+          <p:cNvPr id="308" name="sh"/>
+          <p:cNvSpPr txBox="1"/>
+          <p:nvPr/>
+        </p:nvSpPr>
+        <p:spPr>
+          <a:xfrm>
+            <a:off x="10760480" y="6358000"/>
+            <a:ext cx="700000" cy="300000"/>
+          </a:xfrm>
+          <a:prstGeom prst="rect">
+            <a:avLst/>
+          </a:prstGeom>
+          <a:noFill/>
+          <a:ln>
+            <a:noFill/>
+          </a:ln>
+        </p:spPr>
+        <p:txBody>
+          <a:bodyPr wrap="square" lIns="0" tIns="0" rIns="0" bIns="0" anchor="t">
+            <a:normAutofit/>
+          </a:bodyPr>
+          <a:lstStyle/>
+          <a:p>
+            <a:pPr marL="0" indent="0" algn="r">
+              <a:buNone/>
+            </a:pPr>
+            <a:r>
+              <a:rPr lang="en-US" sz="1100" b="1" i="0" dirty="0">
+                <a:solidFill>
+                  <a:srgbClr val="8FA3BF"/>
+                </a:solidFill>
+                <a:latin typeface="Calibri"/>
+              </a:rPr>
+              <a:t>25</a:t>
+            </a:r>
+          </a:p>
+        </p:txBody>
+      </p:sp>
+      <p:sp>
+        <p:nvSpPr>
+          <p:cNvPr id="309" name="sh"/>
           <p:cNvSpPr txBox="1"/>
           <p:nvPr/>
         </p:nvSpPr>
@@ -9524,7 +10816,7 @@
                 </a:solidFill>
                 <a:latin typeface="Calibri"/>
               </a:rPr>
-              <a:t>1. Fix the comparison point before generating any traces</a:t>
+              <a:t>The test workload is a stand-in, not a real LLM trace</a:t>
             </a:r>
           </a:p>
           <a:p>
@@ -9546,7 +10838,29 @@
                 </a:solidFill>
                 <a:latin typeface="Calibri"/>
               </a:rPr>
-              <a:t>The paper compares at equal GPU count, where H3 allows a 2.6x larger batch</a:t>
+              <a:t>It has no computation between memory accesses, which is the worst case</a:t>
+            </a:r>
+          </a:p>
+          <a:p>
+            <a:pPr marL="228600" indent="-228600" algn="l">
+              <a:spcBef>
+                <a:spcPts val="520"/>
+              </a:spcBef>
+              <a:buClr>
+                <a:srgbClr val="C55A11"/>
+              </a:buClr>
+              <a:buSzPct val="90000"/>
+              <a:buFont typeface="Arial"/>
+              <a:buChar char="■"/>
+            </a:pPr>
+            <a:r>
+              <a:rPr lang="en-US" sz="1550" b="0" i="0" dirty="0">
+                <a:solidFill>
+                  <a:srgbClr val="1A1D21"/>
+                </a:solidFill>
+                <a:latin typeface="Calibri"/>
+              </a:rPr>
+              <a:t>The run is too short to reach steady state</a:t>
             </a:r>
           </a:p>
           <a:p>
@@ -9568,7 +10882,7 @@
                 </a:solidFill>
                 <a:latin typeface="Calibri"/>
               </a:rPr>
-              <a:t>This costs nothing and decides which traces are worth generating</a:t>
+              <a:t>64 microseconds of simulated time is about three buffer refills</a:t>
             </a:r>
           </a:p>
           <a:p>
@@ -9590,7 +10904,7 @@
                 </a:solidFill>
                 <a:latin typeface="Calibri"/>
               </a:rPr>
-              <a:t>2. Generate real Llama traces on a machine with A100 or H100 GPUs</a:t>
+              <a:t>The HBM-only comparison currently assumes a GPU with 3 TB of HBM</a:t>
             </a:r>
           </a:p>
           <a:p>
@@ -9612,7 +10926,7 @@
                 </a:solidFill>
                 <a:latin typeface="Calibri"/>
               </a:rPr>
-              <a:t>Requirements written up in docs/large_machine_requirements.md</a:t>
+              <a:t>No such GPU exists; the paper compares at equal GPU count instead</a:t>
             </a:r>
           </a:p>
           <a:p>
@@ -9634,13 +10948,451 @@
                 </a:solidFill>
                 <a:latin typeface="Calibri"/>
               </a:rPr>
-              <a:t>3. Complete the power model if the throughput-per-watt claim is needed</a:t>
-            </a:r>
-          </a:p>
+              <a:t>These limits are written into the project README, not hidden</a:t>
+            </a:r>
+          </a:p>
+        </p:txBody>
+      </p:sp>
+      <p:sp>
+        <p:nvSpPr>
+          <p:cNvPr id="310" name="nb"/>
+          <p:cNvSpPr txBox="1"/>
+          <p:nvPr/>
+        </p:nvSpPr>
+        <p:spPr>
+          <a:xfrm>
+            <a:off x="731520" y="4980000"/>
+            <a:ext cx="68580" cy="1150000"/>
+          </a:xfrm>
+          <a:prstGeom prst="rect">
+            <a:avLst/>
+          </a:prstGeom>
+          <a:solidFill>
+            <a:srgbClr val="C55A11"/>
+          </a:solidFill>
+          <a:ln>
+            <a:noFill/>
+          </a:ln>
+        </p:spPr>
+        <p:txBody>
+          <a:bodyPr wrap="square" lIns="137160" tIns="91440" rIns="137160" bIns="91440" anchor="t">
+            <a:normAutofit/>
+          </a:bodyPr>
+          <a:lstStyle/>
+          <a:p>
+            <a:endParaRPr lang="en-US"/>
+          </a:p>
+        </p:txBody>
+      </p:sp>
+      <p:sp>
+        <p:nvSpPr>
+          <p:cNvPr id="311" name="sh"/>
+          <p:cNvSpPr txBox="1"/>
+          <p:nvPr/>
+        </p:nvSpPr>
+        <p:spPr>
+          <a:xfrm>
+            <a:off x="800100" y="4980000"/>
+            <a:ext cx="10660380" cy="1150000"/>
+          </a:xfrm>
+          <a:prstGeom prst="rect">
+            <a:avLst/>
+          </a:prstGeom>
+          <a:solidFill>
+            <a:srgbClr val="EAEFF6"/>
+          </a:solidFill>
+          <a:ln>
+            <a:noFill/>
+          </a:ln>
+        </p:spPr>
+        <p:txBody>
+          <a:bodyPr wrap="square" lIns="137160" tIns="91440" rIns="137160" bIns="91440" anchor="t">
+            <a:normAutofit/>
+          </a:bodyPr>
+          <a:lstStyle/>
+          <a:p>
+            <a:pPr marL="0" indent="0" algn="l">
+              <a:buNone/>
+            </a:pPr>
+            <a:r>
+              <a:rPr lang="en-US" sz="1000" b="1" i="0" spc="200" dirty="0">
+                <a:solidFill>
+                  <a:srgbClr val="C55A11"/>
+                </a:solidFill>
+                <a:latin typeface="Calibri"/>
+              </a:rPr>
+              <a:t>IN PLAIN WORDS</a:t>
+            </a:r>
+          </a:p>
+          <a:p>
+            <a:pPr marL="0" indent="0" algn="l">
+              <a:spcBef>
+                <a:spcPts val="250"/>
+              </a:spcBef>
+              <a:buNone/>
+            </a:pPr>
+            <a:r>
+              <a:rPr lang="en-US" sz="1400" b="0" i="0" dirty="0">
+                <a:solidFill>
+                  <a:srgbClr val="1A1D21"/>
+                </a:solidFill>
+                <a:latin typeface="Calibri"/>
+              </a:rPr>
+              <a:t>We would rather state clearly what the setup cannot yet support than quote a number it cannot justify. Each limit has a known fix, listed in the next steps.</a:t>
+            </a:r>
+          </a:p>
+        </p:txBody>
+      </p:sp>
+    </p:spTree>
+  </p:cSld>
+  <p:clrMapOvr>
+    <a:masterClrMapping/>
+  </p:clrMapOvr>
+</p:sld>
+</file>
+
+<file path=ppt/slides/slide26.xml><?xml version="1.0" encoding="utf-8"?>
+<p:sld xmlns:a="http://schemas.openxmlformats.org/drawingml/2006/main" xmlns:r="http://schemas.openxmlformats.org/officeDocument/2006/relationships" xmlns:p="http://schemas.openxmlformats.org/presentationml/2006/main">
+  <p:cSld>
+    <p:spTree>
+      <p:nvGrpSpPr>
+        <p:cNvPr id="1" name=""/>
+        <p:cNvGrpSpPr/>
+        <p:nvPr/>
+      </p:nvGrpSpPr>
+      <p:grpSpPr>
+        <a:xfrm>
+          <a:off x="0" y="0"/>
+          <a:ext cx="0" cy="0"/>
+          <a:chOff x="0" y="0"/>
+          <a:chExt cx="0" cy="0"/>
+        </a:xfrm>
+      </p:grpSpPr>
+      <p:sp>
+        <p:nvSpPr>
+          <p:cNvPr id="312" name="rule"/>
+          <p:cNvSpPr txBox="1"/>
+          <p:nvPr/>
+        </p:nvSpPr>
+        <p:spPr>
+          <a:xfrm>
+            <a:off x="0" y="0"/>
+            <a:ext cx="12192000" cy="68580"/>
+          </a:xfrm>
+          <a:prstGeom prst="rect">
+            <a:avLst/>
+          </a:prstGeom>
+          <a:solidFill>
+            <a:srgbClr val="C55A11"/>
+          </a:solidFill>
+          <a:ln>
+            <a:noFill/>
+          </a:ln>
+        </p:spPr>
+        <p:txBody>
+          <a:bodyPr wrap="square" lIns="137160" tIns="91440" rIns="137160" bIns="91440" anchor="t">
+            <a:normAutofit/>
+          </a:bodyPr>
+          <a:lstStyle/>
+          <a:p>
+            <a:endParaRPr lang="en-US"/>
+          </a:p>
+        </p:txBody>
+      </p:sp>
+      <p:sp>
+        <p:nvSpPr>
+          <p:cNvPr id="313" name="spine"/>
+          <p:cNvSpPr txBox="1"/>
+          <p:nvPr/>
+        </p:nvSpPr>
+        <p:spPr>
+          <a:xfrm>
+            <a:off x="0" y="68580"/>
+            <a:ext cx="137160" cy="6789420"/>
+          </a:xfrm>
+          <a:prstGeom prst="rect">
+            <a:avLst/>
+          </a:prstGeom>
+          <a:solidFill>
+            <a:srgbClr val="1F3864"/>
+          </a:solidFill>
+          <a:ln>
+            <a:noFill/>
+          </a:ln>
+        </p:spPr>
+        <p:txBody>
+          <a:bodyPr wrap="square" lIns="137160" tIns="91440" rIns="137160" bIns="91440" anchor="t">
+            <a:normAutofit/>
+          </a:bodyPr>
+          <a:lstStyle/>
+          <a:p>
+            <a:endParaRPr lang="en-US"/>
+          </a:p>
+        </p:txBody>
+      </p:sp>
+      <p:sp>
+        <p:nvSpPr>
+          <p:cNvPr id="314" name="sh"/>
+          <p:cNvSpPr txBox="1"/>
+          <p:nvPr/>
+        </p:nvSpPr>
+        <p:spPr>
+          <a:xfrm>
+            <a:off x="731520" y="320040"/>
+            <a:ext cx="10728960" cy="300000"/>
+          </a:xfrm>
+          <a:prstGeom prst="rect">
+            <a:avLst/>
+          </a:prstGeom>
+          <a:noFill/>
+          <a:ln>
+            <a:noFill/>
+          </a:ln>
+        </p:spPr>
+        <p:txBody>
+          <a:bodyPr wrap="square" lIns="0" tIns="0" rIns="0" bIns="0" anchor="t">
+            <a:normAutofit/>
+          </a:bodyPr>
+          <a:lstStyle/>
+          <a:p>
+            <a:pPr marL="0" indent="0" algn="l">
+              <a:buNone/>
+            </a:pPr>
+            <a:r>
+              <a:rPr lang="en-US" sz="1100" b="1" i="0" spc="300" dirty="0">
+                <a:solidFill>
+                  <a:srgbClr val="C55A11"/>
+                </a:solidFill>
+                <a:latin typeface="Calibri"/>
+              </a:rPr>
+              <a:t>VALUE</a:t>
+            </a:r>
+          </a:p>
+        </p:txBody>
+      </p:sp>
+      <p:sp>
+        <p:nvSpPr>
+          <p:cNvPr id="315" name="sh"/>
+          <p:cNvSpPr txBox="1"/>
+          <p:nvPr/>
+        </p:nvSpPr>
+        <p:spPr>
+          <a:xfrm>
+            <a:off x="731520" y="620000"/>
+            <a:ext cx="10728960" cy="780000"/>
+          </a:xfrm>
+          <a:prstGeom prst="rect">
+            <a:avLst/>
+          </a:prstGeom>
+          <a:noFill/>
+          <a:ln>
+            <a:noFill/>
+          </a:ln>
+        </p:spPr>
+        <p:txBody>
+          <a:bodyPr wrap="square" lIns="0" tIns="0" rIns="0" bIns="0" anchor="t">
+            <a:normAutofit/>
+          </a:bodyPr>
+          <a:lstStyle/>
+          <a:p>
+            <a:pPr marL="0" indent="0" algn="l">
+              <a:buNone/>
+            </a:pPr>
+            <a:r>
+              <a:rPr lang="en-US" sz="2600" b="1" i="0" dirty="0">
+                <a:solidFill>
+                  <a:srgbClr val="1F3864"/>
+                </a:solidFill>
+                <a:latin typeface="Calibri"/>
+              </a:rPr>
+              <a:t>What this simulator adds</a:t>
+            </a:r>
+          </a:p>
+        </p:txBody>
+      </p:sp>
+      <p:sp>
+        <p:nvSpPr>
+          <p:cNvPr id="316" name="ul"/>
+          <p:cNvSpPr txBox="1"/>
+          <p:nvPr/>
+        </p:nvSpPr>
+        <p:spPr>
+          <a:xfrm>
+            <a:off x="731520" y="1400000"/>
+            <a:ext cx="1600000" cy="40000"/>
+          </a:xfrm>
+          <a:prstGeom prst="rect">
+            <a:avLst/>
+          </a:prstGeom>
+          <a:solidFill>
+            <a:srgbClr val="C55A11"/>
+          </a:solidFill>
+          <a:ln>
+            <a:noFill/>
+          </a:ln>
+        </p:spPr>
+        <p:txBody>
+          <a:bodyPr wrap="square" lIns="137160" tIns="91440" rIns="137160" bIns="91440" anchor="t">
+            <a:normAutofit/>
+          </a:bodyPr>
+          <a:lstStyle/>
+          <a:p>
+            <a:endParaRPr lang="en-US"/>
+          </a:p>
+        </p:txBody>
+      </p:sp>
+      <p:sp>
+        <p:nvSpPr>
+          <p:cNvPr id="317" name="sh"/>
+          <p:cNvSpPr txBox="1"/>
+          <p:nvPr/>
+        </p:nvSpPr>
+        <p:spPr>
+          <a:xfrm>
+            <a:off x="731520" y="6358000"/>
+            <a:ext cx="6437376" cy="300000"/>
+          </a:xfrm>
+          <a:prstGeom prst="rect">
+            <a:avLst/>
+          </a:prstGeom>
+          <a:noFill/>
+          <a:ln>
+            <a:noFill/>
+          </a:ln>
+        </p:spPr>
+        <p:txBody>
+          <a:bodyPr wrap="square" lIns="0" tIns="0" rIns="0" bIns="0" anchor="t">
+            <a:normAutofit/>
+          </a:bodyPr>
+          <a:lstStyle/>
+          <a:p>
+            <a:pPr marL="0" indent="0" algn="l">
+              <a:buNone/>
+            </a:pPr>
+            <a:r>
+              <a:rPr lang="en-US" sz="1000" b="0" i="0" dirty="0">
+                <a:solidFill>
+                  <a:srgbClr val="8FA3BF"/>
+                </a:solidFill>
+                <a:latin typeface="Calibri"/>
+              </a:rPr>
+              <a:t>H3 cycle-accurate memory simulator</a:t>
+            </a:r>
+          </a:p>
+        </p:txBody>
+      </p:sp>
+      <p:sp>
+        <p:nvSpPr>
+          <p:cNvPr id="318" name="sh"/>
+          <p:cNvSpPr txBox="1"/>
+          <p:nvPr/>
+        </p:nvSpPr>
+        <p:spPr>
+          <a:xfrm>
+            <a:off x="10760480" y="6358000"/>
+            <a:ext cx="700000" cy="300000"/>
+          </a:xfrm>
+          <a:prstGeom prst="rect">
+            <a:avLst/>
+          </a:prstGeom>
+          <a:noFill/>
+          <a:ln>
+            <a:noFill/>
+          </a:ln>
+        </p:spPr>
+        <p:txBody>
+          <a:bodyPr wrap="square" lIns="0" tIns="0" rIns="0" bIns="0" anchor="t">
+            <a:normAutofit/>
+          </a:bodyPr>
+          <a:lstStyle/>
+          <a:p>
+            <a:pPr marL="0" indent="0" algn="r">
+              <a:buNone/>
+            </a:pPr>
+            <a:r>
+              <a:rPr lang="en-US" sz="1100" b="1" i="0" dirty="0">
+                <a:solidFill>
+                  <a:srgbClr val="8FA3BF"/>
+                </a:solidFill>
+                <a:latin typeface="Calibri"/>
+              </a:rPr>
+              <a:t>26</a:t>
+            </a:r>
+          </a:p>
+        </p:txBody>
+      </p:sp>
+      <p:sp>
+        <p:nvSpPr>
+          <p:cNvPr id="319" name="sh"/>
+          <p:cNvSpPr txBox="1"/>
+          <p:nvPr/>
+        </p:nvSpPr>
+        <p:spPr>
+          <a:xfrm>
+            <a:off x="731520" y="1560000"/>
+            <a:ext cx="5214480" cy="340000"/>
+          </a:xfrm>
+          <a:prstGeom prst="rect">
+            <a:avLst/>
+          </a:prstGeom>
+          <a:solidFill>
+            <a:srgbClr val="1F3864"/>
+          </a:solidFill>
+          <a:ln>
+            <a:noFill/>
+          </a:ln>
+        </p:spPr>
+        <p:txBody>
+          <a:bodyPr wrap="square" lIns="114300" tIns="60960" rIns="114300" bIns="60960" anchor="t">
+            <a:normAutofit/>
+          </a:bodyPr>
+          <a:lstStyle/>
+          <a:p>
+            <a:pPr marL="0" indent="0" algn="l">
+              <a:buNone/>
+            </a:pPr>
+            <a:r>
+              <a:rPr lang="en-US" sz="1150" b="1" i="0" spc="200" dirty="0">
+                <a:solidFill>
+                  <a:srgbClr val="FFFFFF"/>
+                </a:solidFill>
+                <a:latin typeface="Calibri"/>
+              </a:rPr>
+              <a:t>THE PAPER ESTABLISHES</a:t>
+            </a:r>
+          </a:p>
+        </p:txBody>
+      </p:sp>
+      <p:sp>
+        <p:nvSpPr>
+          <p:cNvPr id="320" name="sh"/>
+          <p:cNvSpPr txBox="1"/>
+          <p:nvPr/>
+        </p:nvSpPr>
+        <p:spPr>
+          <a:xfrm>
+            <a:off x="731520" y="1980000"/>
+            <a:ext cx="5214480" cy="2800000"/>
+          </a:xfrm>
+          <a:prstGeom prst="rect">
+            <a:avLst/>
+          </a:prstGeom>
+          <a:solidFill>
+            <a:srgbClr val="F5F7FA"/>
+          </a:solidFill>
+          <a:ln>
+            <a:noFill/>
+          </a:ln>
+        </p:spPr>
+        <p:txBody>
+          <a:bodyPr wrap="square" lIns="137160" tIns="91440" rIns="137160" bIns="91440" anchor="t">
+            <a:normAutofit/>
+          </a:bodyPr>
+          <a:lstStyle/>
           <a:p>
             <a:pPr marL="228600" indent="-228600" algn="l">
               <a:spcBef>
-                <a:spcPts val="520"/>
+                <a:spcPts val="440"/>
               </a:spcBef>
               <a:buClr>
                 <a:srgbClr val="C55A11"/>
@@ -9650,20 +11402,244 @@
               <a:buChar char="■"/>
             </a:pPr>
             <a:r>
-              <a:rPr lang="en-US" sz="1550" b="0" i="0" dirty="0">
+              <a:rPr lang="en-US" sz="1450" b="0" i="0" dirty="0">
                 <a:solidFill>
                   <a:srgbClr val="1A1D21"/>
                 </a:solidFill>
                 <a:latin typeface="Calibri"/>
               </a:rPr>
-              <a:t>4. Run the sensitivity sweeps the analytical model cannot reach</a:t>
-            </a:r>
-          </a:p>
-        </p:txBody>
-      </p:sp>
-      <p:sp>
-        <p:nvSpPr>
-          <p:cNvPr id="284" name="nb"/>
+              <a:t>That H3 is worth building</a:t>
+            </a:r>
+          </a:p>
+          <a:p>
+            <a:pPr marL="228600" indent="-228600" algn="l">
+              <a:spcBef>
+                <a:spcPts val="440"/>
+              </a:spcBef>
+              <a:buClr>
+                <a:srgbClr val="C55A11"/>
+              </a:buClr>
+              <a:buSzPct val="90000"/>
+              <a:buFont typeface="Arial"/>
+              <a:buChar char="■"/>
+            </a:pPr>
+            <a:r>
+              <a:rPr lang="en-US" sz="1450" b="0" i="0" dirty="0">
+                <a:solidFill>
+                  <a:srgbClr val="1A1D21"/>
+                </a:solidFill>
+                <a:latin typeface="Calibri"/>
+              </a:rPr>
+              <a:t>Sizes the buffer with an equation</a:t>
+            </a:r>
+          </a:p>
+          <a:p>
+            <a:pPr marL="457200" indent="-228600" algn="l">
+              <a:spcBef>
+                <a:spcPts val="320"/>
+              </a:spcBef>
+              <a:buClr>
+                <a:srgbClr val="8FA3BF"/>
+              </a:buClr>
+              <a:buSzPct val="90000"/>
+              <a:buFont typeface="Arial"/>
+              <a:buChar char="–"/>
+            </a:pPr>
+            <a:r>
+              <a:rPr lang="en-US" sz="1300" b="0" i="0" dirty="0">
+                <a:solidFill>
+                  <a:srgbClr val="5F6368"/>
+                </a:solidFill>
+                <a:latin typeface="Calibri"/>
+              </a:rPr>
+              <a:t>And assumes it works from there</a:t>
+            </a:r>
+          </a:p>
+        </p:txBody>
+      </p:sp>
+      <p:sp>
+        <p:nvSpPr>
+          <p:cNvPr id="321" name="sh"/>
+          <p:cNvSpPr txBox="1"/>
+          <p:nvPr/>
+        </p:nvSpPr>
+        <p:spPr>
+          <a:xfrm>
+            <a:off x="6246000" y="1560000"/>
+            <a:ext cx="5214480" cy="340000"/>
+          </a:xfrm>
+          <a:prstGeom prst="rect">
+            <a:avLst/>
+          </a:prstGeom>
+          <a:solidFill>
+            <a:srgbClr val="C55A11"/>
+          </a:solidFill>
+          <a:ln>
+            <a:noFill/>
+          </a:ln>
+        </p:spPr>
+        <p:txBody>
+          <a:bodyPr wrap="square" lIns="114300" tIns="60960" rIns="114300" bIns="60960" anchor="t">
+            <a:normAutofit/>
+          </a:bodyPr>
+          <a:lstStyle/>
+          <a:p>
+            <a:pPr marL="0" indent="0" algn="l">
+              <a:buNone/>
+            </a:pPr>
+            <a:r>
+              <a:rPr lang="en-US" sz="1150" b="1" i="0" spc="200" dirty="0">
+                <a:solidFill>
+                  <a:srgbClr val="FFFFFF"/>
+                </a:solidFill>
+                <a:latin typeface="Calibri"/>
+              </a:rPr>
+              <a:t>OURS CAN EXAMINE</a:t>
+            </a:r>
+          </a:p>
+        </p:txBody>
+      </p:sp>
+      <p:sp>
+        <p:nvSpPr>
+          <p:cNvPr id="322" name="sh"/>
+          <p:cNvSpPr txBox="1"/>
+          <p:nvPr/>
+        </p:nvSpPr>
+        <p:spPr>
+          <a:xfrm>
+            <a:off x="6246000" y="1980000"/>
+            <a:ext cx="5214480" cy="2800000"/>
+          </a:xfrm>
+          <a:prstGeom prst="rect">
+            <a:avLst/>
+          </a:prstGeom>
+          <a:solidFill>
+            <a:srgbClr val="F5F7FA"/>
+          </a:solidFill>
+          <a:ln>
+            <a:noFill/>
+          </a:ln>
+        </p:spPr>
+        <p:txBody>
+          <a:bodyPr wrap="square" lIns="137160" tIns="91440" rIns="137160" bIns="91440" anchor="t">
+            <a:normAutofit/>
+          </a:bodyPr>
+          <a:lstStyle/>
+          <a:p>
+            <a:pPr marL="228600" indent="-228600" algn="l">
+              <a:spcBef>
+                <a:spcPts val="440"/>
+              </a:spcBef>
+              <a:buClr>
+                <a:srgbClr val="C55A11"/>
+              </a:buClr>
+              <a:buSzPct val="90000"/>
+              <a:buFont typeface="Arial"/>
+              <a:buChar char="■"/>
+            </a:pPr>
+            <a:r>
+              <a:rPr lang="en-US" sz="1450" b="0" i="0" dirty="0">
+                <a:solidFill>
+                  <a:srgbClr val="1A1D21"/>
+                </a:solidFill>
+                <a:latin typeface="Calibri"/>
+              </a:rPr>
+              <a:t>Whether the buffer really hides the delay</a:t>
+            </a:r>
+          </a:p>
+          <a:p>
+            <a:pPr marL="457200" indent="-228600" algn="l">
+              <a:spcBef>
+                <a:spcPts val="320"/>
+              </a:spcBef>
+              <a:buClr>
+                <a:srgbClr val="8FA3BF"/>
+              </a:buClr>
+              <a:buSzPct val="90000"/>
+              <a:buFont typeface="Arial"/>
+              <a:buChar char="–"/>
+            </a:pPr>
+            <a:r>
+              <a:rPr lang="en-US" sz="1300" b="0" i="0" dirty="0">
+                <a:solidFill>
+                  <a:srgbClr val="5F6368"/>
+                </a:solidFill>
+                <a:latin typeface="Calibri"/>
+              </a:rPr>
+              <a:t>Hit rate, stall length, late prefetches</a:t>
+            </a:r>
+          </a:p>
+          <a:p>
+            <a:pPr marL="228600" indent="-228600" algn="l">
+              <a:spcBef>
+                <a:spcPts val="440"/>
+              </a:spcBef>
+              <a:buClr>
+                <a:srgbClr val="C55A11"/>
+              </a:buClr>
+              <a:buSzPct val="90000"/>
+              <a:buFont typeface="Arial"/>
+              <a:buChar char="■"/>
+            </a:pPr>
+            <a:r>
+              <a:rPr lang="en-US" sz="1450" b="0" i="0" dirty="0">
+                <a:solidFill>
+                  <a:srgbClr val="1A1D21"/>
+                </a:solidFill>
+                <a:latin typeface="Calibri"/>
+              </a:rPr>
+              <a:t>How sensitive the design is to flash latency</a:t>
+            </a:r>
+          </a:p>
+          <a:p>
+            <a:pPr marL="228600" indent="-228600" algn="l">
+              <a:spcBef>
+                <a:spcPts val="440"/>
+              </a:spcBef>
+              <a:buClr>
+                <a:srgbClr val="C55A11"/>
+              </a:buClr>
+              <a:buSzPct val="90000"/>
+              <a:buFont typeface="Arial"/>
+              <a:buChar char="■"/>
+            </a:pPr>
+            <a:r>
+              <a:rPr lang="en-US" sz="1450" b="0" i="0" dirty="0">
+                <a:solidFill>
+                  <a:srgbClr val="1A1D21"/>
+                </a:solidFill>
+                <a:latin typeface="Calibri"/>
+              </a:rPr>
+              <a:t>Where the cliff is with too few flash planes</a:t>
+            </a:r>
+          </a:p>
+          <a:p>
+            <a:pPr marL="228600" indent="-228600" algn="l">
+              <a:spcBef>
+                <a:spcPts val="440"/>
+              </a:spcBef>
+              <a:buClr>
+                <a:srgbClr val="C55A11"/>
+              </a:buClr>
+              <a:buSzPct val="90000"/>
+              <a:buFont typeface="Arial"/>
+              <a:buChar char="■"/>
+            </a:pPr>
+            <a:r>
+              <a:rPr lang="en-US" sz="1450" b="0" i="0" dirty="0">
+                <a:solidFill>
+                  <a:srgbClr val="1A1D21"/>
+                </a:solidFill>
+                <a:latin typeface="Calibri"/>
+              </a:rPr>
+              <a:t>Whether prefetch and demand reads fight for banks</a:t>
+            </a:r>
+          </a:p>
+        </p:txBody>
+      </p:sp>
+      <p:sp>
+        <p:nvSpPr>
+          <p:cNvPr id="323" name="nb"/>
           <p:cNvSpPr txBox="1"/>
           <p:nvPr/>
         </p:nvSpPr>
@@ -9694,7 +11670,7 @@
       </p:sp>
       <p:sp>
         <p:nvSpPr>
-          <p:cNvPr id="285" name="sh"/>
+          <p:cNvPr id="324" name="sh"/>
           <p:cNvSpPr txBox="1"/>
           <p:nvPr/>
         </p:nvSpPr>
@@ -9746,7 +11722,555 @@
                 </a:solidFill>
                 <a:latin typeface="Calibri"/>
               </a:rPr>
-              <a:t>Step 1 should come first because it is free and it determines everything after it. Generating traces costs days and terabytes, so it is worth being certain about the experiment before starting.</a:t>
+              <a:t>This is where the contribution lies. The paper argues H3 should work. This simulator can test whether the mechanism that makes it work behaves as expected under realistic conditions.</a:t>
+            </a:r>
+          </a:p>
+        </p:txBody>
+      </p:sp>
+    </p:spTree>
+  </p:cSld>
+  <p:clrMapOvr>
+    <a:masterClrMapping/>
+  </p:clrMapOvr>
+</p:sld>
+</file>
+
+<file path=ppt/slides/slide27.xml><?xml version="1.0" encoding="utf-8"?>
+<p:sld xmlns:a="http://schemas.openxmlformats.org/drawingml/2006/main" xmlns:r="http://schemas.openxmlformats.org/officeDocument/2006/relationships" xmlns:p="http://schemas.openxmlformats.org/presentationml/2006/main">
+  <p:cSld>
+    <p:spTree>
+      <p:nvGrpSpPr>
+        <p:cNvPr id="1" name=""/>
+        <p:cNvGrpSpPr/>
+        <p:nvPr/>
+      </p:nvGrpSpPr>
+      <p:grpSpPr>
+        <a:xfrm>
+          <a:off x="0" y="0"/>
+          <a:ext cx="0" cy="0"/>
+          <a:chOff x="0" y="0"/>
+          <a:chExt cx="0" cy="0"/>
+        </a:xfrm>
+      </p:grpSpPr>
+      <p:sp>
+        <p:nvSpPr>
+          <p:cNvPr id="325" name="rule"/>
+          <p:cNvSpPr txBox="1"/>
+          <p:nvPr/>
+        </p:nvSpPr>
+        <p:spPr>
+          <a:xfrm>
+            <a:off x="0" y="0"/>
+            <a:ext cx="12192000" cy="68580"/>
+          </a:xfrm>
+          <a:prstGeom prst="rect">
+            <a:avLst/>
+          </a:prstGeom>
+          <a:solidFill>
+            <a:srgbClr val="C55A11"/>
+          </a:solidFill>
+          <a:ln>
+            <a:noFill/>
+          </a:ln>
+        </p:spPr>
+        <p:txBody>
+          <a:bodyPr wrap="square" lIns="137160" tIns="91440" rIns="137160" bIns="91440" anchor="t">
+            <a:normAutofit/>
+          </a:bodyPr>
+          <a:lstStyle/>
+          <a:p>
+            <a:endParaRPr lang="en-US"/>
+          </a:p>
+        </p:txBody>
+      </p:sp>
+      <p:sp>
+        <p:nvSpPr>
+          <p:cNvPr id="326" name="spine"/>
+          <p:cNvSpPr txBox="1"/>
+          <p:nvPr/>
+        </p:nvSpPr>
+        <p:spPr>
+          <a:xfrm>
+            <a:off x="0" y="68580"/>
+            <a:ext cx="137160" cy="6789420"/>
+          </a:xfrm>
+          <a:prstGeom prst="rect">
+            <a:avLst/>
+          </a:prstGeom>
+          <a:solidFill>
+            <a:srgbClr val="1F3864"/>
+          </a:solidFill>
+          <a:ln>
+            <a:noFill/>
+          </a:ln>
+        </p:spPr>
+        <p:txBody>
+          <a:bodyPr wrap="square" lIns="137160" tIns="91440" rIns="137160" bIns="91440" anchor="t">
+            <a:normAutofit/>
+          </a:bodyPr>
+          <a:lstStyle/>
+          <a:p>
+            <a:endParaRPr lang="en-US"/>
+          </a:p>
+        </p:txBody>
+      </p:sp>
+      <p:sp>
+        <p:nvSpPr>
+          <p:cNvPr id="327" name="sh"/>
+          <p:cNvSpPr txBox="1"/>
+          <p:nvPr/>
+        </p:nvSpPr>
+        <p:spPr>
+          <a:xfrm>
+            <a:off x="731520" y="320040"/>
+            <a:ext cx="10728960" cy="300000"/>
+          </a:xfrm>
+          <a:prstGeom prst="rect">
+            <a:avLst/>
+          </a:prstGeom>
+          <a:noFill/>
+          <a:ln>
+            <a:noFill/>
+          </a:ln>
+        </p:spPr>
+        <p:txBody>
+          <a:bodyPr wrap="square" lIns="0" tIns="0" rIns="0" bIns="0" anchor="t">
+            <a:normAutofit/>
+          </a:bodyPr>
+          <a:lstStyle/>
+          <a:p>
+            <a:pPr marL="0" indent="0" algn="l">
+              <a:buNone/>
+            </a:pPr>
+            <a:r>
+              <a:rPr lang="en-US" sz="1100" b="1" i="0" spc="300" dirty="0">
+                <a:solidFill>
+                  <a:srgbClr val="C55A11"/>
+                </a:solidFill>
+                <a:latin typeface="Calibri"/>
+              </a:rPr>
+              <a:t>NEXT</a:t>
+            </a:r>
+          </a:p>
+        </p:txBody>
+      </p:sp>
+      <p:sp>
+        <p:nvSpPr>
+          <p:cNvPr id="328" name="sh"/>
+          <p:cNvSpPr txBox="1"/>
+          <p:nvPr/>
+        </p:nvSpPr>
+        <p:spPr>
+          <a:xfrm>
+            <a:off x="731520" y="620000"/>
+            <a:ext cx="10728960" cy="780000"/>
+          </a:xfrm>
+          <a:prstGeom prst="rect">
+            <a:avLst/>
+          </a:prstGeom>
+          <a:noFill/>
+          <a:ln>
+            <a:noFill/>
+          </a:ln>
+        </p:spPr>
+        <p:txBody>
+          <a:bodyPr wrap="square" lIns="0" tIns="0" rIns="0" bIns="0" anchor="t">
+            <a:normAutofit/>
+          </a:bodyPr>
+          <a:lstStyle/>
+          <a:p>
+            <a:pPr marL="0" indent="0" algn="l">
+              <a:buNone/>
+            </a:pPr>
+            <a:r>
+              <a:rPr lang="en-US" sz="2600" b="1" i="0" dirty="0">
+                <a:solidFill>
+                  <a:srgbClr val="1F3864"/>
+                </a:solidFill>
+                <a:latin typeface="Calibri"/>
+              </a:rPr>
+              <a:t>Suggested next steps</a:t>
+            </a:r>
+          </a:p>
+        </p:txBody>
+      </p:sp>
+      <p:sp>
+        <p:nvSpPr>
+          <p:cNvPr id="329" name="ul"/>
+          <p:cNvSpPr txBox="1"/>
+          <p:nvPr/>
+        </p:nvSpPr>
+        <p:spPr>
+          <a:xfrm>
+            <a:off x="731520" y="1400000"/>
+            <a:ext cx="1600000" cy="40000"/>
+          </a:xfrm>
+          <a:prstGeom prst="rect">
+            <a:avLst/>
+          </a:prstGeom>
+          <a:solidFill>
+            <a:srgbClr val="C55A11"/>
+          </a:solidFill>
+          <a:ln>
+            <a:noFill/>
+          </a:ln>
+        </p:spPr>
+        <p:txBody>
+          <a:bodyPr wrap="square" lIns="137160" tIns="91440" rIns="137160" bIns="91440" anchor="t">
+            <a:normAutofit/>
+          </a:bodyPr>
+          <a:lstStyle/>
+          <a:p>
+            <a:endParaRPr lang="en-US"/>
+          </a:p>
+        </p:txBody>
+      </p:sp>
+      <p:sp>
+        <p:nvSpPr>
+          <p:cNvPr id="330" name="sh"/>
+          <p:cNvSpPr txBox="1"/>
+          <p:nvPr/>
+        </p:nvSpPr>
+        <p:spPr>
+          <a:xfrm>
+            <a:off x="731520" y="6358000"/>
+            <a:ext cx="6437376" cy="300000"/>
+          </a:xfrm>
+          <a:prstGeom prst="rect">
+            <a:avLst/>
+          </a:prstGeom>
+          <a:noFill/>
+          <a:ln>
+            <a:noFill/>
+          </a:ln>
+        </p:spPr>
+        <p:txBody>
+          <a:bodyPr wrap="square" lIns="0" tIns="0" rIns="0" bIns="0" anchor="t">
+            <a:normAutofit/>
+          </a:bodyPr>
+          <a:lstStyle/>
+          <a:p>
+            <a:pPr marL="0" indent="0" algn="l">
+              <a:buNone/>
+            </a:pPr>
+            <a:r>
+              <a:rPr lang="en-US" sz="1000" b="0" i="0" dirty="0">
+                <a:solidFill>
+                  <a:srgbClr val="8FA3BF"/>
+                </a:solidFill>
+                <a:latin typeface="Calibri"/>
+              </a:rPr>
+              <a:t>H3 cycle-accurate memory simulator</a:t>
+            </a:r>
+          </a:p>
+        </p:txBody>
+      </p:sp>
+      <p:sp>
+        <p:nvSpPr>
+          <p:cNvPr id="331" name="sh"/>
+          <p:cNvSpPr txBox="1"/>
+          <p:nvPr/>
+        </p:nvSpPr>
+        <p:spPr>
+          <a:xfrm>
+            <a:off x="10760480" y="6358000"/>
+            <a:ext cx="700000" cy="300000"/>
+          </a:xfrm>
+          <a:prstGeom prst="rect">
+            <a:avLst/>
+          </a:prstGeom>
+          <a:noFill/>
+          <a:ln>
+            <a:noFill/>
+          </a:ln>
+        </p:spPr>
+        <p:txBody>
+          <a:bodyPr wrap="square" lIns="0" tIns="0" rIns="0" bIns="0" anchor="t">
+            <a:normAutofit/>
+          </a:bodyPr>
+          <a:lstStyle/>
+          <a:p>
+            <a:pPr marL="0" indent="0" algn="r">
+              <a:buNone/>
+            </a:pPr>
+            <a:r>
+              <a:rPr lang="en-US" sz="1100" b="1" i="0" dirty="0">
+                <a:solidFill>
+                  <a:srgbClr val="8FA3BF"/>
+                </a:solidFill>
+                <a:latin typeface="Calibri"/>
+              </a:rPr>
+              <a:t>27</a:t>
+            </a:r>
+          </a:p>
+        </p:txBody>
+      </p:sp>
+      <p:sp>
+        <p:nvSpPr>
+          <p:cNvPr id="332" name="sh"/>
+          <p:cNvSpPr txBox="1"/>
+          <p:nvPr/>
+        </p:nvSpPr>
+        <p:spPr>
+          <a:xfrm>
+            <a:off x="731520" y="1560000"/>
+            <a:ext cx="10728960" cy="3200000"/>
+          </a:xfrm>
+          <a:prstGeom prst="rect">
+            <a:avLst/>
+          </a:prstGeom>
+          <a:noFill/>
+          <a:ln>
+            <a:noFill/>
+          </a:ln>
+        </p:spPr>
+        <p:txBody>
+          <a:bodyPr wrap="square" lIns="0" tIns="0" rIns="0" bIns="0" anchor="t">
+            <a:normAutofit/>
+          </a:bodyPr>
+          <a:lstStyle/>
+          <a:p>
+            <a:pPr marL="228600" indent="-228600" algn="l">
+              <a:spcBef>
+                <a:spcPts val="520"/>
+              </a:spcBef>
+              <a:buClr>
+                <a:srgbClr val="C55A11"/>
+              </a:buClr>
+              <a:buSzPct val="90000"/>
+              <a:buFont typeface="Arial"/>
+              <a:buChar char="■"/>
+            </a:pPr>
+            <a:r>
+              <a:rPr lang="en-US" sz="1550" b="0" i="0" dirty="0">
+                <a:solidFill>
+                  <a:srgbClr val="1A1D21"/>
+                </a:solidFill>
+                <a:latin typeface="Calibri"/>
+              </a:rPr>
+              <a:t>1. Build a realistic LLM workload generator</a:t>
+            </a:r>
+          </a:p>
+          <a:p>
+            <a:pPr marL="457200" indent="-228600" algn="l">
+              <a:spcBef>
+                <a:spcPts val="380"/>
+              </a:spcBef>
+              <a:buClr>
+                <a:srgbClr val="8FA3BF"/>
+              </a:buClr>
+              <a:buSzPct val="90000"/>
+              <a:buFont typeface="Arial"/>
+              <a:buChar char="–"/>
+            </a:pPr>
+            <a:r>
+              <a:rPr lang="en-US" sz="1400" b="0" i="0" dirty="0">
+                <a:solidFill>
+                  <a:srgbClr val="5F6368"/>
+                </a:solidFill>
+                <a:latin typeface="Calibri"/>
+              </a:rPr>
+              <a:t>No free benchmark has the access pattern H3 needs -- we measured this</a:t>
+            </a:r>
+          </a:p>
+          <a:p>
+            <a:pPr marL="457200" indent="-228600" algn="l">
+              <a:spcBef>
+                <a:spcPts val="380"/>
+              </a:spcBef>
+              <a:buClr>
+                <a:srgbClr val="8FA3BF"/>
+              </a:buClr>
+              <a:buSzPct val="90000"/>
+              <a:buFont typeface="Arial"/>
+              <a:buChar char="–"/>
+            </a:pPr>
+            <a:r>
+              <a:rPr lang="en-US" sz="1400" b="0" i="0" dirty="0">
+                <a:solidFill>
+                  <a:srgbClr val="5F6368"/>
+                </a:solidFill>
+                <a:latin typeface="Calibri"/>
+              </a:rPr>
+              <a:t>The pattern is fully predictable, so it can be generated rather than traced</a:t>
+            </a:r>
+          </a:p>
+          <a:p>
+            <a:pPr marL="228600" indent="-228600" algn="l">
+              <a:spcBef>
+                <a:spcPts val="520"/>
+              </a:spcBef>
+              <a:buClr>
+                <a:srgbClr val="C55A11"/>
+              </a:buClr>
+              <a:buSzPct val="90000"/>
+              <a:buFont typeface="Arial"/>
+              <a:buChar char="■"/>
+            </a:pPr>
+            <a:r>
+              <a:rPr lang="en-US" sz="1550" b="0" i="0" dirty="0">
+                <a:solidFill>
+                  <a:srgbClr val="1A1D21"/>
+                </a:solidFill>
+                <a:latin typeface="Calibri"/>
+              </a:rPr>
+              <a:t>2. Fix the comparison point before generating any real traces</a:t>
+            </a:r>
+          </a:p>
+          <a:p>
+            <a:pPr marL="457200" indent="-228600" algn="l">
+              <a:spcBef>
+                <a:spcPts val="380"/>
+              </a:spcBef>
+              <a:buClr>
+                <a:srgbClr val="8FA3BF"/>
+              </a:buClr>
+              <a:buSzPct val="90000"/>
+              <a:buFont typeface="Arial"/>
+              <a:buChar char="–"/>
+            </a:pPr>
+            <a:r>
+              <a:rPr lang="en-US" sz="1400" b="0" i="0" dirty="0">
+                <a:solidFill>
+                  <a:srgbClr val="5F6368"/>
+                </a:solidFill>
+                <a:latin typeface="Calibri"/>
+              </a:rPr>
+              <a:t>The paper compares at equal GPU count, where H3 allows a 2.6x larger batch</a:t>
+            </a:r>
+          </a:p>
+          <a:p>
+            <a:pPr marL="228600" indent="-228600" algn="l">
+              <a:spcBef>
+                <a:spcPts val="520"/>
+              </a:spcBef>
+              <a:buClr>
+                <a:srgbClr val="C55A11"/>
+              </a:buClr>
+              <a:buSzPct val="90000"/>
+              <a:buFont typeface="Arial"/>
+              <a:buChar char="■"/>
+            </a:pPr>
+            <a:r>
+              <a:rPr lang="en-US" sz="1550" b="0" i="0" dirty="0">
+                <a:solidFill>
+                  <a:srgbClr val="1A1D21"/>
+                </a:solidFill>
+                <a:latin typeface="Calibri"/>
+              </a:rPr>
+              <a:t>3. Complete the power model if the throughput-per-watt claim is needed</a:t>
+            </a:r>
+          </a:p>
+          <a:p>
+            <a:pPr marL="228600" indent="-228600" algn="l">
+              <a:spcBef>
+                <a:spcPts val="520"/>
+              </a:spcBef>
+              <a:buClr>
+                <a:srgbClr val="C55A11"/>
+              </a:buClr>
+              <a:buSzPct val="90000"/>
+              <a:buFont typeface="Arial"/>
+              <a:buChar char="■"/>
+            </a:pPr>
+            <a:r>
+              <a:rPr lang="en-US" sz="1550" b="0" i="0" dirty="0">
+                <a:solidFill>
+                  <a:srgbClr val="1A1D21"/>
+                </a:solidFill>
+                <a:latin typeface="Calibri"/>
+              </a:rPr>
+              <a:t>4. Run the sensitivity sweeps the analytical model cannot reach</a:t>
+            </a:r>
+          </a:p>
+        </p:txBody>
+      </p:sp>
+      <p:sp>
+        <p:nvSpPr>
+          <p:cNvPr id="333" name="nb"/>
+          <p:cNvSpPr txBox="1"/>
+          <p:nvPr/>
+        </p:nvSpPr>
+        <p:spPr>
+          <a:xfrm>
+            <a:off x="731520" y="4980000"/>
+            <a:ext cx="68580" cy="1150000"/>
+          </a:xfrm>
+          <a:prstGeom prst="rect">
+            <a:avLst/>
+          </a:prstGeom>
+          <a:solidFill>
+            <a:srgbClr val="C55A11"/>
+          </a:solidFill>
+          <a:ln>
+            <a:noFill/>
+          </a:ln>
+        </p:spPr>
+        <p:txBody>
+          <a:bodyPr wrap="square" lIns="137160" tIns="91440" rIns="137160" bIns="91440" anchor="t">
+            <a:normAutofit/>
+          </a:bodyPr>
+          <a:lstStyle/>
+          <a:p>
+            <a:endParaRPr lang="en-US"/>
+          </a:p>
+        </p:txBody>
+      </p:sp>
+      <p:sp>
+        <p:nvSpPr>
+          <p:cNvPr id="334" name="sh"/>
+          <p:cNvSpPr txBox="1"/>
+          <p:nvPr/>
+        </p:nvSpPr>
+        <p:spPr>
+          <a:xfrm>
+            <a:off x="800100" y="4980000"/>
+            <a:ext cx="10660380" cy="1150000"/>
+          </a:xfrm>
+          <a:prstGeom prst="rect">
+            <a:avLst/>
+          </a:prstGeom>
+          <a:solidFill>
+            <a:srgbClr val="EAEFF6"/>
+          </a:solidFill>
+          <a:ln>
+            <a:noFill/>
+          </a:ln>
+        </p:spPr>
+        <p:txBody>
+          <a:bodyPr wrap="square" lIns="137160" tIns="91440" rIns="137160" bIns="91440" anchor="t">
+            <a:normAutofit/>
+          </a:bodyPr>
+          <a:lstStyle/>
+          <a:p>
+            <a:pPr marL="0" indent="0" algn="l">
+              <a:buNone/>
+            </a:pPr>
+            <a:r>
+              <a:rPr lang="en-US" sz="1000" b="1" i="0" spc="200" dirty="0">
+                <a:solidFill>
+                  <a:srgbClr val="C55A11"/>
+                </a:solidFill>
+                <a:latin typeface="Calibri"/>
+              </a:rPr>
+              <a:t>IN PLAIN WORDS</a:t>
+            </a:r>
+          </a:p>
+          <a:p>
+            <a:pPr marL="0" indent="0" algn="l">
+              <a:spcBef>
+                <a:spcPts val="250"/>
+              </a:spcBef>
+              <a:buNone/>
+            </a:pPr>
+            <a:r>
+              <a:rPr lang="en-US" sz="1400" b="0" i="0" dirty="0">
+                <a:solidFill>
+                  <a:srgbClr val="1A1D21"/>
+                </a:solidFill>
+                <a:latin typeface="Calibri"/>
+              </a:rPr>
+              <a:t>Step 1 is now the priority because we established that no downloadable benchmark can exercise flash. Since LLM access patterns are completely predictable, generating one is a legitimate method, not a shortcut.</a:t>
             </a:r>
           </a:p>
         </p:txBody>
